--- a/docs/design/recsys_diagram.pptx
+++ b/docs/design/recsys_diagram.pptx
@@ -7,7 +7,7 @@
   <p:sldIdLst>
     <p:sldId id="256" r:id="rId7"/>
   </p:sldIdLst>
-  <p:sldSz cx="16459200" cy="11521440" type="screen4x3"/>
+  <p:sldSz cx="19659600" cy="12070080" type="screen4x3"/>
   <p:notesSz cx="6858000" cy="9144000"/>
   <p:defaultTextStyle>
     <a:defPPr>
@@ -3517,12 +3517,13 @@
         <p:spPr>
           <a:xfrm>
             <a:off x="548640" y="256032"/>
-            <a:ext cx="15361920" cy="502920"/>
+            <a:ext cx="18562320" cy="502920"/>
           </a:xfrm>
           <a:prstGeom prst="rect">
             <a:avLst/>
           </a:prstGeom>
           <a:noFill/>
+          <a:effectLst/>
         </p:spPr>
         <p:txBody>
           <a:bodyPr wrap="square" lIns="54864" rIns="54864" tIns="18288" bIns="18288" anchor="ctr">
@@ -3542,7 +3543,7 @@
                 </a:solidFill>
                 <a:latin typeface="Liberation Sans"/>
               </a:rPr>
-              <a:t>Recommendation Architecture | Text vs. Graph</a:t>
+              <a:t>Recommendation Architecture | Baseline vs. Text vs. Graph</a:t>
             </a:r>
           </a:p>
         </p:txBody>
@@ -3556,12 +3557,13 @@
         <p:spPr>
           <a:xfrm>
             <a:off x="566928" y="795528"/>
-            <a:ext cx="15270480" cy="320040"/>
+            <a:ext cx="18470880" cy="320040"/>
           </a:xfrm>
           <a:prstGeom prst="rect">
             <a:avLst/>
           </a:prstGeom>
           <a:noFill/>
+          <a:effectLst/>
         </p:spPr>
         <p:txBody>
           <a:bodyPr wrap="square" lIns="54864" rIns="54864" tIns="18288" bIns="18288" anchor="ctr">
@@ -3575,13 +3577,13 @@
               </a:spcAft>
             </a:pPr>
             <a:r>
-              <a:rPr sz="1500" b="0">
+              <a:rPr sz="1500">
                 <a:solidFill>
-                  <a:srgbClr val="617286"/>
+                  <a:srgbClr val="62768D"/>
                 </a:solidFill>
-                <a:latin typeface="Liberation Sans"/>
+                <a:latin typeface="Aptos"/>
               </a:rPr>
-              <a:t>Dimension flow  /  Text: current implementation  /  Graph: current implementation (v3) · BGE large / 1,024</a:t>
+              <a:t>Proposed design  /  Baseline: Title 512  /  Text &amp; Graph: Title 128 + Video 384  /  Final LayerNorm: 512  /  Frozen BGE large: 1,024</a:t>
             </a:r>
           </a:p>
         </p:txBody>
@@ -3594,18 +3596,18 @@
         </p:nvSpPr>
         <p:spPr>
           <a:xfrm>
-            <a:off x="502920" y="1298448"/>
-            <a:ext cx="4572000" cy="7260336"/>
+            <a:off x="3703320" y="1298448"/>
+            <a:ext cx="4572000" cy="7973568"/>
           </a:xfrm>
           <a:prstGeom prst="roundRect">
             <a:avLst>
-              <a:gd name="adj" fmla="val 10000"/>
+              <a:gd name="adj" fmla="val 3000"/>
             </a:avLst>
           </a:prstGeom>
           <a:solidFill>
             <a:srgbClr val="F7FAFF"/>
           </a:solidFill>
-          <a:ln w="14604">
+          <a:ln w="13335">
             <a:solidFill>
               <a:srgbClr val="CADAF1"/>
             </a:solidFill>
@@ -3619,7 +3621,7 @@
           <a:fillRef idx="3">
             <a:schemeClr val="accent1"/>
           </a:fillRef>
-          <a:effectRef idx="2">
+          <a:effectRef idx="0">
             <a:schemeClr val="accent1"/>
           </a:effectRef>
           <a:fontRef idx="minor">
@@ -3642,13 +3644,14 @@
         </p:nvSpPr>
         <p:spPr>
           <a:xfrm>
-            <a:off x="534924" y="1312163"/>
-            <a:ext cx="4507992" cy="7232904"/>
+            <a:off x="3735324" y="1312163"/>
+            <a:ext cx="4507992" cy="7781544"/>
           </a:xfrm>
           <a:prstGeom prst="rect">
             <a:avLst/>
           </a:prstGeom>
           <a:noFill/>
+          <a:effectLst/>
         </p:spPr>
         <p:txBody>
           <a:bodyPr wrap="square" lIns="54864" rIns="54864" tIns="18288" bIns="18288" anchor="ctr">
@@ -3672,18 +3675,18 @@
         </p:nvSpPr>
         <p:spPr>
           <a:xfrm>
-            <a:off x="5349240" y="1298448"/>
-            <a:ext cx="10607040" cy="7260336"/>
+            <a:off x="8549640" y="1298448"/>
+            <a:ext cx="10607040" cy="7973568"/>
           </a:xfrm>
           <a:prstGeom prst="roundRect">
             <a:avLst>
-              <a:gd name="adj" fmla="val 10000"/>
+              <a:gd name="adj" fmla="val 1720"/>
             </a:avLst>
           </a:prstGeom>
           <a:solidFill>
             <a:srgbClr val="F5FBFA"/>
           </a:solidFill>
-          <a:ln w="14604">
+          <a:ln w="13335">
             <a:solidFill>
               <a:srgbClr val="BDDFDC"/>
             </a:solidFill>
@@ -3697,7 +3700,7 @@
           <a:fillRef idx="3">
             <a:schemeClr val="accent1"/>
           </a:fillRef>
-          <a:effectRef idx="2">
+          <a:effectRef idx="0">
             <a:schemeClr val="accent1"/>
           </a:effectRef>
           <a:fontRef idx="minor">
@@ -3720,13 +3723,14 @@
         </p:nvSpPr>
         <p:spPr>
           <a:xfrm>
-            <a:off x="5381244" y="1312163"/>
-            <a:ext cx="10543032" cy="7232904"/>
+            <a:off x="8581644" y="1312163"/>
+            <a:ext cx="10543032" cy="7781544"/>
           </a:xfrm>
           <a:prstGeom prst="rect">
             <a:avLst/>
           </a:prstGeom>
           <a:noFill/>
+          <a:effectLst/>
         </p:spPr>
         <p:txBody>
           <a:bodyPr wrap="square" lIns="54864" rIns="54864" tIns="18288" bIns="18288" anchor="ctr">
@@ -3750,13 +3754,14 @@
         </p:nvSpPr>
         <p:spPr>
           <a:xfrm>
-            <a:off x="731520" y="1444752"/>
+            <a:off x="3931920" y="1444752"/>
             <a:ext cx="4114800" cy="365760"/>
           </a:xfrm>
           <a:prstGeom prst="rect">
             <a:avLst/>
           </a:prstGeom>
           <a:noFill/>
+          <a:effectLst/>
         </p:spPr>
         <p:txBody>
           <a:bodyPr wrap="square" lIns="54864" rIns="54864" tIns="18288" bIns="18288" anchor="ctr">
@@ -3789,13 +3794,14 @@
         </p:nvSpPr>
         <p:spPr>
           <a:xfrm>
-            <a:off x="5577840" y="1444752"/>
+            <a:off x="8778240" y="1444752"/>
             <a:ext cx="9966960" cy="365760"/>
           </a:xfrm>
           <a:prstGeom prst="rect">
             <a:avLst/>
           </a:prstGeom>
           <a:noFill/>
+          <a:effectLst/>
         </p:spPr>
         <p:txBody>
           <a:bodyPr wrap="square" lIns="54864" rIns="54864" tIns="18288" bIns="18288" anchor="ctr">
@@ -3815,33 +3821,33 @@
                 </a:solidFill>
                 <a:latin typeface="Liberation Sans"/>
               </a:rPr>
-              <a:t>GRAPH PATH  /  1 LAYER</a:t>
-            </a:r>
-          </a:p>
-        </p:txBody>
-      </p:sp>
-      <p:sp>
-        <p:nvSpPr>
-          <p:cNvPr id="10" name="Rounded Rectangle 9"/>
+              <a:t>GRAPH PATH</a:t>
+            </a:r>
+          </a:p>
+        </p:txBody>
+      </p:sp>
+      <p:sp>
+        <p:nvSpPr>
+          <p:cNvPr id="83" name="Rounded Rectangle 82"/>
           <p:cNvSpPr/>
           <p:nvPr/>
         </p:nvSpPr>
         <p:spPr>
           <a:xfrm>
-            <a:off x="886968" y="2057400"/>
-            <a:ext cx="3794760" cy="685800"/>
+            <a:off x="502920" y="9482328"/>
+            <a:ext cx="18653758" cy="1865376"/>
           </a:xfrm>
           <a:prstGeom prst="roundRect">
             <a:avLst>
-              <a:gd name="adj" fmla="val 10000"/>
+              <a:gd name="adj" fmla="val 7352"/>
             </a:avLst>
           </a:prstGeom>
           <a:solidFill>
-            <a:srgbClr val="FFFFFF"/>
+            <a:srgbClr val="F6F8FB"/>
           </a:solidFill>
-          <a:ln w="14604">
+          <a:ln w="13335">
             <a:solidFill>
-              <a:srgbClr val="2864B7"/>
+              <a:srgbClr val="AAB9C7"/>
             </a:solidFill>
           </a:ln>
           <a:effectLst/>
@@ -3853,7 +3859,7 @@
           <a:fillRef idx="3">
             <a:schemeClr val="accent1"/>
           </a:fillRef>
-          <a:effectRef idx="2">
+          <a:effectRef idx="0">
             <a:schemeClr val="accent1"/>
           </a:effectRef>
           <a:fontRef idx="minor">
@@ -3870,19 +3876,20 @@
       </p:sp>
       <p:sp>
         <p:nvSpPr>
-          <p:cNvPr id="11" name="TextBox 10"/>
+          <p:cNvPr id="84" name="TextBox 83"/>
           <p:cNvSpPr txBox="1"/>
           <p:nvPr/>
         </p:nvSpPr>
         <p:spPr>
           <a:xfrm>
-            <a:off x="918971" y="2071116"/>
-            <a:ext cx="3730752" cy="658368"/>
+            <a:off x="541552" y="9496044"/>
+            <a:ext cx="18576494" cy="1837944"/>
           </a:xfrm>
           <a:prstGeom prst="rect">
             <a:avLst/>
           </a:prstGeom>
           <a:noFill/>
+          <a:effectLst/>
         </p:spPr>
         <p:txBody>
           <a:bodyPr wrap="square" lIns="54864" rIns="54864" tIns="18288" bIns="18288" anchor="ctr">
@@ -3895,3181 +3902,25 @@
                 <a:spcPts val="200"/>
               </a:spcAft>
             </a:pPr>
-            <a:r>
-              <a:rPr sz="2100" b="0">
-                <a:solidFill>
-                  <a:srgbClr val="142B43"/>
-                </a:solidFill>
-                <a:latin typeface="Liberation Sans"/>
-              </a:rPr>
-              <a:t>Title + video summary</a:t>
-            </a:r>
-          </a:p>
-          <a:p>
-            <a:pPr algn="ctr">
-              <a:spcAft>
-                <a:spcPts val="200"/>
-              </a:spcAft>
-            </a:pPr>
-            <a:r>
-              <a:rPr sz="2100" b="0">
-                <a:solidFill>
-                  <a:srgbClr val="142B43"/>
-                </a:solidFill>
-                <a:latin typeface="Liberation Sans"/>
-              </a:rPr>
-              <a:t>Text concatenation</a:t>
-            </a:r>
-          </a:p>
-        </p:txBody>
-      </p:sp>
-      <p:sp>
-        <p:nvSpPr>
-          <p:cNvPr id="12" name="Rounded Rectangle 11"/>
-          <p:cNvSpPr/>
-          <p:nvPr/>
-        </p:nvSpPr>
-        <p:spPr>
-          <a:xfrm>
-            <a:off x="886968" y="3291840"/>
-            <a:ext cx="3794760" cy="685800"/>
-          </a:xfrm>
-          <a:prstGeom prst="roundRect">
-            <a:avLst>
-              <a:gd name="adj" fmla="val 10000"/>
-            </a:avLst>
-          </a:prstGeom>
-          <a:solidFill>
-            <a:srgbClr val="F0F3F6"/>
-          </a:solidFill>
-          <a:ln w="14604">
-            <a:solidFill>
-              <a:srgbClr val="2864B7"/>
-            </a:solidFill>
-          </a:ln>
-          <a:effectLst/>
-        </p:spPr>
-        <p:style>
-          <a:lnRef idx="1">
-            <a:schemeClr val="accent1"/>
-          </a:lnRef>
-          <a:fillRef idx="3">
-            <a:schemeClr val="accent1"/>
-          </a:fillRef>
-          <a:effectRef idx="2">
-            <a:schemeClr val="accent1"/>
-          </a:effectRef>
-          <a:fontRef idx="minor">
-            <a:schemeClr val="lt1"/>
-          </a:fontRef>
-        </p:style>
-        <p:txBody>
-          <a:bodyPr rtlCol="0" anchor="ctr"/>
-          <a:lstStyle/>
-          <a:p>
-            <a:pPr algn="ctr"/>
-          </a:p>
-        </p:txBody>
-      </p:sp>
-      <p:sp>
-        <p:nvSpPr>
-          <p:cNvPr id="13" name="TextBox 12"/>
+          </a:p>
+        </p:txBody>
+      </p:sp>
+      <p:sp>
+        <p:nvSpPr>
+          <p:cNvPr id="85" name="TextBox 84"/>
           <p:cNvSpPr txBox="1"/>
           <p:nvPr/>
         </p:nvSpPr>
         <p:spPr>
           <a:xfrm>
-            <a:off x="918971" y="3305556"/>
-            <a:ext cx="3730752" cy="658368"/>
+            <a:off x="834051" y="9601200"/>
+            <a:ext cx="17881119" cy="310896"/>
           </a:xfrm>
           <a:prstGeom prst="rect">
             <a:avLst/>
           </a:prstGeom>
           <a:noFill/>
-        </p:spPr>
-        <p:txBody>
-          <a:bodyPr wrap="square" lIns="54864" rIns="54864" tIns="18288" bIns="18288" anchor="ctr">
-            <a:spAutoFit/>
-          </a:bodyPr>
-          <a:lstStyle/>
-          <a:p>
-            <a:pPr algn="ctr">
-              <a:spcAft>
-                <a:spcPts val="200"/>
-              </a:spcAft>
-            </a:pPr>
-            <a:r>
-              <a:rPr sz="2100" b="0">
-                <a:solidFill>
-                  <a:srgbClr val="142B43"/>
-                </a:solidFill>
-                <a:latin typeface="Liberation Sans"/>
-              </a:rPr>
-              <a:t>BGE encoder  [frozen]</a:t>
-            </a:r>
-          </a:p>
-          <a:p>
-            <a:pPr algn="ctr">
-              <a:spcAft>
-                <a:spcPts val="200"/>
-              </a:spcAft>
-            </a:pPr>
-            <a:r>
-              <a:rPr sz="2100" b="0">
-                <a:solidFill>
-                  <a:srgbClr val="142B43"/>
-                </a:solidFill>
-                <a:latin typeface="Liberation Sans"/>
-              </a:rPr>
-              <a:t>Output: 1,024</a:t>
-            </a:r>
-          </a:p>
-        </p:txBody>
-      </p:sp>
-      <p:sp>
-        <p:nvSpPr>
-          <p:cNvPr id="14" name="Rounded Rectangle 13"/>
-          <p:cNvSpPr/>
-          <p:nvPr/>
-        </p:nvSpPr>
-        <p:spPr>
-          <a:xfrm>
-            <a:off x="886968" y="4617720"/>
-            <a:ext cx="3794760" cy="685800"/>
-          </a:xfrm>
-          <a:prstGeom prst="roundRect">
-            <a:avLst>
-              <a:gd name="adj" fmla="val 10000"/>
-            </a:avLst>
-          </a:prstGeom>
-          <a:solidFill>
-            <a:srgbClr val="FFFFFF"/>
-          </a:solidFill>
-          <a:ln w="14604">
-            <a:solidFill>
-              <a:srgbClr val="2864B7"/>
-            </a:solidFill>
-          </a:ln>
-          <a:effectLst/>
-        </p:spPr>
-        <p:style>
-          <a:lnRef idx="1">
-            <a:schemeClr val="accent1"/>
-          </a:lnRef>
-          <a:fillRef idx="3">
-            <a:schemeClr val="accent1"/>
-          </a:fillRef>
-          <a:effectRef idx="2">
-            <a:schemeClr val="accent1"/>
-          </a:effectRef>
-          <a:fontRef idx="minor">
-            <a:schemeClr val="lt1"/>
-          </a:fontRef>
-        </p:style>
-        <p:txBody>
-          <a:bodyPr rtlCol="0" anchor="ctr"/>
-          <a:lstStyle/>
-          <a:p>
-            <a:pPr algn="ctr"/>
-          </a:p>
-        </p:txBody>
-      </p:sp>
-      <p:sp>
-        <p:nvSpPr>
-          <p:cNvPr id="15" name="TextBox 14"/>
-          <p:cNvSpPr txBox="1"/>
-          <p:nvPr/>
-        </p:nvSpPr>
-        <p:spPr>
-          <a:xfrm>
-            <a:off x="918971" y="4631436"/>
-            <a:ext cx="3730752" cy="658368"/>
-          </a:xfrm>
-          <a:prstGeom prst="rect">
-            <a:avLst/>
-          </a:prstGeom>
-          <a:noFill/>
-        </p:spPr>
-        <p:txBody>
-          <a:bodyPr wrap="square" lIns="54864" rIns="54864" tIns="18288" bIns="18288" anchor="ctr">
-            <a:spAutoFit/>
-          </a:bodyPr>
-          <a:lstStyle/>
-          <a:p>
-            <a:pPr algn="ctr">
-              <a:spcAft>
-                <a:spcPts val="200"/>
-              </a:spcAft>
-            </a:pPr>
-            <a:r>
-              <a:rPr sz="2100" b="0">
-                <a:solidFill>
-                  <a:srgbClr val="142B43"/>
-                </a:solidFill>
-                <a:latin typeface="Liberation Sans"/>
-              </a:rPr>
-              <a:t>Linear projection</a:t>
-            </a:r>
-          </a:p>
-          <a:p>
-            <a:pPr algn="ctr">
-              <a:spcAft>
-                <a:spcPts val="200"/>
-              </a:spcAft>
-            </a:pPr>
-            <a:r>
-              <a:rPr sz="2100" b="0">
-                <a:solidFill>
-                  <a:srgbClr val="142B43"/>
-                </a:solidFill>
-                <a:latin typeface="Liberation Sans"/>
-              </a:rPr>
-              <a:t>1,024 → 512</a:t>
-            </a:r>
-          </a:p>
-        </p:txBody>
-      </p:sp>
-      <p:sp>
-        <p:nvSpPr>
-          <p:cNvPr id="16" name="Rounded Rectangle 15"/>
-          <p:cNvSpPr/>
-          <p:nvPr/>
-        </p:nvSpPr>
-        <p:spPr>
-          <a:xfrm>
-            <a:off x="886968" y="7269480"/>
-            <a:ext cx="3794760" cy="640080"/>
-          </a:xfrm>
-          <a:prstGeom prst="roundRect">
-            <a:avLst>
-              <a:gd name="adj" fmla="val 10000"/>
-            </a:avLst>
-          </a:prstGeom>
-          <a:solidFill>
-            <a:srgbClr val="E7F0FF"/>
-          </a:solidFill>
-          <a:ln w="14604">
-            <a:solidFill>
-              <a:srgbClr val="2864B7"/>
-            </a:solidFill>
-          </a:ln>
-          <a:effectLst/>
-        </p:spPr>
-        <p:style>
-          <a:lnRef idx="1">
-            <a:schemeClr val="accent1"/>
-          </a:lnRef>
-          <a:fillRef idx="3">
-            <a:schemeClr val="accent1"/>
-          </a:fillRef>
-          <a:effectRef idx="2">
-            <a:schemeClr val="accent1"/>
-          </a:effectRef>
-          <a:fontRef idx="minor">
-            <a:schemeClr val="lt1"/>
-          </a:fontRef>
-        </p:style>
-        <p:txBody>
-          <a:bodyPr rtlCol="0" anchor="ctr"/>
-          <a:lstStyle/>
-          <a:p>
-            <a:pPr algn="ctr"/>
-          </a:p>
-        </p:txBody>
-      </p:sp>
-      <p:sp>
-        <p:nvSpPr>
-          <p:cNvPr id="17" name="TextBox 16"/>
-          <p:cNvSpPr txBox="1"/>
-          <p:nvPr/>
-        </p:nvSpPr>
-        <p:spPr>
-          <a:xfrm>
-            <a:off x="918971" y="7283196"/>
-            <a:ext cx="3730752" cy="612647"/>
-          </a:xfrm>
-          <a:prstGeom prst="rect">
-            <a:avLst/>
-          </a:prstGeom>
-          <a:noFill/>
-        </p:spPr>
-        <p:txBody>
-          <a:bodyPr wrap="square" lIns="54864" rIns="54864" tIns="18288" bIns="18288" anchor="ctr">
-            <a:spAutoFit/>
-          </a:bodyPr>
-          <a:lstStyle/>
-          <a:p>
-            <a:pPr algn="ctr">
-              <a:spcAft>
-                <a:spcPts val="200"/>
-              </a:spcAft>
-            </a:pPr>
-            <a:r>
-              <a:rPr sz="2100" b="0">
-                <a:solidFill>
-                  <a:srgbClr val="142B43"/>
-                </a:solidFill>
-                <a:latin typeface="Liberation Sans"/>
-              </a:rPr>
-              <a:t>Residual MLP</a:t>
-            </a:r>
-          </a:p>
-          <a:p>
-            <a:pPr algn="ctr">
-              <a:spcAft>
-                <a:spcPts val="200"/>
-              </a:spcAft>
-            </a:pPr>
-            <a:r>
-              <a:rPr sz="2100" b="0">
-                <a:solidFill>
-                  <a:srgbClr val="142B43"/>
-                </a:solidFill>
-                <a:latin typeface="Liberation Sans"/>
-              </a:rPr>
-              <a:t>512 → 512</a:t>
-            </a:r>
-          </a:p>
-        </p:txBody>
-      </p:sp>
-      <p:cxnSp>
-        <p:nvCxnSpPr>
-          <p:cNvPr id="18" name="Connector 17"/>
-          <p:cNvCxnSpPr/>
-          <p:nvPr/>
-        </p:nvCxnSpPr>
-        <p:spPr>
-          <a:xfrm>
-            <a:off x="2784348" y="2743200"/>
-            <a:ext cx="0" cy="548640"/>
-          </a:xfrm>
-          <a:prstGeom prst="line">
-            <a:avLst/>
-          </a:prstGeom>
-          <a:ln w="17780">
-            <a:solidFill>
-              <a:srgbClr val="2864B7"/>
-            </a:solidFill>
-            <a:tailEnd type="triangle" w="sm" len="sm"/>
-          </a:ln>
-        </p:spPr>
-        <p:style>
-          <a:lnRef idx="2">
-            <a:schemeClr val="accent1"/>
-          </a:lnRef>
-          <a:fillRef idx="0">
-            <a:schemeClr val="accent1"/>
-          </a:fillRef>
-          <a:effectRef idx="1">
-            <a:schemeClr val="accent1"/>
-          </a:effectRef>
-          <a:fontRef idx="minor">
-            <a:schemeClr val="tx1"/>
-          </a:fontRef>
-        </p:style>
-      </p:cxnSp>
-      <p:cxnSp>
-        <p:nvCxnSpPr>
-          <p:cNvPr id="19" name="Connector 18"/>
-          <p:cNvCxnSpPr/>
-          <p:nvPr/>
-        </p:nvCxnSpPr>
-        <p:spPr>
-          <a:xfrm>
-            <a:off x="2784348" y="3977639"/>
-            <a:ext cx="0" cy="640081"/>
-          </a:xfrm>
-          <a:prstGeom prst="line">
-            <a:avLst/>
-          </a:prstGeom>
-          <a:ln w="17780">
-            <a:solidFill>
-              <a:srgbClr val="2864B7"/>
-            </a:solidFill>
-            <a:tailEnd type="triangle" w="sm" len="sm"/>
-          </a:ln>
-        </p:spPr>
-        <p:style>
-          <a:lnRef idx="2">
-            <a:schemeClr val="accent1"/>
-          </a:lnRef>
-          <a:fillRef idx="0">
-            <a:schemeClr val="accent1"/>
-          </a:fillRef>
-          <a:effectRef idx="1">
-            <a:schemeClr val="accent1"/>
-          </a:effectRef>
-          <a:fontRef idx="minor">
-            <a:schemeClr val="tx1"/>
-          </a:fontRef>
-        </p:style>
-      </p:cxnSp>
-      <p:cxnSp>
-        <p:nvCxnSpPr>
-          <p:cNvPr id="20" name="Connector 19"/>
-          <p:cNvCxnSpPr/>
-          <p:nvPr/>
-        </p:nvCxnSpPr>
-        <p:spPr>
-          <a:xfrm>
-            <a:off x="2784348" y="5303520"/>
-            <a:ext cx="0" cy="1965960"/>
-          </a:xfrm>
-          <a:prstGeom prst="line">
-            <a:avLst/>
-          </a:prstGeom>
-          <a:ln w="17780">
-            <a:solidFill>
-              <a:srgbClr val="2864B7"/>
-            </a:solidFill>
-            <a:tailEnd type="triangle" w="sm" len="sm"/>
-          </a:ln>
-        </p:spPr>
-        <p:style>
-          <a:lnRef idx="2">
-            <a:schemeClr val="accent1"/>
-          </a:lnRef>
-          <a:fillRef idx="0">
-            <a:schemeClr val="accent1"/>
-          </a:fillRef>
-          <a:effectRef idx="1">
-            <a:schemeClr val="accent1"/>
-          </a:effectRef>
-          <a:fontRef idx="minor">
-            <a:schemeClr val="tx1"/>
-          </a:fontRef>
-        </p:style>
-      </p:cxnSp>
-      <p:sp>
-        <p:nvSpPr>
-          <p:cNvPr id="21" name="Rounded Rectangle 20"/>
-          <p:cNvSpPr/>
-          <p:nvPr/>
-        </p:nvSpPr>
-        <p:spPr>
-          <a:xfrm>
-            <a:off x="5669280" y="2011680"/>
-            <a:ext cx="2286000" cy="502920"/>
-          </a:xfrm>
-          <a:prstGeom prst="roundRect">
-            <a:avLst>
-              <a:gd name="adj" fmla="val 10000"/>
-            </a:avLst>
-          </a:prstGeom>
-          <a:solidFill>
-            <a:srgbClr val="FFFFFF"/>
-          </a:solidFill>
-          <a:ln w="14604">
-            <a:solidFill>
-              <a:srgbClr val="087E83"/>
-            </a:solidFill>
-          </a:ln>
-          <a:effectLst/>
-        </p:spPr>
-        <p:style>
-          <a:lnRef idx="1">
-            <a:schemeClr val="accent1"/>
-          </a:lnRef>
-          <a:fillRef idx="3">
-            <a:schemeClr val="accent1"/>
-          </a:fillRef>
-          <a:effectRef idx="2">
-            <a:schemeClr val="accent1"/>
-          </a:effectRef>
-          <a:fontRef idx="minor">
-            <a:schemeClr val="lt1"/>
-          </a:fontRef>
-        </p:style>
-        <p:txBody>
-          <a:bodyPr rtlCol="0" anchor="ctr"/>
-          <a:lstStyle/>
-          <a:p>
-            <a:pPr algn="ctr"/>
-          </a:p>
-        </p:txBody>
-      </p:sp>
-      <p:sp>
-        <p:nvSpPr>
-          <p:cNvPr id="22" name="TextBox 21"/>
-          <p:cNvSpPr txBox="1"/>
-          <p:nvPr/>
-        </p:nvSpPr>
-        <p:spPr>
-          <a:xfrm>
-            <a:off x="5701284" y="2025396"/>
-            <a:ext cx="2221992" cy="475488"/>
-          </a:xfrm>
-          <a:prstGeom prst="rect">
-            <a:avLst/>
-          </a:prstGeom>
-          <a:noFill/>
-        </p:spPr>
-        <p:txBody>
-          <a:bodyPr wrap="square" lIns="54864" rIns="54864" tIns="18288" bIns="18288" anchor="ctr">
-            <a:spAutoFit/>
-          </a:bodyPr>
-          <a:lstStyle/>
-          <a:p>
-            <a:pPr algn="ctr">
-              <a:spcAft>
-                <a:spcPts val="200"/>
-              </a:spcAft>
-            </a:pPr>
-            <a:r>
-              <a:rPr sz="1900" b="1">
-                <a:solidFill>
-                  <a:srgbClr val="142B43"/>
-                </a:solidFill>
-                <a:latin typeface="Liberation Sans"/>
-              </a:rPr>
-              <a:t>Entities</a:t>
-            </a:r>
-          </a:p>
-        </p:txBody>
-      </p:sp>
-      <p:sp>
-        <p:nvSpPr>
-          <p:cNvPr id="23" name="Rounded Rectangle 22"/>
-          <p:cNvSpPr/>
-          <p:nvPr/>
-        </p:nvSpPr>
-        <p:spPr>
-          <a:xfrm>
-            <a:off x="5669280" y="2724912"/>
-            <a:ext cx="2286000" cy="585216"/>
-          </a:xfrm>
-          <a:prstGeom prst="roundRect">
-            <a:avLst>
-              <a:gd name="adj" fmla="val 10000"/>
-            </a:avLst>
-          </a:prstGeom>
-          <a:solidFill>
-            <a:srgbClr val="F0F3F6"/>
-          </a:solidFill>
-          <a:ln w="14604">
-            <a:solidFill>
-              <a:srgbClr val="AAB9C7"/>
-            </a:solidFill>
-          </a:ln>
-          <a:effectLst/>
-        </p:spPr>
-        <p:style>
-          <a:lnRef idx="1">
-            <a:schemeClr val="accent1"/>
-          </a:lnRef>
-          <a:fillRef idx="3">
-            <a:schemeClr val="accent1"/>
-          </a:fillRef>
-          <a:effectRef idx="2">
-            <a:schemeClr val="accent1"/>
-          </a:effectRef>
-          <a:fontRef idx="minor">
-            <a:schemeClr val="lt1"/>
-          </a:fontRef>
-        </p:style>
-        <p:txBody>
-          <a:bodyPr rtlCol="0" anchor="ctr"/>
-          <a:lstStyle/>
-          <a:p>
-            <a:pPr algn="ctr"/>
-          </a:p>
-        </p:txBody>
-      </p:sp>
-      <p:sp>
-        <p:nvSpPr>
-          <p:cNvPr id="24" name="TextBox 23"/>
-          <p:cNvSpPr txBox="1"/>
-          <p:nvPr/>
-        </p:nvSpPr>
-        <p:spPr>
-          <a:xfrm>
-            <a:off x="5701284" y="2738628"/>
-            <a:ext cx="2221992" cy="557784"/>
-          </a:xfrm>
-          <a:prstGeom prst="rect">
-            <a:avLst/>
-          </a:prstGeom>
-          <a:noFill/>
-        </p:spPr>
-        <p:txBody>
-          <a:bodyPr wrap="square" lIns="54864" rIns="54864" tIns="18288" bIns="18288" anchor="ctr">
-            <a:spAutoFit/>
-          </a:bodyPr>
-          <a:lstStyle/>
-          <a:p>
-            <a:pPr algn="ctr">
-              <a:spcAft>
-                <a:spcPts val="200"/>
-              </a:spcAft>
-            </a:pPr>
-            <a:r>
-              <a:rPr sz="1800" b="0">
-                <a:solidFill>
-                  <a:srgbClr val="142B43"/>
-                </a:solidFill>
-                <a:latin typeface="Liberation Sans"/>
-              </a:rPr>
-              <a:t>BGE  [frozen]</a:t>
-            </a:r>
-          </a:p>
-          <a:p>
-            <a:pPr algn="ctr">
-              <a:spcAft>
-                <a:spcPts val="200"/>
-              </a:spcAft>
-            </a:pPr>
-            <a:r>
-              <a:rPr sz="1800" b="0">
-                <a:solidFill>
-                  <a:srgbClr val="142B43"/>
-                </a:solidFill>
-                <a:latin typeface="Liberation Sans"/>
-              </a:rPr>
-              <a:t>E × 1,024</a:t>
-            </a:r>
-          </a:p>
-        </p:txBody>
-      </p:sp>
-      <p:cxnSp>
-        <p:nvCxnSpPr>
-          <p:cNvPr id="25" name="Connector 24"/>
-          <p:cNvCxnSpPr/>
-          <p:nvPr/>
-        </p:nvCxnSpPr>
-        <p:spPr>
-          <a:xfrm>
-            <a:off x="6812280" y="2514600"/>
-            <a:ext cx="0" cy="210312"/>
-          </a:xfrm>
-          <a:prstGeom prst="line">
-            <a:avLst/>
-          </a:prstGeom>
-          <a:ln w="17780">
-            <a:solidFill>
-              <a:srgbClr val="617286"/>
-            </a:solidFill>
-            <a:tailEnd type="triangle" w="sm" len="sm"/>
-          </a:ln>
-        </p:spPr>
-        <p:style>
-          <a:lnRef idx="2">
-            <a:schemeClr val="accent1"/>
-          </a:lnRef>
-          <a:fillRef idx="0">
-            <a:schemeClr val="accent1"/>
-          </a:fillRef>
-          <a:effectRef idx="1">
-            <a:schemeClr val="accent1"/>
-          </a:effectRef>
-          <a:fontRef idx="minor">
-            <a:schemeClr val="tx1"/>
-          </a:fontRef>
-        </p:style>
-      </p:cxnSp>
-      <p:sp>
-        <p:nvSpPr>
-          <p:cNvPr id="26" name="Rounded Rectangle 25"/>
-          <p:cNvSpPr/>
-          <p:nvPr/>
-        </p:nvSpPr>
-        <p:spPr>
-          <a:xfrm>
-            <a:off x="8229600" y="2011680"/>
-            <a:ext cx="2286000" cy="502920"/>
-          </a:xfrm>
-          <a:prstGeom prst="roundRect">
-            <a:avLst>
-              <a:gd name="adj" fmla="val 10000"/>
-            </a:avLst>
-          </a:prstGeom>
-          <a:solidFill>
-            <a:srgbClr val="FFFFFF"/>
-          </a:solidFill>
-          <a:ln w="14604">
-            <a:solidFill>
-              <a:srgbClr val="087E83"/>
-            </a:solidFill>
-          </a:ln>
-          <a:effectLst/>
-        </p:spPr>
-        <p:style>
-          <a:lnRef idx="1">
-            <a:schemeClr val="accent1"/>
-          </a:lnRef>
-          <a:fillRef idx="3">
-            <a:schemeClr val="accent1"/>
-          </a:fillRef>
-          <a:effectRef idx="2">
-            <a:schemeClr val="accent1"/>
-          </a:effectRef>
-          <a:fontRef idx="minor">
-            <a:schemeClr val="lt1"/>
-          </a:fontRef>
-        </p:style>
-        <p:txBody>
-          <a:bodyPr rtlCol="0" anchor="ctr"/>
-          <a:lstStyle/>
-          <a:p>
-            <a:pPr algn="ctr"/>
-          </a:p>
-        </p:txBody>
-      </p:sp>
-      <p:sp>
-        <p:nvSpPr>
-          <p:cNvPr id="27" name="TextBox 26"/>
-          <p:cNvSpPr txBox="1"/>
-          <p:nvPr/>
-        </p:nvSpPr>
-        <p:spPr>
-          <a:xfrm>
-            <a:off x="8261604" y="2025396"/>
-            <a:ext cx="2221992" cy="475488"/>
-          </a:xfrm>
-          <a:prstGeom prst="rect">
-            <a:avLst/>
-          </a:prstGeom>
-          <a:noFill/>
-        </p:spPr>
-        <p:txBody>
-          <a:bodyPr wrap="square" lIns="54864" rIns="54864" tIns="18288" bIns="18288" anchor="ctr">
-            <a:spAutoFit/>
-          </a:bodyPr>
-          <a:lstStyle/>
-          <a:p>
-            <a:pPr algn="ctr">
-              <a:spcAft>
-                <a:spcPts val="200"/>
-              </a:spcAft>
-            </a:pPr>
-            <a:r>
-              <a:rPr sz="1900" b="1">
-                <a:solidFill>
-                  <a:srgbClr val="142B43"/>
-                </a:solidFill>
-                <a:latin typeface="Liberation Sans"/>
-              </a:rPr>
-              <a:t>Actions</a:t>
-            </a:r>
-          </a:p>
-        </p:txBody>
-      </p:sp>
-      <p:sp>
-        <p:nvSpPr>
-          <p:cNvPr id="28" name="Rounded Rectangle 27"/>
-          <p:cNvSpPr/>
-          <p:nvPr/>
-        </p:nvSpPr>
-        <p:spPr>
-          <a:xfrm>
-            <a:off x="8229600" y="2724912"/>
-            <a:ext cx="2286000" cy="585216"/>
-          </a:xfrm>
-          <a:prstGeom prst="roundRect">
-            <a:avLst>
-              <a:gd name="adj" fmla="val 10000"/>
-            </a:avLst>
-          </a:prstGeom>
-          <a:solidFill>
-            <a:srgbClr val="F0F3F6"/>
-          </a:solidFill>
-          <a:ln w="14604">
-            <a:solidFill>
-              <a:srgbClr val="AAB9C7"/>
-            </a:solidFill>
-          </a:ln>
-          <a:effectLst/>
-        </p:spPr>
-        <p:style>
-          <a:lnRef idx="1">
-            <a:schemeClr val="accent1"/>
-          </a:lnRef>
-          <a:fillRef idx="3">
-            <a:schemeClr val="accent1"/>
-          </a:fillRef>
-          <a:effectRef idx="2">
-            <a:schemeClr val="accent1"/>
-          </a:effectRef>
-          <a:fontRef idx="minor">
-            <a:schemeClr val="lt1"/>
-          </a:fontRef>
-        </p:style>
-        <p:txBody>
-          <a:bodyPr rtlCol="0" anchor="ctr"/>
-          <a:lstStyle/>
-          <a:p>
-            <a:pPr algn="ctr"/>
-          </a:p>
-        </p:txBody>
-      </p:sp>
-      <p:sp>
-        <p:nvSpPr>
-          <p:cNvPr id="29" name="TextBox 28"/>
-          <p:cNvSpPr txBox="1"/>
-          <p:nvPr/>
-        </p:nvSpPr>
-        <p:spPr>
-          <a:xfrm>
-            <a:off x="8261604" y="2738628"/>
-            <a:ext cx="2221992" cy="557784"/>
-          </a:xfrm>
-          <a:prstGeom prst="rect">
-            <a:avLst/>
-          </a:prstGeom>
-          <a:noFill/>
-        </p:spPr>
-        <p:txBody>
-          <a:bodyPr wrap="square" lIns="54864" rIns="54864" tIns="18288" bIns="18288" anchor="ctr">
-            <a:spAutoFit/>
-          </a:bodyPr>
-          <a:lstStyle/>
-          <a:p>
-            <a:pPr algn="ctr">
-              <a:spcAft>
-                <a:spcPts val="200"/>
-              </a:spcAft>
-            </a:pPr>
-            <a:r>
-              <a:rPr sz="1800" b="0">
-                <a:solidFill>
-                  <a:srgbClr val="142B43"/>
-                </a:solidFill>
-                <a:latin typeface="Liberation Sans"/>
-              </a:rPr>
-              <a:t>BGE  [frozen]</a:t>
-            </a:r>
-          </a:p>
-          <a:p>
-            <a:pPr algn="ctr">
-              <a:spcAft>
-                <a:spcPts val="200"/>
-              </a:spcAft>
-            </a:pPr>
-            <a:r>
-              <a:rPr sz="1800" b="0">
-                <a:solidFill>
-                  <a:srgbClr val="142B43"/>
-                </a:solidFill>
-                <a:latin typeface="Liberation Sans"/>
-              </a:rPr>
-              <a:t>A × 1,024</a:t>
-            </a:r>
-          </a:p>
-        </p:txBody>
-      </p:sp>
-      <p:cxnSp>
-        <p:nvCxnSpPr>
-          <p:cNvPr id="30" name="Connector 29"/>
-          <p:cNvCxnSpPr/>
-          <p:nvPr/>
-        </p:nvCxnSpPr>
-        <p:spPr>
-          <a:xfrm>
-            <a:off x="9372600" y="2514600"/>
-            <a:ext cx="0" cy="210312"/>
-          </a:xfrm>
-          <a:prstGeom prst="line">
-            <a:avLst/>
-          </a:prstGeom>
-          <a:ln w="17780">
-            <a:solidFill>
-              <a:srgbClr val="617286"/>
-            </a:solidFill>
-            <a:tailEnd type="triangle" w="sm" len="sm"/>
-          </a:ln>
-        </p:spPr>
-        <p:style>
-          <a:lnRef idx="2">
-            <a:schemeClr val="accent1"/>
-          </a:lnRef>
-          <a:fillRef idx="0">
-            <a:schemeClr val="accent1"/>
-          </a:fillRef>
-          <a:effectRef idx="1">
-            <a:schemeClr val="accent1"/>
-          </a:effectRef>
-          <a:fontRef idx="minor">
-            <a:schemeClr val="tx1"/>
-          </a:fontRef>
-        </p:style>
-      </p:cxnSp>
-      <p:sp>
-        <p:nvSpPr>
-          <p:cNvPr id="31" name="Rounded Rectangle 30"/>
-          <p:cNvSpPr/>
-          <p:nvPr/>
-        </p:nvSpPr>
-        <p:spPr>
-          <a:xfrm>
-            <a:off x="10789920" y="2011680"/>
-            <a:ext cx="2286000" cy="502920"/>
-          </a:xfrm>
-          <a:prstGeom prst="roundRect">
-            <a:avLst>
-              <a:gd name="adj" fmla="val 10000"/>
-            </a:avLst>
-          </a:prstGeom>
-          <a:solidFill>
-            <a:srgbClr val="FFFFFF"/>
-          </a:solidFill>
-          <a:ln w="14604">
-            <a:solidFill>
-              <a:srgbClr val="087E83"/>
-            </a:solidFill>
-          </a:ln>
-          <a:effectLst/>
-        </p:spPr>
-        <p:style>
-          <a:lnRef idx="1">
-            <a:schemeClr val="accent1"/>
-          </a:lnRef>
-          <a:fillRef idx="3">
-            <a:schemeClr val="accent1"/>
-          </a:fillRef>
-          <a:effectRef idx="2">
-            <a:schemeClr val="accent1"/>
-          </a:effectRef>
-          <a:fontRef idx="minor">
-            <a:schemeClr val="lt1"/>
-          </a:fontRef>
-        </p:style>
-        <p:txBody>
-          <a:bodyPr rtlCol="0" anchor="ctr"/>
-          <a:lstStyle/>
-          <a:p>
-            <a:pPr algn="ctr"/>
-          </a:p>
-        </p:txBody>
-      </p:sp>
-      <p:sp>
-        <p:nvSpPr>
-          <p:cNvPr id="32" name="TextBox 31"/>
-          <p:cNvSpPr txBox="1"/>
-          <p:nvPr/>
-        </p:nvSpPr>
-        <p:spPr>
-          <a:xfrm>
-            <a:off x="10821924" y="2025396"/>
-            <a:ext cx="2221992" cy="475488"/>
-          </a:xfrm>
-          <a:prstGeom prst="rect">
-            <a:avLst/>
-          </a:prstGeom>
-          <a:noFill/>
-        </p:spPr>
-        <p:txBody>
-          <a:bodyPr wrap="square" lIns="54864" rIns="54864" tIns="18288" bIns="18288" anchor="ctr">
-            <a:spAutoFit/>
-          </a:bodyPr>
-          <a:lstStyle/>
-          <a:p>
-            <a:pPr algn="ctr">
-              <a:spcAft>
-                <a:spcPts val="200"/>
-              </a:spcAft>
-            </a:pPr>
-            <a:r>
-              <a:rPr sz="1900" b="1">
-                <a:solidFill>
-                  <a:srgbClr val="142B43"/>
-                </a:solidFill>
-                <a:latin typeface="Liberation Sans"/>
-              </a:rPr>
-              <a:t>Context</a:t>
-            </a:r>
-          </a:p>
-        </p:txBody>
-      </p:sp>
-      <p:sp>
-        <p:nvSpPr>
-          <p:cNvPr id="33" name="Rounded Rectangle 32"/>
-          <p:cNvSpPr/>
-          <p:nvPr/>
-        </p:nvSpPr>
-        <p:spPr>
-          <a:xfrm>
-            <a:off x="10789920" y="2724912"/>
-            <a:ext cx="2286000" cy="585216"/>
-          </a:xfrm>
-          <a:prstGeom prst="roundRect">
-            <a:avLst>
-              <a:gd name="adj" fmla="val 10000"/>
-            </a:avLst>
-          </a:prstGeom>
-          <a:solidFill>
-            <a:srgbClr val="F0F3F6"/>
-          </a:solidFill>
-          <a:ln w="14604">
-            <a:solidFill>
-              <a:srgbClr val="AAB9C7"/>
-            </a:solidFill>
-          </a:ln>
-          <a:effectLst/>
-        </p:spPr>
-        <p:style>
-          <a:lnRef idx="1">
-            <a:schemeClr val="accent1"/>
-          </a:lnRef>
-          <a:fillRef idx="3">
-            <a:schemeClr val="accent1"/>
-          </a:fillRef>
-          <a:effectRef idx="2">
-            <a:schemeClr val="accent1"/>
-          </a:effectRef>
-          <a:fontRef idx="minor">
-            <a:schemeClr val="lt1"/>
-          </a:fontRef>
-        </p:style>
-        <p:txBody>
-          <a:bodyPr rtlCol="0" anchor="ctr"/>
-          <a:lstStyle/>
-          <a:p>
-            <a:pPr algn="ctr"/>
-          </a:p>
-        </p:txBody>
-      </p:sp>
-      <p:sp>
-        <p:nvSpPr>
-          <p:cNvPr id="34" name="TextBox 33"/>
-          <p:cNvSpPr txBox="1"/>
-          <p:nvPr/>
-        </p:nvSpPr>
-        <p:spPr>
-          <a:xfrm>
-            <a:off x="10821924" y="2738628"/>
-            <a:ext cx="2221992" cy="557784"/>
-          </a:xfrm>
-          <a:prstGeom prst="rect">
-            <a:avLst/>
-          </a:prstGeom>
-          <a:noFill/>
-        </p:spPr>
-        <p:txBody>
-          <a:bodyPr wrap="square" lIns="54864" rIns="54864" tIns="18288" bIns="18288" anchor="ctr">
-            <a:spAutoFit/>
-          </a:bodyPr>
-          <a:lstStyle/>
-          <a:p>
-            <a:pPr algn="ctr">
-              <a:spcAft>
-                <a:spcPts val="200"/>
-              </a:spcAft>
-            </a:pPr>
-            <a:r>
-              <a:rPr sz="1800" b="0">
-                <a:solidFill>
-                  <a:srgbClr val="142B43"/>
-                </a:solidFill>
-                <a:latin typeface="Liberation Sans"/>
-              </a:rPr>
-              <a:t>BGE  [frozen]</a:t>
-            </a:r>
-          </a:p>
-          <a:p>
-            <a:pPr algn="ctr">
-              <a:spcAft>
-                <a:spcPts val="200"/>
-              </a:spcAft>
-            </a:pPr>
-            <a:r>
-              <a:rPr sz="1800" b="0">
-                <a:solidFill>
-                  <a:srgbClr val="142B43"/>
-                </a:solidFill>
-                <a:latin typeface="Liberation Sans"/>
-              </a:rPr>
-              <a:t>1,024</a:t>
-            </a:r>
-          </a:p>
-        </p:txBody>
-      </p:sp>
-      <p:cxnSp>
-        <p:nvCxnSpPr>
-          <p:cNvPr id="35" name="Connector 34"/>
-          <p:cNvCxnSpPr/>
-          <p:nvPr/>
-        </p:nvCxnSpPr>
-        <p:spPr>
-          <a:xfrm>
-            <a:off x="11932920" y="2514600"/>
-            <a:ext cx="0" cy="210312"/>
-          </a:xfrm>
-          <a:prstGeom prst="line">
-            <a:avLst/>
-          </a:prstGeom>
-          <a:ln w="17780">
-            <a:solidFill>
-              <a:srgbClr val="617286"/>
-            </a:solidFill>
-            <a:tailEnd type="triangle" w="sm" len="sm"/>
-          </a:ln>
-        </p:spPr>
-        <p:style>
-          <a:lnRef idx="2">
-            <a:schemeClr val="accent1"/>
-          </a:lnRef>
-          <a:fillRef idx="0">
-            <a:schemeClr val="accent1"/>
-          </a:fillRef>
-          <a:effectRef idx="1">
-            <a:schemeClr val="accent1"/>
-          </a:effectRef>
-          <a:fontRef idx="minor">
-            <a:schemeClr val="tx1"/>
-          </a:fontRef>
-        </p:style>
-      </p:cxnSp>
-      <p:sp>
-        <p:nvSpPr>
-          <p:cNvPr id="36" name="Rounded Rectangle 35"/>
-          <p:cNvSpPr/>
-          <p:nvPr/>
-        </p:nvSpPr>
-        <p:spPr>
-          <a:xfrm>
-            <a:off x="13350240" y="2011680"/>
-            <a:ext cx="2286000" cy="502920"/>
-          </a:xfrm>
-          <a:prstGeom prst="roundRect">
-            <a:avLst>
-              <a:gd name="adj" fmla="val 10000"/>
-            </a:avLst>
-          </a:prstGeom>
-          <a:solidFill>
-            <a:srgbClr val="FFFFFF"/>
-          </a:solidFill>
-          <a:ln w="14604">
-            <a:solidFill>
-              <a:srgbClr val="087E83"/>
-            </a:solidFill>
-          </a:ln>
-          <a:effectLst/>
-        </p:spPr>
-        <p:style>
-          <a:lnRef idx="1">
-            <a:schemeClr val="accent1"/>
-          </a:lnRef>
-          <a:fillRef idx="3">
-            <a:schemeClr val="accent1"/>
-          </a:fillRef>
-          <a:effectRef idx="2">
-            <a:schemeClr val="accent1"/>
-          </a:effectRef>
-          <a:fontRef idx="minor">
-            <a:schemeClr val="lt1"/>
-          </a:fontRef>
-        </p:style>
-        <p:txBody>
-          <a:bodyPr rtlCol="0" anchor="ctr"/>
-          <a:lstStyle/>
-          <a:p>
-            <a:pPr algn="ctr"/>
-          </a:p>
-        </p:txBody>
-      </p:sp>
-      <p:sp>
-        <p:nvSpPr>
-          <p:cNvPr id="37" name="TextBox 36"/>
-          <p:cNvSpPr txBox="1"/>
-          <p:nvPr/>
-        </p:nvSpPr>
-        <p:spPr>
-          <a:xfrm>
-            <a:off x="13382244" y="2025396"/>
-            <a:ext cx="2221992" cy="475488"/>
-          </a:xfrm>
-          <a:prstGeom prst="rect">
-            <a:avLst/>
-          </a:prstGeom>
-          <a:noFill/>
-        </p:spPr>
-        <p:txBody>
-          <a:bodyPr wrap="square" lIns="54864" rIns="54864" tIns="18288" bIns="18288" anchor="ctr">
-            <a:spAutoFit/>
-          </a:bodyPr>
-          <a:lstStyle/>
-          <a:p>
-            <a:pPr algn="ctr">
-              <a:spcAft>
-                <a:spcPts val="200"/>
-              </a:spcAft>
-            </a:pPr>
-            <a:r>
-              <a:rPr sz="1900" b="1">
-                <a:solidFill>
-                  <a:srgbClr val="142B43"/>
-                </a:solidFill>
-                <a:latin typeface="Liberation Sans"/>
-              </a:rPr>
-              <a:t>Title</a:t>
-            </a:r>
-          </a:p>
-        </p:txBody>
-      </p:sp>
-      <p:sp>
-        <p:nvSpPr>
-          <p:cNvPr id="38" name="Rounded Rectangle 37"/>
-          <p:cNvSpPr/>
-          <p:nvPr/>
-        </p:nvSpPr>
-        <p:spPr>
-          <a:xfrm>
-            <a:off x="13350240" y="2724912"/>
-            <a:ext cx="2286000" cy="585216"/>
-          </a:xfrm>
-          <a:prstGeom prst="roundRect">
-            <a:avLst>
-              <a:gd name="adj" fmla="val 10000"/>
-            </a:avLst>
-          </a:prstGeom>
-          <a:solidFill>
-            <a:srgbClr val="F0F3F6"/>
-          </a:solidFill>
-          <a:ln w="14604">
-            <a:solidFill>
-              <a:srgbClr val="AAB9C7"/>
-            </a:solidFill>
-          </a:ln>
-          <a:effectLst/>
-        </p:spPr>
-        <p:style>
-          <a:lnRef idx="1">
-            <a:schemeClr val="accent1"/>
-          </a:lnRef>
-          <a:fillRef idx="3">
-            <a:schemeClr val="accent1"/>
-          </a:fillRef>
-          <a:effectRef idx="2">
-            <a:schemeClr val="accent1"/>
-          </a:effectRef>
-          <a:fontRef idx="minor">
-            <a:schemeClr val="lt1"/>
-          </a:fontRef>
-        </p:style>
-        <p:txBody>
-          <a:bodyPr rtlCol="0" anchor="ctr"/>
-          <a:lstStyle/>
-          <a:p>
-            <a:pPr algn="ctr"/>
-          </a:p>
-        </p:txBody>
-      </p:sp>
-      <p:sp>
-        <p:nvSpPr>
-          <p:cNvPr id="39" name="TextBox 38"/>
-          <p:cNvSpPr txBox="1"/>
-          <p:nvPr/>
-        </p:nvSpPr>
-        <p:spPr>
-          <a:xfrm>
-            <a:off x="13382244" y="2738628"/>
-            <a:ext cx="2221992" cy="557784"/>
-          </a:xfrm>
-          <a:prstGeom prst="rect">
-            <a:avLst/>
-          </a:prstGeom>
-          <a:noFill/>
-        </p:spPr>
-        <p:txBody>
-          <a:bodyPr wrap="square" lIns="54864" rIns="54864" tIns="18288" bIns="18288" anchor="ctr">
-            <a:spAutoFit/>
-          </a:bodyPr>
-          <a:lstStyle/>
-          <a:p>
-            <a:pPr algn="ctr">
-              <a:spcAft>
-                <a:spcPts val="200"/>
-              </a:spcAft>
-            </a:pPr>
-            <a:r>
-              <a:rPr sz="1800" b="0">
-                <a:solidFill>
-                  <a:srgbClr val="142B43"/>
-                </a:solidFill>
-                <a:latin typeface="Liberation Sans"/>
-              </a:rPr>
-              <a:t>BGE  [frozen]</a:t>
-            </a:r>
-          </a:p>
-          <a:p>
-            <a:pPr algn="ctr">
-              <a:spcAft>
-                <a:spcPts val="200"/>
-              </a:spcAft>
-            </a:pPr>
-            <a:r>
-              <a:rPr sz="1800" b="0">
-                <a:solidFill>
-                  <a:srgbClr val="142B43"/>
-                </a:solidFill>
-                <a:latin typeface="Liberation Sans"/>
-              </a:rPr>
-              <a:t>1,024</a:t>
-            </a:r>
-          </a:p>
-        </p:txBody>
-      </p:sp>
-      <p:cxnSp>
-        <p:nvCxnSpPr>
-          <p:cNvPr id="40" name="Connector 39"/>
-          <p:cNvCxnSpPr/>
-          <p:nvPr/>
-        </p:nvCxnSpPr>
-        <p:spPr>
-          <a:xfrm>
-            <a:off x="14493240" y="2514600"/>
-            <a:ext cx="0" cy="210312"/>
-          </a:xfrm>
-          <a:prstGeom prst="line">
-            <a:avLst/>
-          </a:prstGeom>
-          <a:ln w="17780">
-            <a:solidFill>
-              <a:srgbClr val="617286"/>
-            </a:solidFill>
-            <a:tailEnd type="triangle" w="sm" len="sm"/>
-          </a:ln>
-        </p:spPr>
-        <p:style>
-          <a:lnRef idx="2">
-            <a:schemeClr val="accent1"/>
-          </a:lnRef>
-          <a:fillRef idx="0">
-            <a:schemeClr val="accent1"/>
-          </a:fillRef>
-          <a:effectRef idx="1">
-            <a:schemeClr val="accent1"/>
-          </a:effectRef>
-          <a:fontRef idx="minor">
-            <a:schemeClr val="tx1"/>
-          </a:fontRef>
-        </p:style>
-      </p:cxnSp>
-      <p:cxnSp>
-        <p:nvCxnSpPr>
-          <p:cNvPr id="41" name="Connector 40"/>
-          <p:cNvCxnSpPr/>
-          <p:nvPr/>
-        </p:nvCxnSpPr>
-        <p:spPr>
-          <a:xfrm>
-            <a:off x="6812280" y="3310128"/>
-            <a:ext cx="0" cy="228600"/>
-          </a:xfrm>
-          <a:prstGeom prst="line">
-            <a:avLst/>
-          </a:prstGeom>
-          <a:ln w="17780">
-            <a:solidFill>
-              <a:srgbClr val="087E83"/>
-            </a:solidFill>
-            <a:tailEnd type="triangle" w="sm" len="sm"/>
-          </a:ln>
-        </p:spPr>
-        <p:style>
-          <a:lnRef idx="2">
-            <a:schemeClr val="accent1"/>
-          </a:lnRef>
-          <a:fillRef idx="0">
-            <a:schemeClr val="accent1"/>
-          </a:fillRef>
-          <a:effectRef idx="1">
-            <a:schemeClr val="accent1"/>
-          </a:effectRef>
-          <a:fontRef idx="minor">
-            <a:schemeClr val="tx1"/>
-          </a:fontRef>
-        </p:style>
-      </p:cxnSp>
-      <p:cxnSp>
-        <p:nvCxnSpPr>
-          <p:cNvPr id="42" name="Connector 41"/>
-          <p:cNvCxnSpPr/>
-          <p:nvPr/>
-        </p:nvCxnSpPr>
-        <p:spPr>
-          <a:xfrm>
-            <a:off x="9372600" y="3310128"/>
-            <a:ext cx="0" cy="228600"/>
-          </a:xfrm>
-          <a:prstGeom prst="line">
-            <a:avLst/>
-          </a:prstGeom>
-          <a:ln w="17780">
-            <a:solidFill>
-              <a:srgbClr val="087E83"/>
-            </a:solidFill>
-            <a:tailEnd type="triangle" w="sm" len="sm"/>
-          </a:ln>
-        </p:spPr>
-        <p:style>
-          <a:lnRef idx="2">
-            <a:schemeClr val="accent1"/>
-          </a:lnRef>
-          <a:fillRef idx="0">
-            <a:schemeClr val="accent1"/>
-          </a:fillRef>
-          <a:effectRef idx="1">
-            <a:schemeClr val="accent1"/>
-          </a:effectRef>
-          <a:fontRef idx="minor">
-            <a:schemeClr val="tx1"/>
-          </a:fontRef>
-        </p:style>
-      </p:cxnSp>
-      <p:sp>
-        <p:nvSpPr>
-          <p:cNvPr id="43" name="Rounded Rectangle 42"/>
-          <p:cNvSpPr/>
-          <p:nvPr/>
-        </p:nvSpPr>
-        <p:spPr>
-          <a:xfrm>
-            <a:off x="5669280" y="3538728"/>
-            <a:ext cx="4846320" cy="667512"/>
-          </a:xfrm>
-          <a:prstGeom prst="roundRect">
-            <a:avLst>
-              <a:gd name="adj" fmla="val 10000"/>
-            </a:avLst>
-          </a:prstGeom>
-          <a:solidFill>
-            <a:srgbClr val="FFFFFF"/>
-          </a:solidFill>
-          <a:ln w="14604">
-            <a:solidFill>
-              <a:srgbClr val="087E83"/>
-            </a:solidFill>
-          </a:ln>
-          <a:effectLst/>
-        </p:spPr>
-        <p:style>
-          <a:lnRef idx="1">
-            <a:schemeClr val="accent1"/>
-          </a:lnRef>
-          <a:fillRef idx="3">
-            <a:schemeClr val="accent1"/>
-          </a:fillRef>
-          <a:effectRef idx="2">
-            <a:schemeClr val="accent1"/>
-          </a:effectRef>
-          <a:fontRef idx="minor">
-            <a:schemeClr val="lt1"/>
-          </a:fontRef>
-        </p:style>
-        <p:txBody>
-          <a:bodyPr rtlCol="0" anchor="ctr"/>
-          <a:lstStyle/>
-          <a:p>
-            <a:pPr algn="ctr"/>
-          </a:p>
-        </p:txBody>
-      </p:sp>
-      <p:sp>
-        <p:nvSpPr>
-          <p:cNvPr id="44" name="TextBox 43"/>
-          <p:cNvSpPr txBox="1"/>
-          <p:nvPr/>
-        </p:nvSpPr>
-        <p:spPr>
-          <a:xfrm>
-            <a:off x="5701284" y="3552444"/>
-            <a:ext cx="4782312" cy="640080"/>
-          </a:xfrm>
-          <a:prstGeom prst="rect">
-            <a:avLst/>
-          </a:prstGeom>
-          <a:noFill/>
-        </p:spPr>
-        <p:txBody>
-          <a:bodyPr wrap="square" lIns="54864" rIns="54864" tIns="18288" bIns="18288" anchor="ctr">
-            <a:spAutoFit/>
-          </a:bodyPr>
-          <a:lstStyle/>
-          <a:p>
-            <a:pPr algn="ctr">
-              <a:spcAft>
-                <a:spcPts val="200"/>
-              </a:spcAft>
-            </a:pPr>
-            <a:r>
-              <a:rPr sz="1800" b="0">
-                <a:solidFill>
-                  <a:srgbClr val="142B43"/>
-                </a:solidFill>
-                <a:latin typeface="Liberation Sans"/>
-              </a:rPr>
-              <a:t>Shared projection: 1,024 → 128</a:t>
-            </a:r>
-          </a:p>
-          <a:p>
-            <a:pPr algn="ctr">
-              <a:spcAft>
-                <a:spcPts val="200"/>
-              </a:spcAft>
-            </a:pPr>
-            <a:r>
-              <a:rPr sz="1800" b="0">
-                <a:solidFill>
-                  <a:srgbClr val="142B43"/>
-                </a:solidFill>
-                <a:latin typeface="Liberation Sans"/>
-              </a:rPr>
-              <a:t>+ entity / action node-type embedding</a:t>
-            </a:r>
-          </a:p>
-        </p:txBody>
-      </p:sp>
-      <p:sp>
-        <p:nvSpPr>
-          <p:cNvPr id="45" name="Rounded Rectangle 44"/>
-          <p:cNvSpPr/>
-          <p:nvPr/>
-        </p:nvSpPr>
-        <p:spPr>
-          <a:xfrm>
-            <a:off x="10789920" y="3538728"/>
-            <a:ext cx="2286000" cy="667512"/>
-          </a:xfrm>
-          <a:prstGeom prst="roundRect">
-            <a:avLst>
-              <a:gd name="adj" fmla="val 10000"/>
-            </a:avLst>
-          </a:prstGeom>
-          <a:solidFill>
-            <a:srgbClr val="FFFFFF"/>
-          </a:solidFill>
-          <a:ln w="14604">
-            <a:solidFill>
-              <a:srgbClr val="087E83"/>
-            </a:solidFill>
-          </a:ln>
-          <a:effectLst/>
-        </p:spPr>
-        <p:style>
-          <a:lnRef idx="1">
-            <a:schemeClr val="accent1"/>
-          </a:lnRef>
-          <a:fillRef idx="3">
-            <a:schemeClr val="accent1"/>
-          </a:fillRef>
-          <a:effectRef idx="2">
-            <a:schemeClr val="accent1"/>
-          </a:effectRef>
-          <a:fontRef idx="minor">
-            <a:schemeClr val="lt1"/>
-          </a:fontRef>
-        </p:style>
-        <p:txBody>
-          <a:bodyPr rtlCol="0" anchor="ctr"/>
-          <a:lstStyle/>
-          <a:p>
-            <a:pPr algn="ctr"/>
-          </a:p>
-        </p:txBody>
-      </p:sp>
-      <p:sp>
-        <p:nvSpPr>
-          <p:cNvPr id="46" name="TextBox 45"/>
-          <p:cNvSpPr txBox="1"/>
-          <p:nvPr/>
-        </p:nvSpPr>
-        <p:spPr>
-          <a:xfrm>
-            <a:off x="10821924" y="3552444"/>
-            <a:ext cx="2221992" cy="640080"/>
-          </a:xfrm>
-          <a:prstGeom prst="rect">
-            <a:avLst/>
-          </a:prstGeom>
-          <a:noFill/>
-        </p:spPr>
-        <p:txBody>
-          <a:bodyPr wrap="square" lIns="54864" rIns="54864" tIns="18288" bIns="18288" anchor="ctr">
-            <a:spAutoFit/>
-          </a:bodyPr>
-          <a:lstStyle/>
-          <a:p>
-            <a:pPr algn="ctr">
-              <a:spcAft>
-                <a:spcPts val="200"/>
-              </a:spcAft>
-            </a:pPr>
-            <a:r>
-              <a:rPr sz="1800" b="0">
-                <a:solidFill>
-                  <a:srgbClr val="142B43"/>
-                </a:solidFill>
-                <a:latin typeface="Liberation Sans"/>
-              </a:rPr>
-              <a:t>Projection</a:t>
-            </a:r>
-          </a:p>
-          <a:p>
-            <a:pPr algn="ctr">
-              <a:spcAft>
-                <a:spcPts val="200"/>
-              </a:spcAft>
-            </a:pPr>
-            <a:r>
-              <a:rPr sz="1800" b="0">
-                <a:solidFill>
-                  <a:srgbClr val="142B43"/>
-                </a:solidFill>
-                <a:latin typeface="Liberation Sans"/>
-              </a:rPr>
-              <a:t>1,024 → 128</a:t>
-            </a:r>
-          </a:p>
-        </p:txBody>
-      </p:sp>
-      <p:sp>
-        <p:nvSpPr>
-          <p:cNvPr id="47" name="Rounded Rectangle 46"/>
-          <p:cNvSpPr/>
-          <p:nvPr/>
-        </p:nvSpPr>
-        <p:spPr>
-          <a:xfrm>
-            <a:off x="13350240" y="3538728"/>
-            <a:ext cx="2286000" cy="667512"/>
-          </a:xfrm>
-          <a:prstGeom prst="roundRect">
-            <a:avLst>
-              <a:gd name="adj" fmla="val 10000"/>
-            </a:avLst>
-          </a:prstGeom>
-          <a:solidFill>
-            <a:srgbClr val="FFFFFF"/>
-          </a:solidFill>
-          <a:ln w="14604">
-            <a:solidFill>
-              <a:srgbClr val="087E83"/>
-            </a:solidFill>
-          </a:ln>
-          <a:effectLst/>
-        </p:spPr>
-        <p:style>
-          <a:lnRef idx="1">
-            <a:schemeClr val="accent1"/>
-          </a:lnRef>
-          <a:fillRef idx="3">
-            <a:schemeClr val="accent1"/>
-          </a:fillRef>
-          <a:effectRef idx="2">
-            <a:schemeClr val="accent1"/>
-          </a:effectRef>
-          <a:fontRef idx="minor">
-            <a:schemeClr val="lt1"/>
-          </a:fontRef>
-        </p:style>
-        <p:txBody>
-          <a:bodyPr rtlCol="0" anchor="ctr"/>
-          <a:lstStyle/>
-          <a:p>
-            <a:pPr algn="ctr"/>
-          </a:p>
-        </p:txBody>
-      </p:sp>
-      <p:sp>
-        <p:nvSpPr>
-          <p:cNvPr id="48" name="TextBox 47"/>
-          <p:cNvSpPr txBox="1"/>
-          <p:nvPr/>
-        </p:nvSpPr>
-        <p:spPr>
-          <a:xfrm>
-            <a:off x="13382244" y="3552444"/>
-            <a:ext cx="2221992" cy="640080"/>
-          </a:xfrm>
-          <a:prstGeom prst="rect">
-            <a:avLst/>
-          </a:prstGeom>
-          <a:noFill/>
-        </p:spPr>
-        <p:txBody>
-          <a:bodyPr wrap="square" lIns="54864" rIns="54864" tIns="18288" bIns="18288" anchor="ctr">
-            <a:spAutoFit/>
-          </a:bodyPr>
-          <a:lstStyle/>
-          <a:p>
-            <a:pPr algn="ctr">
-              <a:spcAft>
-                <a:spcPts val="200"/>
-              </a:spcAft>
-            </a:pPr>
-            <a:r>
-              <a:rPr sz="1800" b="0">
-                <a:solidFill>
-                  <a:srgbClr val="142B43"/>
-                </a:solidFill>
-                <a:latin typeface="Liberation Sans"/>
-              </a:rPr>
-              <a:t>Projection</a:t>
-            </a:r>
-          </a:p>
-          <a:p>
-            <a:pPr algn="ctr">
-              <a:spcAft>
-                <a:spcPts val="200"/>
-              </a:spcAft>
-            </a:pPr>
-            <a:r>
-              <a:rPr sz="1800" b="0">
-                <a:solidFill>
-                  <a:srgbClr val="142B43"/>
-                </a:solidFill>
-                <a:latin typeface="Liberation Sans"/>
-              </a:rPr>
-              <a:t>1,024 → 128</a:t>
-            </a:r>
-          </a:p>
-        </p:txBody>
-      </p:sp>
-      <p:cxnSp>
-        <p:nvCxnSpPr>
-          <p:cNvPr id="49" name="Connector 48"/>
-          <p:cNvCxnSpPr/>
-          <p:nvPr/>
-        </p:nvCxnSpPr>
-        <p:spPr>
-          <a:xfrm>
-            <a:off x="11932920" y="3310128"/>
-            <a:ext cx="0" cy="228600"/>
-          </a:xfrm>
-          <a:prstGeom prst="line">
-            <a:avLst/>
-          </a:prstGeom>
-          <a:ln w="17780">
-            <a:solidFill>
-              <a:srgbClr val="087E83"/>
-            </a:solidFill>
-            <a:tailEnd type="triangle" w="sm" len="sm"/>
-          </a:ln>
-        </p:spPr>
-        <p:style>
-          <a:lnRef idx="2">
-            <a:schemeClr val="accent1"/>
-          </a:lnRef>
-          <a:fillRef idx="0">
-            <a:schemeClr val="accent1"/>
-          </a:fillRef>
-          <a:effectRef idx="1">
-            <a:schemeClr val="accent1"/>
-          </a:effectRef>
-          <a:fontRef idx="minor">
-            <a:schemeClr val="tx1"/>
-          </a:fontRef>
-        </p:style>
-      </p:cxnSp>
-      <p:cxnSp>
-        <p:nvCxnSpPr>
-          <p:cNvPr id="50" name="Connector 49"/>
-          <p:cNvCxnSpPr/>
-          <p:nvPr/>
-        </p:nvCxnSpPr>
-        <p:spPr>
-          <a:xfrm>
-            <a:off x="14493240" y="3310128"/>
-            <a:ext cx="0" cy="228600"/>
-          </a:xfrm>
-          <a:prstGeom prst="line">
-            <a:avLst/>
-          </a:prstGeom>
-          <a:ln w="17780">
-            <a:solidFill>
-              <a:srgbClr val="087E83"/>
-            </a:solidFill>
-            <a:tailEnd type="triangle" w="sm" len="sm"/>
-          </a:ln>
-        </p:spPr>
-        <p:style>
-          <a:lnRef idx="2">
-            <a:schemeClr val="accent1"/>
-          </a:lnRef>
-          <a:fillRef idx="0">
-            <a:schemeClr val="accent1"/>
-          </a:fillRef>
-          <a:effectRef idx="1">
-            <a:schemeClr val="accent1"/>
-          </a:effectRef>
-          <a:fontRef idx="minor">
-            <a:schemeClr val="tx1"/>
-          </a:fontRef>
-        </p:style>
-      </p:cxnSp>
-      <p:sp>
-        <p:nvSpPr>
-          <p:cNvPr id="51" name="Rounded Rectangle 50"/>
-          <p:cNvSpPr/>
-          <p:nvPr/>
-        </p:nvSpPr>
-        <p:spPr>
-          <a:xfrm>
-            <a:off x="5669280" y="4462272"/>
-            <a:ext cx="4846320" cy="667512"/>
-          </a:xfrm>
-          <a:prstGeom prst="roundRect">
-            <a:avLst>
-              <a:gd name="adj" fmla="val 10000"/>
-            </a:avLst>
-          </a:prstGeom>
-          <a:solidFill>
-            <a:srgbClr val="FFFFFF"/>
-          </a:solidFill>
-          <a:ln w="14604">
-            <a:solidFill>
-              <a:srgbClr val="087E83"/>
-            </a:solidFill>
-          </a:ln>
-          <a:effectLst/>
-        </p:spPr>
-        <p:style>
-          <a:lnRef idx="1">
-            <a:schemeClr val="accent1"/>
-          </a:lnRef>
-          <a:fillRef idx="3">
-            <a:schemeClr val="accent1"/>
-          </a:fillRef>
-          <a:effectRef idx="2">
-            <a:schemeClr val="accent1"/>
-          </a:effectRef>
-          <a:fontRef idx="minor">
-            <a:schemeClr val="lt1"/>
-          </a:fontRef>
-        </p:style>
-        <p:txBody>
-          <a:bodyPr rtlCol="0" anchor="ctr"/>
-          <a:lstStyle/>
-          <a:p>
-            <a:pPr algn="ctr"/>
-          </a:p>
-        </p:txBody>
-      </p:sp>
-      <p:sp>
-        <p:nvSpPr>
-          <p:cNvPr id="52" name="TextBox 51"/>
-          <p:cNvSpPr txBox="1"/>
-          <p:nvPr/>
-        </p:nvSpPr>
-        <p:spPr>
-          <a:xfrm>
-            <a:off x="5701284" y="4475988"/>
-            <a:ext cx="4782312" cy="640080"/>
-          </a:xfrm>
-          <a:prstGeom prst="rect">
-            <a:avLst/>
-          </a:prstGeom>
-          <a:noFill/>
-        </p:spPr>
-        <p:txBody>
-          <a:bodyPr wrap="square" lIns="54864" rIns="54864" tIns="18288" bIns="18288" anchor="ctr">
-            <a:spAutoFit/>
-          </a:bodyPr>
-          <a:lstStyle/>
-          <a:p>
-            <a:pPr algn="ctr">
-              <a:spcAft>
-                <a:spcPts val="200"/>
-              </a:spcAft>
-            </a:pPr>
-            <a:r>
-              <a:rPr sz="1800" b="1">
-                <a:solidFill>
-                  <a:srgbClr val="142B43"/>
-                </a:solidFill>
-                <a:latin typeface="Liberation Sans"/>
-              </a:rPr>
-              <a:t>Role Graph Encoder</a:t>
-            </a:r>
-          </a:p>
-          <a:p>
-            <a:pPr algn="ctr">
-              <a:spcAft>
-                <a:spcPts val="200"/>
-              </a:spcAft>
-            </a:pPr>
-            <a:r>
-              <a:rPr sz="1800" b="1">
-                <a:solidFill>
-                  <a:srgbClr val="142B43"/>
-                </a:solidFill>
-                <a:latin typeface="Liberation Sans"/>
-              </a:rPr>
-              <a:t>1 layer · hidden 128</a:t>
-            </a:r>
-          </a:p>
-        </p:txBody>
-      </p:sp>
-      <p:cxnSp>
-        <p:nvCxnSpPr>
-          <p:cNvPr id="53" name="Connector 52"/>
-          <p:cNvCxnSpPr/>
-          <p:nvPr/>
-        </p:nvCxnSpPr>
-        <p:spPr>
-          <a:xfrm>
-            <a:off x="8092440" y="4206240"/>
-            <a:ext cx="0" cy="256032"/>
-          </a:xfrm>
-          <a:prstGeom prst="line">
-            <a:avLst/>
-          </a:prstGeom>
-          <a:ln w="17780">
-            <a:solidFill>
-              <a:srgbClr val="087E83"/>
-            </a:solidFill>
-            <a:tailEnd type="triangle" w="sm" len="sm"/>
-          </a:ln>
-        </p:spPr>
-        <p:style>
-          <a:lnRef idx="2">
-            <a:schemeClr val="accent1"/>
-          </a:lnRef>
-          <a:fillRef idx="0">
-            <a:schemeClr val="accent1"/>
-          </a:fillRef>
-          <a:effectRef idx="1">
-            <a:schemeClr val="accent1"/>
-          </a:effectRef>
-          <a:fontRef idx="minor">
-            <a:schemeClr val="tx1"/>
-          </a:fontRef>
-        </p:style>
-      </p:cxnSp>
-      <p:sp>
-        <p:nvSpPr>
-          <p:cNvPr id="54" name="Rounded Rectangle 53"/>
-          <p:cNvSpPr/>
-          <p:nvPr/>
-        </p:nvSpPr>
-        <p:spPr>
-          <a:xfrm>
-            <a:off x="13350240" y="4462272"/>
-            <a:ext cx="2286000" cy="667512"/>
-          </a:xfrm>
-          <a:prstGeom prst="roundRect">
-            <a:avLst>
-              <a:gd name="adj" fmla="val 10000"/>
-            </a:avLst>
-          </a:prstGeom>
-          <a:solidFill>
-            <a:srgbClr val="FFFFFF"/>
-          </a:solidFill>
-          <a:ln w="14604">
-            <a:solidFill>
-              <a:srgbClr val="087E83"/>
-            </a:solidFill>
-          </a:ln>
-          <a:effectLst/>
-        </p:spPr>
-        <p:style>
-          <a:lnRef idx="1">
-            <a:schemeClr val="accent1"/>
-          </a:lnRef>
-          <a:fillRef idx="3">
-            <a:schemeClr val="accent1"/>
-          </a:fillRef>
-          <a:effectRef idx="2">
-            <a:schemeClr val="accent1"/>
-          </a:effectRef>
-          <a:fontRef idx="minor">
-            <a:schemeClr val="lt1"/>
-          </a:fontRef>
-        </p:style>
-        <p:txBody>
-          <a:bodyPr rtlCol="0" anchor="ctr"/>
-          <a:lstStyle/>
-          <a:p>
-            <a:pPr algn="ctr"/>
-          </a:p>
-        </p:txBody>
-      </p:sp>
-      <p:sp>
-        <p:nvSpPr>
-          <p:cNvPr id="55" name="TextBox 54"/>
-          <p:cNvSpPr txBox="1"/>
-          <p:nvPr/>
-        </p:nvSpPr>
-        <p:spPr>
-          <a:xfrm>
-            <a:off x="13382244" y="4475988"/>
-            <a:ext cx="2221992" cy="640080"/>
-          </a:xfrm>
-          <a:prstGeom prst="rect">
-            <a:avLst/>
-          </a:prstGeom>
-          <a:noFill/>
-        </p:spPr>
-        <p:txBody>
-          <a:bodyPr wrap="square" lIns="54864" rIns="54864" tIns="18288" bIns="18288" anchor="ctr">
-            <a:spAutoFit/>
-          </a:bodyPr>
-          <a:lstStyle/>
-          <a:p>
-            <a:pPr algn="ctr">
-              <a:spcAft>
-                <a:spcPts val="200"/>
-              </a:spcAft>
-            </a:pPr>
-            <a:r>
-              <a:rPr sz="1800" b="0">
-                <a:solidFill>
-                  <a:srgbClr val="142B43"/>
-                </a:solidFill>
-                <a:latin typeface="Liberation Sans"/>
-              </a:rPr>
-              <a:t>LayerNorm</a:t>
-            </a:r>
-          </a:p>
-          <a:p>
-            <a:pPr algn="ctr">
-              <a:spcAft>
-                <a:spcPts val="200"/>
-              </a:spcAft>
-            </a:pPr>
-            <a:r>
-              <a:rPr sz="1800" b="0">
-                <a:solidFill>
-                  <a:srgbClr val="142B43"/>
-                </a:solidFill>
-                <a:latin typeface="Liberation Sans"/>
-              </a:rPr>
-              <a:t>Title: 128</a:t>
-            </a:r>
-          </a:p>
-        </p:txBody>
-      </p:sp>
-      <p:cxnSp>
-        <p:nvCxnSpPr>
-          <p:cNvPr id="56" name="Connector 55"/>
-          <p:cNvCxnSpPr/>
-          <p:nvPr/>
-        </p:nvCxnSpPr>
-        <p:spPr>
-          <a:xfrm>
-            <a:off x="14493240" y="4206240"/>
-            <a:ext cx="0" cy="256032"/>
-          </a:xfrm>
-          <a:prstGeom prst="line">
-            <a:avLst/>
-          </a:prstGeom>
-          <a:ln w="17780">
-            <a:solidFill>
-              <a:srgbClr val="087E83"/>
-            </a:solidFill>
-            <a:tailEnd type="triangle" w="sm" len="sm"/>
-          </a:ln>
-        </p:spPr>
-        <p:style>
-          <a:lnRef idx="2">
-            <a:schemeClr val="accent1"/>
-          </a:lnRef>
-          <a:fillRef idx="0">
-            <a:schemeClr val="accent1"/>
-          </a:fillRef>
-          <a:effectRef idx="1">
-            <a:schemeClr val="accent1"/>
-          </a:effectRef>
-          <a:fontRef idx="minor">
-            <a:schemeClr val="tx1"/>
-          </a:fontRef>
-        </p:style>
-      </p:cxnSp>
-      <p:sp>
-        <p:nvSpPr>
-          <p:cNvPr id="57" name="Rounded Rectangle 56"/>
-          <p:cNvSpPr/>
-          <p:nvPr/>
-        </p:nvSpPr>
-        <p:spPr>
-          <a:xfrm>
-            <a:off x="5669280" y="5394960"/>
-            <a:ext cx="2286000" cy="502920"/>
-          </a:xfrm>
-          <a:prstGeom prst="roundRect">
-            <a:avLst>
-              <a:gd name="adj" fmla="val 10000"/>
-            </a:avLst>
-          </a:prstGeom>
-          <a:solidFill>
-            <a:srgbClr val="FFFFFF"/>
-          </a:solidFill>
-          <a:ln w="14604">
-            <a:solidFill>
-              <a:srgbClr val="087E83"/>
-            </a:solidFill>
-          </a:ln>
-          <a:effectLst/>
-        </p:spPr>
-        <p:style>
-          <a:lnRef idx="1">
-            <a:schemeClr val="accent1"/>
-          </a:lnRef>
-          <a:fillRef idx="3">
-            <a:schemeClr val="accent1"/>
-          </a:fillRef>
-          <a:effectRef idx="2">
-            <a:schemeClr val="accent1"/>
-          </a:effectRef>
-          <a:fontRef idx="minor">
-            <a:schemeClr val="lt1"/>
-          </a:fontRef>
-        </p:style>
-        <p:txBody>
-          <a:bodyPr rtlCol="0" anchor="ctr"/>
-          <a:lstStyle/>
-          <a:p>
-            <a:pPr algn="ctr"/>
-          </a:p>
-        </p:txBody>
-      </p:sp>
-      <p:sp>
-        <p:nvSpPr>
-          <p:cNvPr id="58" name="TextBox 57"/>
-          <p:cNvSpPr txBox="1"/>
-          <p:nvPr/>
-        </p:nvSpPr>
-        <p:spPr>
-          <a:xfrm>
-            <a:off x="5701284" y="5408676"/>
-            <a:ext cx="2221992" cy="475488"/>
-          </a:xfrm>
-          <a:prstGeom prst="rect">
-            <a:avLst/>
-          </a:prstGeom>
-          <a:noFill/>
-        </p:spPr>
-        <p:txBody>
-          <a:bodyPr wrap="square" lIns="54864" rIns="54864" tIns="18288" bIns="18288" anchor="ctr">
-            <a:spAutoFit/>
-          </a:bodyPr>
-          <a:lstStyle/>
-          <a:p>
-            <a:pPr algn="ctr">
-              <a:spcAft>
-                <a:spcPts val="200"/>
-              </a:spcAft>
-            </a:pPr>
-            <a:r>
-              <a:rPr sz="1700" b="0">
-                <a:solidFill>
-                  <a:srgbClr val="142B43"/>
-                </a:solidFill>
-                <a:latin typeface="Liberation Sans"/>
-              </a:rPr>
-              <a:t>Entity mean: 128</a:t>
-            </a:r>
-          </a:p>
-        </p:txBody>
-      </p:sp>
-      <p:sp>
-        <p:nvSpPr>
-          <p:cNvPr id="59" name="Rounded Rectangle 58"/>
-          <p:cNvSpPr/>
-          <p:nvPr/>
-        </p:nvSpPr>
-        <p:spPr>
-          <a:xfrm>
-            <a:off x="8229600" y="5394960"/>
-            <a:ext cx="2286000" cy="502920"/>
-          </a:xfrm>
-          <a:prstGeom prst="roundRect">
-            <a:avLst>
-              <a:gd name="adj" fmla="val 10000"/>
-            </a:avLst>
-          </a:prstGeom>
-          <a:solidFill>
-            <a:srgbClr val="FFFFFF"/>
-          </a:solidFill>
-          <a:ln w="14604">
-            <a:solidFill>
-              <a:srgbClr val="087E83"/>
-            </a:solidFill>
-          </a:ln>
-          <a:effectLst/>
-        </p:spPr>
-        <p:style>
-          <a:lnRef idx="1">
-            <a:schemeClr val="accent1"/>
-          </a:lnRef>
-          <a:fillRef idx="3">
-            <a:schemeClr val="accent1"/>
-          </a:fillRef>
-          <a:effectRef idx="2">
-            <a:schemeClr val="accent1"/>
-          </a:effectRef>
-          <a:fontRef idx="minor">
-            <a:schemeClr val="lt1"/>
-          </a:fontRef>
-        </p:style>
-        <p:txBody>
-          <a:bodyPr rtlCol="0" anchor="ctr"/>
-          <a:lstStyle/>
-          <a:p>
-            <a:pPr algn="ctr"/>
-          </a:p>
-        </p:txBody>
-      </p:sp>
-      <p:sp>
-        <p:nvSpPr>
-          <p:cNvPr id="60" name="TextBox 59"/>
-          <p:cNvSpPr txBox="1"/>
-          <p:nvPr/>
-        </p:nvSpPr>
-        <p:spPr>
-          <a:xfrm>
-            <a:off x="8261604" y="5408676"/>
-            <a:ext cx="2221992" cy="475488"/>
-          </a:xfrm>
-          <a:prstGeom prst="rect">
-            <a:avLst/>
-          </a:prstGeom>
-          <a:noFill/>
-        </p:spPr>
-        <p:txBody>
-          <a:bodyPr wrap="square" lIns="54864" rIns="54864" tIns="18288" bIns="18288" anchor="ctr">
-            <a:spAutoFit/>
-          </a:bodyPr>
-          <a:lstStyle/>
-          <a:p>
-            <a:pPr algn="ctr">
-              <a:spcAft>
-                <a:spcPts val="200"/>
-              </a:spcAft>
-            </a:pPr>
-            <a:r>
-              <a:rPr sz="1700" b="0">
-                <a:solidFill>
-                  <a:srgbClr val="142B43"/>
-                </a:solidFill>
-                <a:latin typeface="Liberation Sans"/>
-              </a:rPr>
-              <a:t>Action mean: 128</a:t>
-            </a:r>
-          </a:p>
-        </p:txBody>
-      </p:sp>
-      <p:cxnSp>
-        <p:nvCxnSpPr>
-          <p:cNvPr id="61" name="Connector 60"/>
-          <p:cNvCxnSpPr/>
-          <p:nvPr/>
-        </p:nvCxnSpPr>
-        <p:spPr>
-          <a:xfrm>
-            <a:off x="6812280" y="5129784"/>
-            <a:ext cx="0" cy="265176"/>
-          </a:xfrm>
-          <a:prstGeom prst="line">
-            <a:avLst/>
-          </a:prstGeom>
-          <a:ln w="17780">
-            <a:solidFill>
-              <a:srgbClr val="087E83"/>
-            </a:solidFill>
-            <a:tailEnd type="triangle" w="sm" len="sm"/>
-          </a:ln>
-        </p:spPr>
-        <p:style>
-          <a:lnRef idx="2">
-            <a:schemeClr val="accent1"/>
-          </a:lnRef>
-          <a:fillRef idx="0">
-            <a:schemeClr val="accent1"/>
-          </a:fillRef>
-          <a:effectRef idx="1">
-            <a:schemeClr val="accent1"/>
-          </a:effectRef>
-          <a:fontRef idx="minor">
-            <a:schemeClr val="tx1"/>
-          </a:fontRef>
-        </p:style>
-      </p:cxnSp>
-      <p:cxnSp>
-        <p:nvCxnSpPr>
-          <p:cNvPr id="62" name="Connector 61"/>
-          <p:cNvCxnSpPr/>
-          <p:nvPr/>
-        </p:nvCxnSpPr>
-        <p:spPr>
-          <a:xfrm>
-            <a:off x="9372600" y="5129784"/>
-            <a:ext cx="0" cy="265176"/>
-          </a:xfrm>
-          <a:prstGeom prst="line">
-            <a:avLst/>
-          </a:prstGeom>
-          <a:ln w="17780">
-            <a:solidFill>
-              <a:srgbClr val="087E83"/>
-            </a:solidFill>
-            <a:tailEnd type="triangle" w="sm" len="sm"/>
-          </a:ln>
-        </p:spPr>
-        <p:style>
-          <a:lnRef idx="2">
-            <a:schemeClr val="accent1"/>
-          </a:lnRef>
-          <a:fillRef idx="0">
-            <a:schemeClr val="accent1"/>
-          </a:fillRef>
-          <a:effectRef idx="1">
-            <a:schemeClr val="accent1"/>
-          </a:effectRef>
-          <a:fontRef idx="minor">
-            <a:schemeClr val="tx1"/>
-          </a:fontRef>
-        </p:style>
-      </p:cxnSp>
-      <p:cxnSp>
-        <p:nvCxnSpPr>
-          <p:cNvPr id="63" name="Connector 62"/>
-          <p:cNvCxnSpPr/>
-          <p:nvPr/>
-        </p:nvCxnSpPr>
-        <p:spPr>
-          <a:xfrm>
-            <a:off x="6812280" y="5897880"/>
-            <a:ext cx="0" cy="155448"/>
-          </a:xfrm>
-          <a:prstGeom prst="line">
-            <a:avLst/>
-          </a:prstGeom>
-          <a:ln w="17780">
-            <a:solidFill>
-              <a:srgbClr val="087E83"/>
-            </a:solidFill>
-          </a:ln>
-        </p:spPr>
-        <p:style>
-          <a:lnRef idx="2">
-            <a:schemeClr val="accent1"/>
-          </a:lnRef>
-          <a:fillRef idx="0">
-            <a:schemeClr val="accent1"/>
-          </a:fillRef>
-          <a:effectRef idx="1">
-            <a:schemeClr val="accent1"/>
-          </a:effectRef>
-          <a:fontRef idx="minor">
-            <a:schemeClr val="tx1"/>
-          </a:fontRef>
-        </p:style>
-      </p:cxnSp>
-      <p:cxnSp>
-        <p:nvCxnSpPr>
-          <p:cNvPr id="64" name="Connector 63"/>
-          <p:cNvCxnSpPr/>
-          <p:nvPr/>
-        </p:nvCxnSpPr>
-        <p:spPr>
-          <a:xfrm>
-            <a:off x="6812280" y="6053328"/>
-            <a:ext cx="2514600" cy="0"/>
-          </a:xfrm>
-          <a:prstGeom prst="line">
-            <a:avLst/>
-          </a:prstGeom>
-          <a:ln w="17780">
-            <a:solidFill>
-              <a:srgbClr val="087E83"/>
-            </a:solidFill>
-          </a:ln>
-        </p:spPr>
-        <p:style>
-          <a:lnRef idx="2">
-            <a:schemeClr val="accent1"/>
-          </a:lnRef>
-          <a:fillRef idx="0">
-            <a:schemeClr val="accent1"/>
-          </a:fillRef>
-          <a:effectRef idx="1">
-            <a:schemeClr val="accent1"/>
-          </a:effectRef>
-          <a:fontRef idx="minor">
-            <a:schemeClr val="tx1"/>
-          </a:fontRef>
-        </p:style>
-      </p:cxnSp>
-      <p:cxnSp>
-        <p:nvCxnSpPr>
-          <p:cNvPr id="65" name="Connector 64"/>
-          <p:cNvCxnSpPr/>
-          <p:nvPr/>
-        </p:nvCxnSpPr>
-        <p:spPr>
-          <a:xfrm>
-            <a:off x="9372600" y="5897880"/>
-            <a:ext cx="0" cy="155448"/>
-          </a:xfrm>
-          <a:prstGeom prst="line">
-            <a:avLst/>
-          </a:prstGeom>
-          <a:ln w="17780">
-            <a:solidFill>
-              <a:srgbClr val="087E83"/>
-            </a:solidFill>
-          </a:ln>
-        </p:spPr>
-        <p:style>
-          <a:lnRef idx="2">
-            <a:schemeClr val="accent1"/>
-          </a:lnRef>
-          <a:fillRef idx="0">
-            <a:schemeClr val="accent1"/>
-          </a:fillRef>
-          <a:effectRef idx="1">
-            <a:schemeClr val="accent1"/>
-          </a:effectRef>
-          <a:fontRef idx="minor">
-            <a:schemeClr val="tx1"/>
-          </a:fontRef>
-        </p:style>
-      </p:cxnSp>
-      <p:cxnSp>
-        <p:nvCxnSpPr>
-          <p:cNvPr id="66" name="Connector 65"/>
-          <p:cNvCxnSpPr/>
-          <p:nvPr/>
-        </p:nvCxnSpPr>
-        <p:spPr>
-          <a:xfrm>
-            <a:off x="11932920" y="4206240"/>
-            <a:ext cx="0" cy="1847088"/>
-          </a:xfrm>
-          <a:prstGeom prst="line">
-            <a:avLst/>
-          </a:prstGeom>
-          <a:ln w="17780">
-            <a:solidFill>
-              <a:srgbClr val="087E83"/>
-            </a:solidFill>
-          </a:ln>
-        </p:spPr>
-        <p:style>
-          <a:lnRef idx="2">
-            <a:schemeClr val="accent1"/>
-          </a:lnRef>
-          <a:fillRef idx="0">
-            <a:schemeClr val="accent1"/>
-          </a:fillRef>
-          <a:effectRef idx="1">
-            <a:schemeClr val="accent1"/>
-          </a:effectRef>
-          <a:fontRef idx="minor">
-            <a:schemeClr val="tx1"/>
-          </a:fontRef>
-        </p:style>
-      </p:cxnSp>
-      <p:cxnSp>
-        <p:nvCxnSpPr>
-          <p:cNvPr id="67" name="Connector 66"/>
-          <p:cNvCxnSpPr/>
-          <p:nvPr/>
-        </p:nvCxnSpPr>
-        <p:spPr>
-          <a:xfrm flipH="1">
-            <a:off x="9326880" y="6053328"/>
-            <a:ext cx="2606040" cy="0"/>
-          </a:xfrm>
-          <a:prstGeom prst="line">
-            <a:avLst/>
-          </a:prstGeom>
-          <a:ln w="17780">
-            <a:solidFill>
-              <a:srgbClr val="087E83"/>
-            </a:solidFill>
-          </a:ln>
-        </p:spPr>
-        <p:style>
-          <a:lnRef idx="2">
-            <a:schemeClr val="accent1"/>
-          </a:lnRef>
-          <a:fillRef idx="0">
-            <a:schemeClr val="accent1"/>
-          </a:fillRef>
-          <a:effectRef idx="1">
-            <a:schemeClr val="accent1"/>
-          </a:effectRef>
-          <a:fontRef idx="minor">
-            <a:schemeClr val="tx1"/>
-          </a:fontRef>
-        </p:style>
-      </p:cxnSp>
-      <p:cxnSp>
-        <p:nvCxnSpPr>
-          <p:cNvPr id="68" name="Connector 67"/>
-          <p:cNvCxnSpPr/>
-          <p:nvPr/>
-        </p:nvCxnSpPr>
-        <p:spPr>
-          <a:xfrm>
-            <a:off x="9326880" y="6053328"/>
-            <a:ext cx="0" cy="164592"/>
-          </a:xfrm>
-          <a:prstGeom prst="line">
-            <a:avLst/>
-          </a:prstGeom>
-          <a:ln w="17780">
-            <a:solidFill>
-              <a:srgbClr val="087E83"/>
-            </a:solidFill>
-            <a:tailEnd type="triangle" w="sm" len="sm"/>
-          </a:ln>
-        </p:spPr>
-        <p:style>
-          <a:lnRef idx="2">
-            <a:schemeClr val="accent1"/>
-          </a:lnRef>
-          <a:fillRef idx="0">
-            <a:schemeClr val="accent1"/>
-          </a:fillRef>
-          <a:effectRef idx="1">
-            <a:schemeClr val="accent1"/>
-          </a:effectRef>
-          <a:fontRef idx="minor">
-            <a:schemeClr val="tx1"/>
-          </a:fontRef>
-        </p:style>
-      </p:cxnSp>
-      <p:sp>
-        <p:nvSpPr>
-          <p:cNvPr id="69" name="Rounded Rectangle 68"/>
-          <p:cNvSpPr/>
-          <p:nvPr/>
-        </p:nvSpPr>
-        <p:spPr>
-          <a:xfrm>
-            <a:off x="6263640" y="6217920"/>
-            <a:ext cx="6126480" cy="521207"/>
-          </a:xfrm>
-          <a:prstGeom prst="roundRect">
-            <a:avLst>
-              <a:gd name="adj" fmla="val 10000"/>
-            </a:avLst>
-          </a:prstGeom>
-          <a:solidFill>
-            <a:srgbClr val="FFFFFF"/>
-          </a:solidFill>
-          <a:ln w="14604">
-            <a:solidFill>
-              <a:srgbClr val="087E83"/>
-            </a:solidFill>
-          </a:ln>
-          <a:effectLst/>
-        </p:spPr>
-        <p:style>
-          <a:lnRef idx="1">
-            <a:schemeClr val="accent1"/>
-          </a:lnRef>
-          <a:fillRef idx="3">
-            <a:schemeClr val="accent1"/>
-          </a:fillRef>
-          <a:effectRef idx="2">
-            <a:schemeClr val="accent1"/>
-          </a:effectRef>
-          <a:fontRef idx="minor">
-            <a:schemeClr val="lt1"/>
-          </a:fontRef>
-        </p:style>
-        <p:txBody>
-          <a:bodyPr rtlCol="0" anchor="ctr"/>
-          <a:lstStyle/>
-          <a:p>
-            <a:pPr algn="ctr"/>
-          </a:p>
-        </p:txBody>
-      </p:sp>
-      <p:sp>
-        <p:nvSpPr>
-          <p:cNvPr id="70" name="TextBox 69"/>
-          <p:cNvSpPr txBox="1"/>
-          <p:nvPr/>
-        </p:nvSpPr>
-        <p:spPr>
-          <a:xfrm>
-            <a:off x="6295644" y="6231636"/>
-            <a:ext cx="6062472" cy="493775"/>
-          </a:xfrm>
-          <a:prstGeom prst="rect">
-            <a:avLst/>
-          </a:prstGeom>
-          <a:noFill/>
-        </p:spPr>
-        <p:txBody>
-          <a:bodyPr wrap="square" lIns="54864" rIns="54864" tIns="18288" bIns="18288" anchor="ctr">
-            <a:spAutoFit/>
-          </a:bodyPr>
-          <a:lstStyle/>
-          <a:p>
-            <a:pPr algn="ctr">
-              <a:spcAft>
-                <a:spcPts val="200"/>
-              </a:spcAft>
-            </a:pPr>
-            <a:r>
-              <a:rPr sz="1800" b="0">
-                <a:solidFill>
-                  <a:srgbClr val="142B43"/>
-                </a:solidFill>
-                <a:latin typeface="Liberation Sans"/>
-              </a:rPr>
-              <a:t>Concat + LayerNorm: 384  [Entity; Action; Context]</a:t>
-            </a:r>
-          </a:p>
-        </p:txBody>
-      </p:sp>
-      <p:sp>
-        <p:nvSpPr>
-          <p:cNvPr id="71" name="Rounded Rectangle 70"/>
-          <p:cNvSpPr/>
-          <p:nvPr/>
-        </p:nvSpPr>
-        <p:spPr>
-          <a:xfrm>
-            <a:off x="6263640" y="6958584"/>
-            <a:ext cx="6126480" cy="521207"/>
-          </a:xfrm>
-          <a:prstGeom prst="roundRect">
-            <a:avLst>
-              <a:gd name="adj" fmla="val 10000"/>
-            </a:avLst>
-          </a:prstGeom>
-          <a:solidFill>
-            <a:srgbClr val="FFFFFF"/>
-          </a:solidFill>
-          <a:ln w="14604">
-            <a:solidFill>
-              <a:srgbClr val="087E83"/>
-            </a:solidFill>
-          </a:ln>
-          <a:effectLst/>
-        </p:spPr>
-        <p:style>
-          <a:lnRef idx="1">
-            <a:schemeClr val="accent1"/>
-          </a:lnRef>
-          <a:fillRef idx="3">
-            <a:schemeClr val="accent1"/>
-          </a:fillRef>
-          <a:effectRef idx="2">
-            <a:schemeClr val="accent1"/>
-          </a:effectRef>
-          <a:fontRef idx="minor">
-            <a:schemeClr val="lt1"/>
-          </a:fontRef>
-        </p:style>
-        <p:txBody>
-          <a:bodyPr rtlCol="0" anchor="ctr"/>
-          <a:lstStyle/>
-          <a:p>
-            <a:pPr algn="ctr"/>
-          </a:p>
-        </p:txBody>
-      </p:sp>
-      <p:sp>
-        <p:nvSpPr>
-          <p:cNvPr id="72" name="TextBox 71"/>
-          <p:cNvSpPr txBox="1"/>
-          <p:nvPr/>
-        </p:nvSpPr>
-        <p:spPr>
-          <a:xfrm>
-            <a:off x="6295644" y="6972300"/>
-            <a:ext cx="6062472" cy="493775"/>
-          </a:xfrm>
-          <a:prstGeom prst="rect">
-            <a:avLst/>
-          </a:prstGeom>
-          <a:noFill/>
-        </p:spPr>
-        <p:txBody>
-          <a:bodyPr wrap="square" lIns="54864" rIns="54864" tIns="18288" bIns="18288" anchor="ctr">
-            <a:spAutoFit/>
-          </a:bodyPr>
-          <a:lstStyle/>
-          <a:p>
-            <a:pPr algn="ctr">
-              <a:spcAft>
-                <a:spcPts val="200"/>
-              </a:spcAft>
-            </a:pPr>
-            <a:r>
-              <a:rPr sz="1800" b="0">
-                <a:solidFill>
-                  <a:srgbClr val="142B43"/>
-                </a:solidFill>
-                <a:latin typeface="Liberation Sans"/>
-              </a:rPr>
-              <a:t>Scene pooling: mean / attention  •  S × 384 → 384</a:t>
-            </a:r>
-          </a:p>
-        </p:txBody>
-      </p:sp>
-      <p:cxnSp>
-        <p:nvCxnSpPr>
-          <p:cNvPr id="73" name="Connector 72"/>
-          <p:cNvCxnSpPr/>
-          <p:nvPr/>
-        </p:nvCxnSpPr>
-        <p:spPr>
-          <a:xfrm>
-            <a:off x="9326880" y="6739128"/>
-            <a:ext cx="0" cy="219456"/>
-          </a:xfrm>
-          <a:prstGeom prst="line">
-            <a:avLst/>
-          </a:prstGeom>
-          <a:ln w="17780">
-            <a:solidFill>
-              <a:srgbClr val="087E83"/>
-            </a:solidFill>
-            <a:tailEnd type="triangle" w="sm" len="sm"/>
-          </a:ln>
-        </p:spPr>
-        <p:style>
-          <a:lnRef idx="2">
-            <a:schemeClr val="accent1"/>
-          </a:lnRef>
-          <a:fillRef idx="0">
-            <a:schemeClr val="accent1"/>
-          </a:fillRef>
-          <a:effectRef idx="1">
-            <a:schemeClr val="accent1"/>
-          </a:effectRef>
-          <a:fontRef idx="minor">
-            <a:schemeClr val="tx1"/>
-          </a:fontRef>
-        </p:style>
-      </p:cxnSp>
-      <p:cxnSp>
-        <p:nvCxnSpPr>
-          <p:cNvPr id="74" name="Connector 73"/>
-          <p:cNvCxnSpPr/>
-          <p:nvPr/>
-        </p:nvCxnSpPr>
-        <p:spPr>
-          <a:xfrm>
-            <a:off x="9326880" y="7479792"/>
-            <a:ext cx="0" cy="146304"/>
-          </a:xfrm>
-          <a:prstGeom prst="line">
-            <a:avLst/>
-          </a:prstGeom>
-          <a:ln w="17780">
-            <a:solidFill>
-              <a:srgbClr val="087E83"/>
-            </a:solidFill>
-          </a:ln>
-        </p:spPr>
-        <p:style>
-          <a:lnRef idx="2">
-            <a:schemeClr val="accent1"/>
-          </a:lnRef>
-          <a:fillRef idx="0">
-            <a:schemeClr val="accent1"/>
-          </a:fillRef>
-          <a:effectRef idx="1">
-            <a:schemeClr val="accent1"/>
-          </a:effectRef>
-          <a:fontRef idx="minor">
-            <a:schemeClr val="tx1"/>
-          </a:fontRef>
-        </p:style>
-      </p:cxnSp>
-      <p:cxnSp>
-        <p:nvCxnSpPr>
-          <p:cNvPr id="75" name="Connector 74"/>
-          <p:cNvCxnSpPr/>
-          <p:nvPr/>
-        </p:nvCxnSpPr>
-        <p:spPr>
-          <a:xfrm>
-            <a:off x="9326880" y="7626096"/>
-            <a:ext cx="1234440" cy="0"/>
-          </a:xfrm>
-          <a:prstGeom prst="line">
-            <a:avLst/>
-          </a:prstGeom>
-          <a:ln w="17780">
-            <a:solidFill>
-              <a:srgbClr val="087E83"/>
-            </a:solidFill>
-          </a:ln>
-        </p:spPr>
-        <p:style>
-          <a:lnRef idx="2">
-            <a:schemeClr val="accent1"/>
-          </a:lnRef>
-          <a:fillRef idx="0">
-            <a:schemeClr val="accent1"/>
-          </a:fillRef>
-          <a:effectRef idx="1">
-            <a:schemeClr val="accent1"/>
-          </a:effectRef>
-          <a:fontRef idx="minor">
-            <a:schemeClr val="tx1"/>
-          </a:fontRef>
-        </p:style>
-      </p:cxnSp>
-      <p:cxnSp>
-        <p:nvCxnSpPr>
-          <p:cNvPr id="76" name="Connector 75"/>
-          <p:cNvCxnSpPr/>
-          <p:nvPr/>
-        </p:nvCxnSpPr>
-        <p:spPr>
-          <a:xfrm>
-            <a:off x="10561320" y="7626096"/>
-            <a:ext cx="0" cy="164592"/>
-          </a:xfrm>
-          <a:prstGeom prst="line">
-            <a:avLst/>
-          </a:prstGeom>
-          <a:ln w="17780">
-            <a:solidFill>
-              <a:srgbClr val="087E83"/>
-            </a:solidFill>
-            <a:tailEnd type="triangle" w="sm" len="sm"/>
-          </a:ln>
-        </p:spPr>
-        <p:style>
-          <a:lnRef idx="2">
-            <a:schemeClr val="accent1"/>
-          </a:lnRef>
-          <a:fillRef idx="0">
-            <a:schemeClr val="accent1"/>
-          </a:fillRef>
-          <a:effectRef idx="1">
-            <a:schemeClr val="accent1"/>
-          </a:effectRef>
-          <a:fontRef idx="minor">
-            <a:schemeClr val="tx1"/>
-          </a:fontRef>
-        </p:style>
-      </p:cxnSp>
-      <p:cxnSp>
-        <p:nvCxnSpPr>
-          <p:cNvPr id="77" name="Connector 76"/>
-          <p:cNvCxnSpPr/>
-          <p:nvPr/>
-        </p:nvCxnSpPr>
-        <p:spPr>
-          <a:xfrm>
-            <a:off x="14493240" y="5129784"/>
-            <a:ext cx="0" cy="2496312"/>
-          </a:xfrm>
-          <a:prstGeom prst="line">
-            <a:avLst/>
-          </a:prstGeom>
-          <a:ln w="17780">
-            <a:solidFill>
-              <a:srgbClr val="087E83"/>
-            </a:solidFill>
-          </a:ln>
-        </p:spPr>
-        <p:style>
-          <a:lnRef idx="2">
-            <a:schemeClr val="accent1"/>
-          </a:lnRef>
-          <a:fillRef idx="0">
-            <a:schemeClr val="accent1"/>
-          </a:fillRef>
-          <a:effectRef idx="1">
-            <a:schemeClr val="accent1"/>
-          </a:effectRef>
-          <a:fontRef idx="minor">
-            <a:schemeClr val="tx1"/>
-          </a:fontRef>
-        </p:style>
-      </p:cxnSp>
-      <p:cxnSp>
-        <p:nvCxnSpPr>
-          <p:cNvPr id="78" name="Connector 77"/>
-          <p:cNvCxnSpPr/>
-          <p:nvPr/>
-        </p:nvCxnSpPr>
-        <p:spPr>
-          <a:xfrm flipH="1">
-            <a:off x="10561320" y="7626096"/>
-            <a:ext cx="3931920" cy="0"/>
-          </a:xfrm>
-          <a:prstGeom prst="line">
-            <a:avLst/>
-          </a:prstGeom>
-          <a:ln w="17780">
-            <a:solidFill>
-              <a:srgbClr val="087E83"/>
-            </a:solidFill>
-          </a:ln>
-        </p:spPr>
-        <p:style>
-          <a:lnRef idx="2">
-            <a:schemeClr val="accent1"/>
-          </a:lnRef>
-          <a:fillRef idx="0">
-            <a:schemeClr val="accent1"/>
-          </a:fillRef>
-          <a:effectRef idx="1">
-            <a:schemeClr val="accent1"/>
-          </a:effectRef>
-          <a:fontRef idx="minor">
-            <a:schemeClr val="tx1"/>
-          </a:fontRef>
-        </p:style>
-      </p:cxnSp>
-      <p:sp>
-        <p:nvSpPr>
-          <p:cNvPr id="79" name="Rounded Rectangle 78"/>
-          <p:cNvSpPr/>
-          <p:nvPr/>
-        </p:nvSpPr>
-        <p:spPr>
-          <a:xfrm>
-            <a:off x="6766560" y="7790688"/>
-            <a:ext cx="7589520" cy="585216"/>
-          </a:xfrm>
-          <a:prstGeom prst="roundRect">
-            <a:avLst>
-              <a:gd name="adj" fmla="val 10000"/>
-            </a:avLst>
-          </a:prstGeom>
-          <a:solidFill>
-            <a:srgbClr val="DDF2ED"/>
-          </a:solidFill>
-          <a:ln w="14604">
-            <a:solidFill>
-              <a:srgbClr val="087E83"/>
-            </a:solidFill>
-          </a:ln>
-          <a:effectLst/>
-        </p:spPr>
-        <p:style>
-          <a:lnRef idx="1">
-            <a:schemeClr val="accent1"/>
-          </a:lnRef>
-          <a:fillRef idx="3">
-            <a:schemeClr val="accent1"/>
-          </a:fillRef>
-          <a:effectRef idx="2">
-            <a:schemeClr val="accent1"/>
-          </a:effectRef>
-          <a:fontRef idx="minor">
-            <a:schemeClr val="lt1"/>
-          </a:fontRef>
-        </p:style>
-        <p:txBody>
-          <a:bodyPr rtlCol="0" anchor="ctr"/>
-          <a:lstStyle/>
-          <a:p>
-            <a:pPr algn="ctr"/>
-          </a:p>
-        </p:txBody>
-      </p:sp>
-      <p:sp>
-        <p:nvSpPr>
-          <p:cNvPr id="80" name="TextBox 79"/>
-          <p:cNvSpPr txBox="1"/>
-          <p:nvPr/>
-        </p:nvSpPr>
-        <p:spPr>
-          <a:xfrm>
-            <a:off x="6798564" y="7804404"/>
-            <a:ext cx="7525512" cy="557784"/>
-          </a:xfrm>
-          <a:prstGeom prst="rect">
-            <a:avLst/>
-          </a:prstGeom>
-          <a:noFill/>
-        </p:spPr>
-        <p:txBody>
-          <a:bodyPr wrap="square" lIns="54864" rIns="54864" tIns="18288" bIns="18288" anchor="ctr">
-            <a:spAutoFit/>
-          </a:bodyPr>
-          <a:lstStyle/>
-          <a:p>
-            <a:pPr algn="ctr">
-              <a:spcAft>
-                <a:spcPts val="200"/>
-              </a:spcAft>
-            </a:pPr>
-            <a:r>
-              <a:rPr sz="1900" b="1">
-                <a:solidFill>
-                  <a:srgbClr val="142B43"/>
-                </a:solidFill>
-                <a:latin typeface="Liberation Sans"/>
-              </a:rPr>
-              <a:t>[Title 128; Video 384] = 512  →  Residual MLP 512</a:t>
-            </a:r>
-          </a:p>
-        </p:txBody>
-      </p:sp>
-      <p:cxnSp>
-        <p:nvCxnSpPr>
-          <p:cNvPr id="81" name="Connector 80"/>
-          <p:cNvCxnSpPr/>
-          <p:nvPr/>
-        </p:nvCxnSpPr>
-        <p:spPr>
-          <a:xfrm>
-            <a:off x="2784348" y="7909560"/>
-            <a:ext cx="0" cy="1024128"/>
-          </a:xfrm>
-          <a:prstGeom prst="line">
-            <a:avLst/>
-          </a:prstGeom>
-          <a:ln w="17780">
-            <a:solidFill>
-              <a:srgbClr val="2864B7"/>
-            </a:solidFill>
-            <a:tailEnd type="triangle" w="sm" len="sm"/>
-          </a:ln>
-        </p:spPr>
-        <p:style>
-          <a:lnRef idx="2">
-            <a:schemeClr val="accent1"/>
-          </a:lnRef>
-          <a:fillRef idx="0">
-            <a:schemeClr val="accent1"/>
-          </a:fillRef>
-          <a:effectRef idx="1">
-            <a:schemeClr val="accent1"/>
-          </a:effectRef>
-          <a:fontRef idx="minor">
-            <a:schemeClr val="tx1"/>
-          </a:fontRef>
-        </p:style>
-      </p:cxnSp>
-      <p:cxnSp>
-        <p:nvCxnSpPr>
-          <p:cNvPr id="82" name="Connector 81"/>
-          <p:cNvCxnSpPr/>
-          <p:nvPr/>
-        </p:nvCxnSpPr>
-        <p:spPr>
-          <a:xfrm>
-            <a:off x="10561320" y="8375904"/>
-            <a:ext cx="0" cy="557784"/>
-          </a:xfrm>
-          <a:prstGeom prst="line">
-            <a:avLst/>
-          </a:prstGeom>
-          <a:ln w="17780">
-            <a:solidFill>
-              <a:srgbClr val="087E83"/>
-            </a:solidFill>
-            <a:tailEnd type="triangle" w="sm" len="sm"/>
-          </a:ln>
-        </p:spPr>
-        <p:style>
-          <a:lnRef idx="2">
-            <a:schemeClr val="accent1"/>
-          </a:lnRef>
-          <a:fillRef idx="0">
-            <a:schemeClr val="accent1"/>
-          </a:fillRef>
-          <a:effectRef idx="1">
-            <a:schemeClr val="accent1"/>
-          </a:effectRef>
-          <a:fontRef idx="minor">
-            <a:schemeClr val="tx1"/>
-          </a:fontRef>
-        </p:style>
-      </p:cxnSp>
-      <p:sp>
-        <p:nvSpPr>
-          <p:cNvPr id="83" name="Rounded Rectangle 82"/>
-          <p:cNvSpPr/>
-          <p:nvPr/>
-        </p:nvSpPr>
-        <p:spPr>
-          <a:xfrm>
-            <a:off x="502920" y="8933688"/>
-            <a:ext cx="15453359" cy="1865376"/>
-          </a:xfrm>
-          <a:prstGeom prst="roundRect">
-            <a:avLst>
-              <a:gd name="adj" fmla="val 10000"/>
-            </a:avLst>
-          </a:prstGeom>
-          <a:solidFill>
-            <a:srgbClr val="F6F8FB"/>
-          </a:solidFill>
-          <a:ln w="14604">
-            <a:solidFill>
-              <a:srgbClr val="AAB9C7"/>
-            </a:solidFill>
-          </a:ln>
-          <a:effectLst/>
-        </p:spPr>
-        <p:style>
-          <a:lnRef idx="1">
-            <a:schemeClr val="accent1"/>
-          </a:lnRef>
-          <a:fillRef idx="3">
-            <a:schemeClr val="accent1"/>
-          </a:fillRef>
-          <a:effectRef idx="2">
-            <a:schemeClr val="accent1"/>
-          </a:effectRef>
-          <a:fontRef idx="minor">
-            <a:schemeClr val="lt1"/>
-          </a:fontRef>
-        </p:style>
-        <p:txBody>
-          <a:bodyPr rtlCol="0" anchor="ctr"/>
-          <a:lstStyle/>
-          <a:p>
-            <a:pPr algn="ctr"/>
-          </a:p>
-        </p:txBody>
-      </p:sp>
-      <p:sp>
-        <p:nvSpPr>
-          <p:cNvPr id="84" name="TextBox 83"/>
-          <p:cNvSpPr txBox="1"/>
-          <p:nvPr/>
-        </p:nvSpPr>
-        <p:spPr>
-          <a:xfrm>
-            <a:off x="534924" y="8947404"/>
-            <a:ext cx="15389351" cy="1837944"/>
-          </a:xfrm>
-          <a:prstGeom prst="rect">
-            <a:avLst/>
-          </a:prstGeom>
-          <a:noFill/>
-        </p:spPr>
-        <p:txBody>
-          <a:bodyPr wrap="square" lIns="54864" rIns="54864" tIns="18288" bIns="18288" anchor="ctr">
-            <a:spAutoFit/>
-          </a:bodyPr>
-          <a:lstStyle/>
-          <a:p>
-            <a:pPr algn="ctr">
-              <a:spcAft>
-                <a:spcPts val="200"/>
-              </a:spcAft>
-            </a:pPr>
-          </a:p>
-        </p:txBody>
-      </p:sp>
-      <p:sp>
-        <p:nvSpPr>
-          <p:cNvPr id="85" name="TextBox 84"/>
-          <p:cNvSpPr txBox="1"/>
-          <p:nvPr/>
-        </p:nvSpPr>
-        <p:spPr>
-          <a:xfrm>
-            <a:off x="777240" y="9052560"/>
-            <a:ext cx="14813280" cy="310896"/>
-          </a:xfrm>
-          <a:prstGeom prst="rect">
-            <a:avLst/>
-          </a:prstGeom>
-          <a:noFill/>
+          <a:effectLst/>
         </p:spPr>
         <p:txBody>
           <a:bodyPr wrap="square" lIns="54864" rIns="54864" tIns="18288" bIns="18288" anchor="ctr">
@@ -7102,12 +3953,12 @@
         </p:nvSpPr>
         <p:spPr>
           <a:xfrm>
-            <a:off x="868680" y="9564624"/>
-            <a:ext cx="3017520" cy="704088"/>
+            <a:off x="944429" y="10113264"/>
+            <a:ext cx="3642450" cy="704088"/>
           </a:xfrm>
           <a:prstGeom prst="roundRect">
             <a:avLst>
-              <a:gd name="adj" fmla="val 10000"/>
+              <a:gd name="adj" fmla="val 7142"/>
             </a:avLst>
           </a:prstGeom>
           <a:solidFill>
@@ -7127,7 +3978,7 @@
           <a:fillRef idx="3">
             <a:schemeClr val="accent1"/>
           </a:fillRef>
-          <a:effectRef idx="2">
+          <a:effectRef idx="0">
             <a:schemeClr val="accent1"/>
           </a:effectRef>
           <a:fontRef idx="minor">
@@ -7150,13 +4001,14 @@
         </p:nvSpPr>
         <p:spPr>
           <a:xfrm>
-            <a:off x="900684" y="9578340"/>
-            <a:ext cx="2953512" cy="676656"/>
+            <a:off x="983061" y="10126980"/>
+            <a:ext cx="3565186" cy="676656"/>
           </a:xfrm>
           <a:prstGeom prst="rect">
             <a:avLst/>
           </a:prstGeom>
           <a:noFill/>
+          <a:effectLst/>
         </p:spPr>
         <p:txBody>
           <a:bodyPr wrap="square" lIns="54864" rIns="54864" tIns="18288" bIns="18288" anchor="ctr">
@@ -7205,12 +4057,12 @@
         </p:nvSpPr>
         <p:spPr>
           <a:xfrm>
-            <a:off x="4453128" y="9564624"/>
-            <a:ext cx="2926080" cy="704088"/>
+            <a:off x="5271218" y="10113264"/>
+            <a:ext cx="3532072" cy="704088"/>
           </a:xfrm>
           <a:prstGeom prst="roundRect">
             <a:avLst>
-              <a:gd name="adj" fmla="val 10000"/>
+              <a:gd name="adj" fmla="val 7142"/>
             </a:avLst>
           </a:prstGeom>
           <a:solidFill>
@@ -7230,7 +4082,7 @@
           <a:fillRef idx="3">
             <a:schemeClr val="accent1"/>
           </a:fillRef>
-          <a:effectRef idx="2">
+          <a:effectRef idx="0">
             <a:schemeClr val="accent1"/>
           </a:effectRef>
           <a:fontRef idx="minor">
@@ -7253,13 +4105,14 @@
         </p:nvSpPr>
         <p:spPr>
           <a:xfrm>
-            <a:off x="4485132" y="9578340"/>
-            <a:ext cx="2862072" cy="676656"/>
+            <a:off x="5309850" y="10126980"/>
+            <a:ext cx="3454808" cy="676656"/>
           </a:xfrm>
           <a:prstGeom prst="rect">
             <a:avLst/>
           </a:prstGeom>
           <a:noFill/>
+          <a:effectLst/>
         </p:spPr>
         <p:txBody>
           <a:bodyPr wrap="square" lIns="54864" rIns="54864" tIns="18288" bIns="18288" anchor="ctr">
@@ -7308,12 +4161,12 @@
         </p:nvSpPr>
         <p:spPr>
           <a:xfrm>
-            <a:off x="7955279" y="9564624"/>
-            <a:ext cx="2880360" cy="704088"/>
+            <a:off x="9498666" y="10113264"/>
+            <a:ext cx="3476884" cy="704088"/>
           </a:xfrm>
           <a:prstGeom prst="roundRect">
             <a:avLst>
-              <a:gd name="adj" fmla="val 10000"/>
+              <a:gd name="adj" fmla="val 7142"/>
             </a:avLst>
           </a:prstGeom>
           <a:solidFill>
@@ -7333,7 +4186,7 @@
           <a:fillRef idx="3">
             <a:schemeClr val="accent1"/>
           </a:fillRef>
-          <a:effectRef idx="2">
+          <a:effectRef idx="0">
             <a:schemeClr val="accent1"/>
           </a:effectRef>
           <a:fontRef idx="minor">
@@ -7356,13 +4209,14 @@
         </p:nvSpPr>
         <p:spPr>
           <a:xfrm>
-            <a:off x="7987283" y="9578340"/>
-            <a:ext cx="2816352" cy="676656"/>
+            <a:off x="9537299" y="10126980"/>
+            <a:ext cx="3399620" cy="676656"/>
           </a:xfrm>
           <a:prstGeom prst="rect">
             <a:avLst/>
           </a:prstGeom>
           <a:noFill/>
+          <a:effectLst/>
         </p:spPr>
         <p:txBody>
           <a:bodyPr wrap="square" lIns="54864" rIns="54864" tIns="18288" bIns="18288" anchor="ctr">
@@ -7411,12 +4265,12 @@
         </p:nvSpPr>
         <p:spPr>
           <a:xfrm>
-            <a:off x="11567160" y="9564624"/>
-            <a:ext cx="3749039" cy="704088"/>
+            <a:off x="13858570" y="10113264"/>
+            <a:ext cx="4525467" cy="704088"/>
           </a:xfrm>
           <a:prstGeom prst="roundRect">
             <a:avLst>
-              <a:gd name="adj" fmla="val 10000"/>
+              <a:gd name="adj" fmla="val 7142"/>
             </a:avLst>
           </a:prstGeom>
           <a:solidFill>
@@ -7436,7 +4290,7 @@
           <a:fillRef idx="3">
             <a:schemeClr val="accent1"/>
           </a:fillRef>
-          <a:effectRef idx="2">
+          <a:effectRef idx="0">
             <a:schemeClr val="accent1"/>
           </a:effectRef>
           <a:fontRef idx="minor">
@@ -7459,13 +4313,14 @@
         </p:nvSpPr>
         <p:spPr>
           <a:xfrm>
-            <a:off x="11599164" y="9578340"/>
-            <a:ext cx="3685031" cy="676656"/>
+            <a:off x="13897202" y="10126980"/>
+            <a:ext cx="4448203" cy="676656"/>
           </a:xfrm>
           <a:prstGeom prst="rect">
             <a:avLst/>
           </a:prstGeom>
           <a:noFill/>
+          <a:effectLst/>
         </p:spPr>
         <p:txBody>
           <a:bodyPr wrap="square" lIns="54864" rIns="54864" tIns="18288" bIns="18288" anchor="ctr">
@@ -7514,8 +4369,8 @@
         </p:nvCxnSpPr>
         <p:spPr>
           <a:xfrm>
-            <a:off x="3886200" y="9916668"/>
-            <a:ext cx="566928" cy="0"/>
+            <a:off x="4586879" y="10465308"/>
+            <a:ext cx="684339" cy="0"/>
           </a:xfrm>
           <a:prstGeom prst="line">
             <a:avLst/>
@@ -7526,6 +4381,7 @@
             </a:solidFill>
             <a:tailEnd type="triangle" w="sm" len="sm"/>
           </a:ln>
+          <a:effectLst/>
         </p:spPr>
         <p:style>
           <a:lnRef idx="2">
@@ -7534,7 +4390,7 @@
           <a:fillRef idx="0">
             <a:schemeClr val="accent1"/>
           </a:fillRef>
-          <a:effectRef idx="1">
+          <a:effectRef idx="0">
             <a:schemeClr val="accent1"/>
           </a:effectRef>
           <a:fontRef idx="minor">
@@ -7550,8 +4406,8 @@
         </p:nvCxnSpPr>
         <p:spPr>
           <a:xfrm>
-            <a:off x="7379208" y="9916668"/>
-            <a:ext cx="576071" cy="0"/>
+            <a:off x="8803291" y="10465308"/>
+            <a:ext cx="695375" cy="0"/>
           </a:xfrm>
           <a:prstGeom prst="line">
             <a:avLst/>
@@ -7562,6 +4418,7 @@
             </a:solidFill>
             <a:tailEnd type="triangle" w="sm" len="sm"/>
           </a:ln>
+          <a:effectLst/>
         </p:spPr>
         <p:style>
           <a:lnRef idx="2">
@@ -7570,7 +4427,7 @@
           <a:fillRef idx="0">
             <a:schemeClr val="accent1"/>
           </a:fillRef>
-          <a:effectRef idx="1">
+          <a:effectRef idx="0">
             <a:schemeClr val="accent1"/>
           </a:effectRef>
           <a:fontRef idx="minor">
@@ -7586,8 +4443,8 @@
         </p:nvCxnSpPr>
         <p:spPr>
           <a:xfrm>
-            <a:off x="10835640" y="9916668"/>
-            <a:ext cx="731520" cy="0"/>
+            <a:off x="12975552" y="10465308"/>
+            <a:ext cx="883018" cy="0"/>
           </a:xfrm>
           <a:prstGeom prst="line">
             <a:avLst/>
@@ -7598,6 +4455,7 @@
             </a:solidFill>
             <a:tailEnd type="triangle" w="sm" len="sm"/>
           </a:ln>
+          <a:effectLst/>
         </p:spPr>
         <p:style>
           <a:lnRef idx="2">
@@ -7606,7 +4464,7 @@
           <a:fillRef idx="0">
             <a:schemeClr val="accent1"/>
           </a:fillRef>
-          <a:effectRef idx="1">
+          <a:effectRef idx="0">
             <a:schemeClr val="accent1"/>
           </a:effectRef>
           <a:fontRef idx="minor">
@@ -7622,7 +4480,7 @@
         </p:nvCxnSpPr>
         <p:spPr>
           <a:xfrm>
-            <a:off x="2377440" y="10268712"/>
+            <a:off x="2765654" y="10817352"/>
             <a:ext cx="0" cy="384048"/>
           </a:xfrm>
           <a:prstGeom prst="line">
@@ -7633,6 +4491,7 @@
               <a:srgbClr val="617286"/>
             </a:solidFill>
           </a:ln>
+          <a:effectLst/>
         </p:spPr>
         <p:style>
           <a:lnRef idx="2">
@@ -7641,7 +4500,7 @@
           <a:fillRef idx="0">
             <a:schemeClr val="accent1"/>
           </a:fillRef>
-          <a:effectRef idx="1">
+          <a:effectRef idx="0">
             <a:schemeClr val="accent1"/>
           </a:effectRef>
           <a:fontRef idx="minor">
@@ -7657,8 +4516,8 @@
         </p:nvCxnSpPr>
         <p:spPr>
           <a:xfrm>
-            <a:off x="2377440" y="10652760"/>
-            <a:ext cx="11064240" cy="0"/>
+            <a:off x="2765654" y="11201400"/>
+            <a:ext cx="13355650" cy="0"/>
           </a:xfrm>
           <a:prstGeom prst="line">
             <a:avLst/>
@@ -7668,6 +4527,7 @@
               <a:srgbClr val="617286"/>
             </a:solidFill>
           </a:ln>
+          <a:effectLst/>
         </p:spPr>
         <p:style>
           <a:lnRef idx="2">
@@ -7676,7 +4536,7 @@
           <a:fillRef idx="0">
             <a:schemeClr val="accent1"/>
           </a:fillRef>
-          <a:effectRef idx="1">
+          <a:effectRef idx="0">
             <a:schemeClr val="accent1"/>
           </a:effectRef>
           <a:fontRef idx="minor">
@@ -7692,7 +4552,7 @@
         </p:nvCxnSpPr>
         <p:spPr>
           <a:xfrm flipV="1">
-            <a:off x="13441680" y="10268712"/>
+            <a:off x="16121304" y="10817352"/>
             <a:ext cx="0" cy="384048"/>
           </a:xfrm>
           <a:prstGeom prst="line">
@@ -7704,6 +4564,7 @@
             </a:solidFill>
             <a:tailEnd type="triangle" w="sm" len="sm"/>
           </a:ln>
+          <a:effectLst/>
         </p:spPr>
         <p:style>
           <a:lnRef idx="2">
@@ -7712,7 +4573,7 @@
           <a:fillRef idx="0">
             <a:schemeClr val="accent1"/>
           </a:fillRef>
-          <a:effectRef idx="1">
+          <a:effectRef idx="0">
             <a:schemeClr val="accent1"/>
           </a:effectRef>
           <a:fontRef idx="minor">
@@ -7728,13 +4589,14 @@
         </p:nvSpPr>
         <p:spPr>
           <a:xfrm>
-            <a:off x="4663440" y="10360152"/>
-            <a:ext cx="6035040" cy="228600"/>
+            <a:off x="5525086" y="10908792"/>
+            <a:ext cx="7284900" cy="228600"/>
           </a:xfrm>
           <a:prstGeom prst="rect">
             <a:avLst/>
           </a:prstGeom>
           <a:noFill/>
+          <a:effectLst/>
         </p:spPr>
         <p:txBody>
           <a:bodyPr wrap="square" lIns="54864" rIns="54864" tIns="18288" bIns="18288" anchor="ctr">
@@ -7767,13 +4629,14 @@
         </p:nvSpPr>
         <p:spPr>
           <a:xfrm>
-            <a:off x="594360" y="10972800"/>
-            <a:ext cx="15361920" cy="365760"/>
+            <a:off x="594360" y="11521440"/>
+            <a:ext cx="18562320" cy="365760"/>
           </a:xfrm>
           <a:prstGeom prst="rect">
             <a:avLst/>
           </a:prstGeom>
           <a:noFill/>
+          <a:effectLst/>
         </p:spPr>
         <p:txBody>
           <a:bodyPr wrap="square" lIns="54864" rIns="54864" tIns="18288" bIns="18288" anchor="ctr">
@@ -7787,17 +4650,3393 @@
               </a:spcAft>
             </a:pPr>
             <a:r>
-              <a:rPr sz="1400" b="0">
+              <a:rPr sz="1400">
                 <a:solidFill>
-                  <a:srgbClr val="617286"/>
+                  <a:srgbClr val="62768D"/>
                 </a:solidFill>
-                <a:latin typeface="Liberation Sans"/>
+                <a:latin typeface="Aptos"/>
               </a:rPr>
-              <a:t>E / A = entities / actions per scene; S = valid scenes  |  BGE weights shared, texts embedded separately  |  No-title: 128 zeros</a:t>
-            </a:r>
-          </a:p>
-        </p:txBody>
-      </p:sp>
+              <a:t>E / A = entities / actions per scene; S = valid scenes  |  BGE weights shared, inputs embedded separately  |  No-title: 128 zeros</a:t>
+            </a:r>
+          </a:p>
+        </p:txBody>
+      </p:sp>
+      <p:sp>
+        <p:nvSpPr>
+          <p:cNvPr id="102" name="Rounded Rectangle 101"/>
+          <p:cNvSpPr/>
+          <p:nvPr/>
+        </p:nvSpPr>
+        <p:spPr>
+          <a:xfrm>
+            <a:off x="4087368" y="2057400"/>
+            <a:ext cx="1783080" cy="685800"/>
+          </a:xfrm>
+          <a:prstGeom prst="roundRect">
+            <a:avLst>
+              <a:gd name="adj" fmla="val 7333"/>
+            </a:avLst>
+          </a:prstGeom>
+          <a:solidFill>
+            <a:srgbClr val="FFFFFF"/>
+          </a:solidFill>
+          <a:ln w="14604">
+            <a:solidFill>
+              <a:srgbClr val="2465C4"/>
+            </a:solidFill>
+          </a:ln>
+          <a:effectLst/>
+        </p:spPr>
+        <p:style>
+          <a:lnRef idx="1">
+            <a:schemeClr val="accent1"/>
+          </a:lnRef>
+          <a:fillRef idx="3">
+            <a:schemeClr val="accent1"/>
+          </a:fillRef>
+          <a:effectRef idx="0">
+            <a:schemeClr val="accent1"/>
+          </a:effectRef>
+          <a:fontRef idx="minor">
+            <a:schemeClr val="lt1"/>
+          </a:fontRef>
+        </p:style>
+        <p:txBody>
+          <a:bodyPr rtlCol="0" anchor="ctr" wrap="square" lIns="54864" rIns="54864" tIns="27432" bIns="27432"/>
+          <a:lstStyle/>
+          <a:p>
+            <a:pPr algn="ctr"/>
+            <a:r>
+              <a:rPr sz="1800">
+                <a:solidFill>
+                  <a:srgbClr val="19324F"/>
+                </a:solidFill>
+                <a:latin typeface="Aptos"/>
+              </a:rPr>
+              <a:t>Title</a:t>
+            </a:r>
+          </a:p>
+        </p:txBody>
+      </p:sp>
+      <p:sp>
+        <p:nvSpPr>
+          <p:cNvPr id="103" name="Rounded Rectangle 102"/>
+          <p:cNvSpPr/>
+          <p:nvPr/>
+        </p:nvSpPr>
+        <p:spPr>
+          <a:xfrm>
+            <a:off x="4087368" y="3291840"/>
+            <a:ext cx="1783080" cy="731520"/>
+          </a:xfrm>
+          <a:prstGeom prst="roundRect">
+            <a:avLst>
+              <a:gd name="adj" fmla="val 6875"/>
+            </a:avLst>
+          </a:prstGeom>
+          <a:solidFill>
+            <a:srgbClr val="EFF3F7"/>
+          </a:solidFill>
+          <a:ln w="14604">
+            <a:solidFill>
+              <a:srgbClr val="2465C4"/>
+            </a:solidFill>
+          </a:ln>
+          <a:effectLst/>
+        </p:spPr>
+        <p:style>
+          <a:lnRef idx="1">
+            <a:schemeClr val="accent1"/>
+          </a:lnRef>
+          <a:fillRef idx="3">
+            <a:schemeClr val="accent1"/>
+          </a:fillRef>
+          <a:effectRef idx="0">
+            <a:schemeClr val="accent1"/>
+          </a:effectRef>
+          <a:fontRef idx="minor">
+            <a:schemeClr val="lt1"/>
+          </a:fontRef>
+        </p:style>
+        <p:txBody>
+          <a:bodyPr rtlCol="0" anchor="ctr" wrap="square" lIns="54864" rIns="54864" tIns="27432" bIns="27432"/>
+          <a:lstStyle/>
+          <a:p>
+            <a:pPr algn="ctr"/>
+            <a:r>
+              <a:rPr sz="1700">
+                <a:solidFill>
+                  <a:srgbClr val="19324F"/>
+                </a:solidFill>
+                <a:latin typeface="Aptos"/>
+              </a:rPr>
+              <a:t>BGE [frozen]</a:t>
+            </a:r>
+          </a:p>
+          <a:p>
+            <a:pPr algn="ctr"/>
+            <a:r>
+              <a:rPr sz="1700">
+                <a:solidFill>
+                  <a:srgbClr val="19324F"/>
+                </a:solidFill>
+                <a:latin typeface="Aptos"/>
+              </a:rPr>
+              <a:t>1,024</a:t>
+            </a:r>
+          </a:p>
+        </p:txBody>
+      </p:sp>
+      <p:sp>
+        <p:nvSpPr>
+          <p:cNvPr id="104" name="Rounded Rectangle 103"/>
+          <p:cNvSpPr/>
+          <p:nvPr/>
+        </p:nvSpPr>
+        <p:spPr>
+          <a:xfrm>
+            <a:off x="4087368" y="4617720"/>
+            <a:ext cx="1783080" cy="731520"/>
+          </a:xfrm>
+          <a:prstGeom prst="roundRect">
+            <a:avLst>
+              <a:gd name="adj" fmla="val 6875"/>
+            </a:avLst>
+          </a:prstGeom>
+          <a:solidFill>
+            <a:srgbClr val="FFFFFF"/>
+          </a:solidFill>
+          <a:ln w="14604">
+            <a:solidFill>
+              <a:srgbClr val="2465C4"/>
+            </a:solidFill>
+          </a:ln>
+          <a:effectLst/>
+        </p:spPr>
+        <p:style>
+          <a:lnRef idx="1">
+            <a:schemeClr val="accent1"/>
+          </a:lnRef>
+          <a:fillRef idx="3">
+            <a:schemeClr val="accent1"/>
+          </a:fillRef>
+          <a:effectRef idx="0">
+            <a:schemeClr val="accent1"/>
+          </a:effectRef>
+          <a:fontRef idx="minor">
+            <a:schemeClr val="lt1"/>
+          </a:fontRef>
+        </p:style>
+        <p:txBody>
+          <a:bodyPr rtlCol="0" anchor="ctr" wrap="square" lIns="54864" rIns="54864" tIns="27432" bIns="27432"/>
+          <a:lstStyle/>
+          <a:p>
+            <a:pPr algn="ctr"/>
+            <a:r>
+              <a:rPr sz="1600">
+                <a:solidFill>
+                  <a:srgbClr val="19324F"/>
+                </a:solidFill>
+                <a:latin typeface="Aptos"/>
+              </a:rPr>
+              <a:t>Linear projection</a:t>
+            </a:r>
+          </a:p>
+          <a:p>
+            <a:pPr algn="ctr"/>
+            <a:r>
+              <a:rPr sz="1600">
+                <a:solidFill>
+                  <a:srgbClr val="19324F"/>
+                </a:solidFill>
+                <a:latin typeface="Aptos"/>
+              </a:rPr>
+              <a:t>1,024 → 128</a:t>
+            </a:r>
+          </a:p>
+        </p:txBody>
+      </p:sp>
+      <p:cxnSp>
+        <p:nvCxnSpPr>
+          <p:cNvPr id="105" name="Connector 104"/>
+          <p:cNvCxnSpPr/>
+          <p:nvPr/>
+        </p:nvCxnSpPr>
+        <p:spPr>
+          <a:xfrm>
+            <a:off x="4978907" y="2743200"/>
+            <a:ext cx="0" cy="548640"/>
+          </a:xfrm>
+          <a:prstGeom prst="line">
+            <a:avLst/>
+          </a:prstGeom>
+          <a:ln w="15875">
+            <a:solidFill>
+              <a:srgbClr val="2465C4"/>
+            </a:solidFill>
+            <a:tailEnd type="triangle" w="sm" len="sm"/>
+          </a:ln>
+          <a:effectLst/>
+        </p:spPr>
+        <p:style>
+          <a:lnRef idx="2">
+            <a:schemeClr val="accent1"/>
+          </a:lnRef>
+          <a:fillRef idx="0">
+            <a:schemeClr val="accent1"/>
+          </a:fillRef>
+          <a:effectRef idx="0">
+            <a:schemeClr val="accent1"/>
+          </a:effectRef>
+          <a:fontRef idx="minor">
+            <a:schemeClr val="tx1"/>
+          </a:fontRef>
+        </p:style>
+      </p:cxnSp>
+      <p:cxnSp>
+        <p:nvCxnSpPr>
+          <p:cNvPr id="106" name="Connector 105"/>
+          <p:cNvCxnSpPr/>
+          <p:nvPr/>
+        </p:nvCxnSpPr>
+        <p:spPr>
+          <a:xfrm>
+            <a:off x="4978907" y="4023360"/>
+            <a:ext cx="0" cy="594360"/>
+          </a:xfrm>
+          <a:prstGeom prst="line">
+            <a:avLst/>
+          </a:prstGeom>
+          <a:ln w="15875">
+            <a:solidFill>
+              <a:srgbClr val="2465C4"/>
+            </a:solidFill>
+            <a:tailEnd type="triangle" w="sm" len="sm"/>
+          </a:ln>
+          <a:effectLst/>
+        </p:spPr>
+        <p:style>
+          <a:lnRef idx="2">
+            <a:schemeClr val="accent1"/>
+          </a:lnRef>
+          <a:fillRef idx="0">
+            <a:schemeClr val="accent1"/>
+          </a:fillRef>
+          <a:effectRef idx="0">
+            <a:schemeClr val="accent1"/>
+          </a:effectRef>
+          <a:fontRef idx="minor">
+            <a:schemeClr val="tx1"/>
+          </a:fontRef>
+        </p:style>
+      </p:cxnSp>
+      <p:cxnSp>
+        <p:nvCxnSpPr>
+          <p:cNvPr id="107" name="Connector 106"/>
+          <p:cNvCxnSpPr/>
+          <p:nvPr/>
+        </p:nvCxnSpPr>
+        <p:spPr>
+          <a:xfrm>
+            <a:off x="4978907" y="5349240"/>
+            <a:ext cx="0" cy="1691640"/>
+          </a:xfrm>
+          <a:prstGeom prst="line">
+            <a:avLst/>
+          </a:prstGeom>
+          <a:ln w="15875">
+            <a:solidFill>
+              <a:srgbClr val="2465C4"/>
+            </a:solidFill>
+          </a:ln>
+          <a:effectLst/>
+        </p:spPr>
+        <p:style>
+          <a:lnRef idx="2">
+            <a:schemeClr val="accent1"/>
+          </a:lnRef>
+          <a:fillRef idx="0">
+            <a:schemeClr val="accent1"/>
+          </a:fillRef>
+          <a:effectRef idx="0">
+            <a:schemeClr val="accent1"/>
+          </a:effectRef>
+          <a:fontRef idx="minor">
+            <a:schemeClr val="tx1"/>
+          </a:fontRef>
+        </p:style>
+      </p:cxnSp>
+      <p:cxnSp>
+        <p:nvCxnSpPr>
+          <p:cNvPr id="108" name="Connector 107"/>
+          <p:cNvCxnSpPr/>
+          <p:nvPr/>
+        </p:nvCxnSpPr>
+        <p:spPr>
+          <a:xfrm>
+            <a:off x="4978907" y="7040880"/>
+            <a:ext cx="1005841" cy="0"/>
+          </a:xfrm>
+          <a:prstGeom prst="line">
+            <a:avLst/>
+          </a:prstGeom>
+          <a:ln w="15875">
+            <a:solidFill>
+              <a:srgbClr val="2465C4"/>
+            </a:solidFill>
+          </a:ln>
+          <a:effectLst/>
+        </p:spPr>
+        <p:style>
+          <a:lnRef idx="2">
+            <a:schemeClr val="accent1"/>
+          </a:lnRef>
+          <a:fillRef idx="0">
+            <a:schemeClr val="accent1"/>
+          </a:fillRef>
+          <a:effectRef idx="0">
+            <a:schemeClr val="accent1"/>
+          </a:effectRef>
+          <a:fontRef idx="minor">
+            <a:schemeClr val="tx1"/>
+          </a:fontRef>
+        </p:style>
+      </p:cxnSp>
+      <p:sp>
+        <p:nvSpPr>
+          <p:cNvPr id="109" name="Rounded Rectangle 108"/>
+          <p:cNvSpPr/>
+          <p:nvPr/>
+        </p:nvSpPr>
+        <p:spPr>
+          <a:xfrm>
+            <a:off x="6053328" y="2057400"/>
+            <a:ext cx="1783080" cy="685800"/>
+          </a:xfrm>
+          <a:prstGeom prst="roundRect">
+            <a:avLst>
+              <a:gd name="adj" fmla="val 7333"/>
+            </a:avLst>
+          </a:prstGeom>
+          <a:solidFill>
+            <a:srgbClr val="FFFFFF"/>
+          </a:solidFill>
+          <a:ln w="14604">
+            <a:solidFill>
+              <a:srgbClr val="2465C4"/>
+            </a:solidFill>
+          </a:ln>
+          <a:effectLst/>
+        </p:spPr>
+        <p:style>
+          <a:lnRef idx="1">
+            <a:schemeClr val="accent1"/>
+          </a:lnRef>
+          <a:fillRef idx="3">
+            <a:schemeClr val="accent1"/>
+          </a:fillRef>
+          <a:effectRef idx="0">
+            <a:schemeClr val="accent1"/>
+          </a:effectRef>
+          <a:fontRef idx="minor">
+            <a:schemeClr val="lt1"/>
+          </a:fontRef>
+        </p:style>
+        <p:txBody>
+          <a:bodyPr rtlCol="0" anchor="ctr" wrap="square" lIns="54864" rIns="54864" tIns="27432" bIns="27432"/>
+          <a:lstStyle/>
+          <a:p>
+            <a:pPr algn="ctr"/>
+            <a:r>
+              <a:rPr sz="1800">
+                <a:solidFill>
+                  <a:srgbClr val="19324F"/>
+                </a:solidFill>
+                <a:latin typeface="Aptos"/>
+              </a:rPr>
+              <a:t>Video Summary</a:t>
+            </a:r>
+          </a:p>
+        </p:txBody>
+      </p:sp>
+      <p:sp>
+        <p:nvSpPr>
+          <p:cNvPr id="110" name="Rounded Rectangle 109"/>
+          <p:cNvSpPr/>
+          <p:nvPr/>
+        </p:nvSpPr>
+        <p:spPr>
+          <a:xfrm>
+            <a:off x="6053328" y="3291840"/>
+            <a:ext cx="1783080" cy="731520"/>
+          </a:xfrm>
+          <a:prstGeom prst="roundRect">
+            <a:avLst>
+              <a:gd name="adj" fmla="val 6875"/>
+            </a:avLst>
+          </a:prstGeom>
+          <a:solidFill>
+            <a:srgbClr val="EFF3F7"/>
+          </a:solidFill>
+          <a:ln w="14604">
+            <a:solidFill>
+              <a:srgbClr val="2465C4"/>
+            </a:solidFill>
+          </a:ln>
+          <a:effectLst/>
+        </p:spPr>
+        <p:style>
+          <a:lnRef idx="1">
+            <a:schemeClr val="accent1"/>
+          </a:lnRef>
+          <a:fillRef idx="3">
+            <a:schemeClr val="accent1"/>
+          </a:fillRef>
+          <a:effectRef idx="0">
+            <a:schemeClr val="accent1"/>
+          </a:effectRef>
+          <a:fontRef idx="minor">
+            <a:schemeClr val="lt1"/>
+          </a:fontRef>
+        </p:style>
+        <p:txBody>
+          <a:bodyPr rtlCol="0" anchor="ctr" wrap="square" lIns="54864" rIns="54864" tIns="27432" bIns="27432"/>
+          <a:lstStyle/>
+          <a:p>
+            <a:pPr algn="ctr"/>
+            <a:r>
+              <a:rPr sz="1700">
+                <a:solidFill>
+                  <a:srgbClr val="19324F"/>
+                </a:solidFill>
+                <a:latin typeface="Aptos"/>
+              </a:rPr>
+              <a:t>BGE [frozen]</a:t>
+            </a:r>
+          </a:p>
+          <a:p>
+            <a:pPr algn="ctr"/>
+            <a:r>
+              <a:rPr sz="1700">
+                <a:solidFill>
+                  <a:srgbClr val="19324F"/>
+                </a:solidFill>
+                <a:latin typeface="Aptos"/>
+              </a:rPr>
+              <a:t>1,024</a:t>
+            </a:r>
+          </a:p>
+        </p:txBody>
+      </p:sp>
+      <p:sp>
+        <p:nvSpPr>
+          <p:cNvPr id="111" name="Rounded Rectangle 110"/>
+          <p:cNvSpPr/>
+          <p:nvPr/>
+        </p:nvSpPr>
+        <p:spPr>
+          <a:xfrm>
+            <a:off x="6053328" y="4617720"/>
+            <a:ext cx="1783080" cy="731520"/>
+          </a:xfrm>
+          <a:prstGeom prst="roundRect">
+            <a:avLst>
+              <a:gd name="adj" fmla="val 6875"/>
+            </a:avLst>
+          </a:prstGeom>
+          <a:solidFill>
+            <a:srgbClr val="FFFFFF"/>
+          </a:solidFill>
+          <a:ln w="14604">
+            <a:solidFill>
+              <a:srgbClr val="2465C4"/>
+            </a:solidFill>
+          </a:ln>
+          <a:effectLst/>
+        </p:spPr>
+        <p:style>
+          <a:lnRef idx="1">
+            <a:schemeClr val="accent1"/>
+          </a:lnRef>
+          <a:fillRef idx="3">
+            <a:schemeClr val="accent1"/>
+          </a:fillRef>
+          <a:effectRef idx="0">
+            <a:schemeClr val="accent1"/>
+          </a:effectRef>
+          <a:fontRef idx="minor">
+            <a:schemeClr val="lt1"/>
+          </a:fontRef>
+        </p:style>
+        <p:txBody>
+          <a:bodyPr rtlCol="0" anchor="ctr" wrap="square" lIns="54864" rIns="54864" tIns="27432" bIns="27432"/>
+          <a:lstStyle/>
+          <a:p>
+            <a:pPr algn="ctr"/>
+            <a:r>
+              <a:rPr sz="1600">
+                <a:solidFill>
+                  <a:srgbClr val="19324F"/>
+                </a:solidFill>
+                <a:latin typeface="Aptos"/>
+              </a:rPr>
+              <a:t>Linear projection</a:t>
+            </a:r>
+          </a:p>
+          <a:p>
+            <a:pPr algn="ctr"/>
+            <a:r>
+              <a:rPr sz="1600">
+                <a:solidFill>
+                  <a:srgbClr val="19324F"/>
+                </a:solidFill>
+                <a:latin typeface="Aptos"/>
+              </a:rPr>
+              <a:t>1,024 → 384</a:t>
+            </a:r>
+          </a:p>
+        </p:txBody>
+      </p:sp>
+      <p:cxnSp>
+        <p:nvCxnSpPr>
+          <p:cNvPr id="112" name="Connector 111"/>
+          <p:cNvCxnSpPr/>
+          <p:nvPr/>
+        </p:nvCxnSpPr>
+        <p:spPr>
+          <a:xfrm>
+            <a:off x="6944868" y="2743200"/>
+            <a:ext cx="0" cy="548640"/>
+          </a:xfrm>
+          <a:prstGeom prst="line">
+            <a:avLst/>
+          </a:prstGeom>
+          <a:ln w="15875">
+            <a:solidFill>
+              <a:srgbClr val="2465C4"/>
+            </a:solidFill>
+            <a:tailEnd type="triangle" w="sm" len="sm"/>
+          </a:ln>
+          <a:effectLst/>
+        </p:spPr>
+        <p:style>
+          <a:lnRef idx="2">
+            <a:schemeClr val="accent1"/>
+          </a:lnRef>
+          <a:fillRef idx="0">
+            <a:schemeClr val="accent1"/>
+          </a:fillRef>
+          <a:effectRef idx="0">
+            <a:schemeClr val="accent1"/>
+          </a:effectRef>
+          <a:fontRef idx="minor">
+            <a:schemeClr val="tx1"/>
+          </a:fontRef>
+        </p:style>
+      </p:cxnSp>
+      <p:cxnSp>
+        <p:nvCxnSpPr>
+          <p:cNvPr id="113" name="Connector 112"/>
+          <p:cNvCxnSpPr/>
+          <p:nvPr/>
+        </p:nvCxnSpPr>
+        <p:spPr>
+          <a:xfrm>
+            <a:off x="6944868" y="4023360"/>
+            <a:ext cx="0" cy="594360"/>
+          </a:xfrm>
+          <a:prstGeom prst="line">
+            <a:avLst/>
+          </a:prstGeom>
+          <a:ln w="15875">
+            <a:solidFill>
+              <a:srgbClr val="2465C4"/>
+            </a:solidFill>
+            <a:tailEnd type="triangle" w="sm" len="sm"/>
+          </a:ln>
+          <a:effectLst/>
+        </p:spPr>
+        <p:style>
+          <a:lnRef idx="2">
+            <a:schemeClr val="accent1"/>
+          </a:lnRef>
+          <a:fillRef idx="0">
+            <a:schemeClr val="accent1"/>
+          </a:fillRef>
+          <a:effectRef idx="0">
+            <a:schemeClr val="accent1"/>
+          </a:effectRef>
+          <a:fontRef idx="minor">
+            <a:schemeClr val="tx1"/>
+          </a:fontRef>
+        </p:style>
+      </p:cxnSp>
+      <p:cxnSp>
+        <p:nvCxnSpPr>
+          <p:cNvPr id="114" name="Connector 113"/>
+          <p:cNvCxnSpPr/>
+          <p:nvPr/>
+        </p:nvCxnSpPr>
+        <p:spPr>
+          <a:xfrm>
+            <a:off x="6944868" y="5349240"/>
+            <a:ext cx="0" cy="1691640"/>
+          </a:xfrm>
+          <a:prstGeom prst="line">
+            <a:avLst/>
+          </a:prstGeom>
+          <a:ln w="15875">
+            <a:solidFill>
+              <a:srgbClr val="2465C4"/>
+            </a:solidFill>
+          </a:ln>
+          <a:effectLst/>
+        </p:spPr>
+        <p:style>
+          <a:lnRef idx="2">
+            <a:schemeClr val="accent1"/>
+          </a:lnRef>
+          <a:fillRef idx="0">
+            <a:schemeClr val="accent1"/>
+          </a:fillRef>
+          <a:effectRef idx="0">
+            <a:schemeClr val="accent1"/>
+          </a:effectRef>
+          <a:fontRef idx="minor">
+            <a:schemeClr val="tx1"/>
+          </a:fontRef>
+        </p:style>
+      </p:cxnSp>
+      <p:cxnSp>
+        <p:nvCxnSpPr>
+          <p:cNvPr id="115" name="Connector 114"/>
+          <p:cNvCxnSpPr/>
+          <p:nvPr/>
+        </p:nvCxnSpPr>
+        <p:spPr>
+          <a:xfrm flipH="1">
+            <a:off x="5984748" y="7040880"/>
+            <a:ext cx="960120" cy="0"/>
+          </a:xfrm>
+          <a:prstGeom prst="line">
+            <a:avLst/>
+          </a:prstGeom>
+          <a:ln w="15875">
+            <a:solidFill>
+              <a:srgbClr val="2465C4"/>
+            </a:solidFill>
+          </a:ln>
+          <a:effectLst/>
+        </p:spPr>
+        <p:style>
+          <a:lnRef idx="2">
+            <a:schemeClr val="accent1"/>
+          </a:lnRef>
+          <a:fillRef idx="0">
+            <a:schemeClr val="accent1"/>
+          </a:fillRef>
+          <a:effectRef idx="0">
+            <a:schemeClr val="accent1"/>
+          </a:effectRef>
+          <a:fontRef idx="minor">
+            <a:schemeClr val="tx1"/>
+          </a:fontRef>
+        </p:style>
+      </p:cxnSp>
+      <p:cxnSp>
+        <p:nvCxnSpPr>
+          <p:cNvPr id="116" name="Connector 115"/>
+          <p:cNvCxnSpPr/>
+          <p:nvPr/>
+        </p:nvCxnSpPr>
+        <p:spPr>
+          <a:xfrm>
+            <a:off x="5984748" y="7040880"/>
+            <a:ext cx="0" cy="749808"/>
+          </a:xfrm>
+          <a:prstGeom prst="line">
+            <a:avLst/>
+          </a:prstGeom>
+          <a:ln w="15875">
+            <a:solidFill>
+              <a:srgbClr val="2465C4"/>
+            </a:solidFill>
+            <a:tailEnd type="triangle" w="sm" len="sm"/>
+          </a:ln>
+          <a:effectLst/>
+        </p:spPr>
+        <p:style>
+          <a:lnRef idx="2">
+            <a:schemeClr val="accent1"/>
+          </a:lnRef>
+          <a:fillRef idx="0">
+            <a:schemeClr val="accent1"/>
+          </a:fillRef>
+          <a:effectRef idx="0">
+            <a:schemeClr val="accent1"/>
+          </a:effectRef>
+          <a:fontRef idx="minor">
+            <a:schemeClr val="tx1"/>
+          </a:fontRef>
+        </p:style>
+      </p:cxnSp>
+      <p:sp>
+        <p:nvSpPr>
+          <p:cNvPr id="117" name="Rounded Rectangle 116"/>
+          <p:cNvSpPr/>
+          <p:nvPr/>
+        </p:nvSpPr>
+        <p:spPr>
+          <a:xfrm>
+            <a:off x="4087368" y="7790688"/>
+            <a:ext cx="3794760" cy="585216"/>
+          </a:xfrm>
+          <a:prstGeom prst="roundRect">
+            <a:avLst>
+              <a:gd name="adj" fmla="val 7857"/>
+            </a:avLst>
+          </a:prstGeom>
+          <a:solidFill>
+            <a:srgbClr val="E7F0FF"/>
+          </a:solidFill>
+          <a:ln w="14604">
+            <a:solidFill>
+              <a:srgbClr val="2465C4"/>
+            </a:solidFill>
+          </a:ln>
+          <a:effectLst/>
+        </p:spPr>
+        <p:style>
+          <a:lnRef idx="1">
+            <a:schemeClr val="accent1"/>
+          </a:lnRef>
+          <a:fillRef idx="3">
+            <a:schemeClr val="accent1"/>
+          </a:fillRef>
+          <a:effectRef idx="0">
+            <a:schemeClr val="accent1"/>
+          </a:effectRef>
+          <a:fontRef idx="minor">
+            <a:schemeClr val="lt1"/>
+          </a:fontRef>
+        </p:style>
+        <p:txBody>
+          <a:bodyPr rtlCol="0" anchor="ctr" wrap="square" lIns="54864" rIns="54864" tIns="27432" bIns="27432"/>
+          <a:lstStyle/>
+          <a:p>
+            <a:pPr algn="ctr"/>
+            <a:r>
+              <a:rPr sz="1600">
+                <a:solidFill>
+                  <a:srgbClr val="19324F"/>
+                </a:solidFill>
+                <a:latin typeface="Aptos"/>
+              </a:rPr>
+              <a:t>Concat: [Title 128; Video 384]</a:t>
+            </a:r>
+          </a:p>
+          <a:p>
+            <a:pPr algn="ctr"/>
+            <a:r>
+              <a:rPr sz="1600">
+                <a:solidFill>
+                  <a:srgbClr val="19324F"/>
+                </a:solidFill>
+                <a:latin typeface="Aptos"/>
+              </a:rPr>
+              <a:t>512</a:t>
+            </a:r>
+          </a:p>
+        </p:txBody>
+      </p:sp>
+      <p:sp>
+        <p:nvSpPr>
+          <p:cNvPr id="119" name="Rounded Rectangle 118"/>
+          <p:cNvSpPr/>
+          <p:nvPr/>
+        </p:nvSpPr>
+        <p:spPr>
+          <a:xfrm>
+            <a:off x="8869680" y="2011680"/>
+            <a:ext cx="2286000" cy="502920"/>
+          </a:xfrm>
+          <a:prstGeom prst="roundRect">
+            <a:avLst>
+              <a:gd name="adj" fmla="val 10000"/>
+            </a:avLst>
+          </a:prstGeom>
+          <a:solidFill>
+            <a:srgbClr val="FFFFFF"/>
+          </a:solidFill>
+          <a:ln w="14604">
+            <a:solidFill>
+              <a:srgbClr val="008B91"/>
+            </a:solidFill>
+          </a:ln>
+          <a:effectLst/>
+        </p:spPr>
+        <p:style>
+          <a:lnRef idx="1">
+            <a:schemeClr val="accent1"/>
+          </a:lnRef>
+          <a:fillRef idx="3">
+            <a:schemeClr val="accent1"/>
+          </a:fillRef>
+          <a:effectRef idx="0">
+            <a:schemeClr val="accent1"/>
+          </a:effectRef>
+          <a:fontRef idx="minor">
+            <a:schemeClr val="lt1"/>
+          </a:fontRef>
+        </p:style>
+        <p:txBody>
+          <a:bodyPr rtlCol="0" anchor="ctr" wrap="square" lIns="54864" rIns="54864" tIns="27432" bIns="27432"/>
+          <a:lstStyle/>
+          <a:p>
+            <a:pPr algn="ctr"/>
+            <a:r>
+              <a:rPr sz="1800">
+                <a:solidFill>
+                  <a:srgbClr val="19324F"/>
+                </a:solidFill>
+                <a:latin typeface="Aptos"/>
+              </a:rPr>
+              <a:t>Title</a:t>
+            </a:r>
+          </a:p>
+        </p:txBody>
+      </p:sp>
+      <p:sp>
+        <p:nvSpPr>
+          <p:cNvPr id="120" name="Rounded Rectangle 119"/>
+          <p:cNvSpPr/>
+          <p:nvPr/>
+        </p:nvSpPr>
+        <p:spPr>
+          <a:xfrm>
+            <a:off x="8869680" y="2724912"/>
+            <a:ext cx="2286000" cy="585216"/>
+          </a:xfrm>
+          <a:prstGeom prst="roundRect">
+            <a:avLst>
+              <a:gd name="adj" fmla="val 8593"/>
+            </a:avLst>
+          </a:prstGeom>
+          <a:solidFill>
+            <a:srgbClr val="EFF3F7"/>
+          </a:solidFill>
+          <a:ln w="14604">
+            <a:solidFill>
+              <a:srgbClr val="A7B8CA"/>
+            </a:solidFill>
+          </a:ln>
+          <a:effectLst/>
+        </p:spPr>
+        <p:style>
+          <a:lnRef idx="1">
+            <a:schemeClr val="accent1"/>
+          </a:lnRef>
+          <a:fillRef idx="3">
+            <a:schemeClr val="accent1"/>
+          </a:fillRef>
+          <a:effectRef idx="0">
+            <a:schemeClr val="accent1"/>
+          </a:effectRef>
+          <a:fontRef idx="minor">
+            <a:schemeClr val="lt1"/>
+          </a:fontRef>
+        </p:style>
+        <p:txBody>
+          <a:bodyPr rtlCol="0" anchor="ctr" wrap="square" lIns="54864" rIns="54864" tIns="27432" bIns="27432"/>
+          <a:lstStyle/>
+          <a:p>
+            <a:pPr algn="ctr"/>
+            <a:r>
+              <a:rPr sz="1800">
+                <a:solidFill>
+                  <a:srgbClr val="19324F"/>
+                </a:solidFill>
+                <a:latin typeface="Aptos"/>
+              </a:rPr>
+              <a:t>BGE [frozen]</a:t>
+            </a:r>
+          </a:p>
+          <a:p>
+            <a:pPr algn="ctr"/>
+            <a:r>
+              <a:rPr sz="1800">
+                <a:solidFill>
+                  <a:srgbClr val="19324F"/>
+                </a:solidFill>
+                <a:latin typeface="Aptos"/>
+              </a:rPr>
+              <a:t>1,024</a:t>
+            </a:r>
+          </a:p>
+        </p:txBody>
+      </p:sp>
+      <p:cxnSp>
+        <p:nvCxnSpPr>
+          <p:cNvPr id="121" name="Connector 120"/>
+          <p:cNvCxnSpPr/>
+          <p:nvPr/>
+        </p:nvCxnSpPr>
+        <p:spPr>
+          <a:xfrm>
+            <a:off x="10012680" y="2514600"/>
+            <a:ext cx="0" cy="210312"/>
+          </a:xfrm>
+          <a:prstGeom prst="line">
+            <a:avLst/>
+          </a:prstGeom>
+          <a:ln w="15875">
+            <a:solidFill>
+              <a:srgbClr val="718393"/>
+            </a:solidFill>
+            <a:tailEnd type="triangle" w="sm" len="sm"/>
+          </a:ln>
+          <a:effectLst/>
+        </p:spPr>
+        <p:style>
+          <a:lnRef idx="2">
+            <a:schemeClr val="accent1"/>
+          </a:lnRef>
+          <a:fillRef idx="0">
+            <a:schemeClr val="accent1"/>
+          </a:fillRef>
+          <a:effectRef idx="0">
+            <a:schemeClr val="accent1"/>
+          </a:effectRef>
+          <a:fontRef idx="minor">
+            <a:schemeClr val="tx1"/>
+          </a:fontRef>
+        </p:style>
+      </p:cxnSp>
+      <p:cxnSp>
+        <p:nvCxnSpPr>
+          <p:cNvPr id="122" name="Connector 121"/>
+          <p:cNvCxnSpPr/>
+          <p:nvPr/>
+        </p:nvCxnSpPr>
+        <p:spPr>
+          <a:xfrm>
+            <a:off x="10012680" y="3310128"/>
+            <a:ext cx="0" cy="228600"/>
+          </a:xfrm>
+          <a:prstGeom prst="line">
+            <a:avLst/>
+          </a:prstGeom>
+          <a:ln w="15875">
+            <a:solidFill>
+              <a:srgbClr val="008B91"/>
+            </a:solidFill>
+            <a:tailEnd type="triangle" w="sm" len="sm"/>
+          </a:ln>
+          <a:effectLst/>
+        </p:spPr>
+        <p:style>
+          <a:lnRef idx="2">
+            <a:schemeClr val="accent1"/>
+          </a:lnRef>
+          <a:fillRef idx="0">
+            <a:schemeClr val="accent1"/>
+          </a:fillRef>
+          <a:effectRef idx="0">
+            <a:schemeClr val="accent1"/>
+          </a:effectRef>
+          <a:fontRef idx="minor">
+            <a:schemeClr val="tx1"/>
+          </a:fontRef>
+        </p:style>
+      </p:cxnSp>
+      <p:sp>
+        <p:nvSpPr>
+          <p:cNvPr id="123" name="Rounded Rectangle 122"/>
+          <p:cNvSpPr/>
+          <p:nvPr/>
+        </p:nvSpPr>
+        <p:spPr>
+          <a:xfrm>
+            <a:off x="11430000" y="2011680"/>
+            <a:ext cx="2286000" cy="502920"/>
+          </a:xfrm>
+          <a:prstGeom prst="roundRect">
+            <a:avLst>
+              <a:gd name="adj" fmla="val 10000"/>
+            </a:avLst>
+          </a:prstGeom>
+          <a:solidFill>
+            <a:srgbClr val="FFFFFF"/>
+          </a:solidFill>
+          <a:ln w="14604">
+            <a:solidFill>
+              <a:srgbClr val="008B91"/>
+            </a:solidFill>
+          </a:ln>
+          <a:effectLst/>
+        </p:spPr>
+        <p:style>
+          <a:lnRef idx="1">
+            <a:schemeClr val="accent1"/>
+          </a:lnRef>
+          <a:fillRef idx="3">
+            <a:schemeClr val="accent1"/>
+          </a:fillRef>
+          <a:effectRef idx="0">
+            <a:schemeClr val="accent1"/>
+          </a:effectRef>
+          <a:fontRef idx="minor">
+            <a:schemeClr val="lt1"/>
+          </a:fontRef>
+        </p:style>
+        <p:txBody>
+          <a:bodyPr rtlCol="0" anchor="ctr" wrap="square" lIns="54864" rIns="54864" tIns="27432" bIns="27432"/>
+          <a:lstStyle/>
+          <a:p>
+            <a:pPr algn="ctr"/>
+            <a:r>
+              <a:rPr sz="1800">
+                <a:solidFill>
+                  <a:srgbClr val="19324F"/>
+                </a:solidFill>
+                <a:latin typeface="Aptos"/>
+              </a:rPr>
+              <a:t>Entities</a:t>
+            </a:r>
+          </a:p>
+        </p:txBody>
+      </p:sp>
+      <p:sp>
+        <p:nvSpPr>
+          <p:cNvPr id="124" name="Rounded Rectangle 123"/>
+          <p:cNvSpPr/>
+          <p:nvPr/>
+        </p:nvSpPr>
+        <p:spPr>
+          <a:xfrm>
+            <a:off x="11430000" y="2724912"/>
+            <a:ext cx="2286000" cy="585216"/>
+          </a:xfrm>
+          <a:prstGeom prst="roundRect">
+            <a:avLst>
+              <a:gd name="adj" fmla="val 8593"/>
+            </a:avLst>
+          </a:prstGeom>
+          <a:solidFill>
+            <a:srgbClr val="EFF3F7"/>
+          </a:solidFill>
+          <a:ln w="14604">
+            <a:solidFill>
+              <a:srgbClr val="A7B8CA"/>
+            </a:solidFill>
+          </a:ln>
+          <a:effectLst/>
+        </p:spPr>
+        <p:style>
+          <a:lnRef idx="1">
+            <a:schemeClr val="accent1"/>
+          </a:lnRef>
+          <a:fillRef idx="3">
+            <a:schemeClr val="accent1"/>
+          </a:fillRef>
+          <a:effectRef idx="0">
+            <a:schemeClr val="accent1"/>
+          </a:effectRef>
+          <a:fontRef idx="minor">
+            <a:schemeClr val="lt1"/>
+          </a:fontRef>
+        </p:style>
+        <p:txBody>
+          <a:bodyPr rtlCol="0" anchor="ctr" wrap="square" lIns="54864" rIns="54864" tIns="27432" bIns="27432"/>
+          <a:lstStyle/>
+          <a:p>
+            <a:pPr algn="ctr"/>
+            <a:r>
+              <a:rPr sz="1800">
+                <a:solidFill>
+                  <a:srgbClr val="19324F"/>
+                </a:solidFill>
+                <a:latin typeface="Aptos"/>
+              </a:rPr>
+              <a:t>BGE [frozen]</a:t>
+            </a:r>
+          </a:p>
+          <a:p>
+            <a:pPr algn="ctr"/>
+            <a:r>
+              <a:rPr sz="1800">
+                <a:solidFill>
+                  <a:srgbClr val="19324F"/>
+                </a:solidFill>
+                <a:latin typeface="Aptos"/>
+              </a:rPr>
+              <a:t>E × 1,024</a:t>
+            </a:r>
+          </a:p>
+        </p:txBody>
+      </p:sp>
+      <p:cxnSp>
+        <p:nvCxnSpPr>
+          <p:cNvPr id="125" name="Connector 124"/>
+          <p:cNvCxnSpPr/>
+          <p:nvPr/>
+        </p:nvCxnSpPr>
+        <p:spPr>
+          <a:xfrm>
+            <a:off x="12573000" y="2514600"/>
+            <a:ext cx="0" cy="210312"/>
+          </a:xfrm>
+          <a:prstGeom prst="line">
+            <a:avLst/>
+          </a:prstGeom>
+          <a:ln w="15875">
+            <a:solidFill>
+              <a:srgbClr val="718393"/>
+            </a:solidFill>
+            <a:tailEnd type="triangle" w="sm" len="sm"/>
+          </a:ln>
+          <a:effectLst/>
+        </p:spPr>
+        <p:style>
+          <a:lnRef idx="2">
+            <a:schemeClr val="accent1"/>
+          </a:lnRef>
+          <a:fillRef idx="0">
+            <a:schemeClr val="accent1"/>
+          </a:fillRef>
+          <a:effectRef idx="0">
+            <a:schemeClr val="accent1"/>
+          </a:effectRef>
+          <a:fontRef idx="minor">
+            <a:schemeClr val="tx1"/>
+          </a:fontRef>
+        </p:style>
+      </p:cxnSp>
+      <p:cxnSp>
+        <p:nvCxnSpPr>
+          <p:cNvPr id="126" name="Connector 125"/>
+          <p:cNvCxnSpPr/>
+          <p:nvPr/>
+        </p:nvCxnSpPr>
+        <p:spPr>
+          <a:xfrm>
+            <a:off x="12573000" y="3310128"/>
+            <a:ext cx="0" cy="228600"/>
+          </a:xfrm>
+          <a:prstGeom prst="line">
+            <a:avLst/>
+          </a:prstGeom>
+          <a:ln w="15875">
+            <a:solidFill>
+              <a:srgbClr val="008B91"/>
+            </a:solidFill>
+            <a:tailEnd type="triangle" w="sm" len="sm"/>
+          </a:ln>
+          <a:effectLst/>
+        </p:spPr>
+        <p:style>
+          <a:lnRef idx="2">
+            <a:schemeClr val="accent1"/>
+          </a:lnRef>
+          <a:fillRef idx="0">
+            <a:schemeClr val="accent1"/>
+          </a:fillRef>
+          <a:effectRef idx="0">
+            <a:schemeClr val="accent1"/>
+          </a:effectRef>
+          <a:fontRef idx="minor">
+            <a:schemeClr val="tx1"/>
+          </a:fontRef>
+        </p:style>
+      </p:cxnSp>
+      <p:sp>
+        <p:nvSpPr>
+          <p:cNvPr id="127" name="Rounded Rectangle 126"/>
+          <p:cNvSpPr/>
+          <p:nvPr/>
+        </p:nvSpPr>
+        <p:spPr>
+          <a:xfrm>
+            <a:off x="13990320" y="2011680"/>
+            <a:ext cx="2286000" cy="502920"/>
+          </a:xfrm>
+          <a:prstGeom prst="roundRect">
+            <a:avLst>
+              <a:gd name="adj" fmla="val 10000"/>
+            </a:avLst>
+          </a:prstGeom>
+          <a:solidFill>
+            <a:srgbClr val="FFFFFF"/>
+          </a:solidFill>
+          <a:ln w="14604">
+            <a:solidFill>
+              <a:srgbClr val="008B91"/>
+            </a:solidFill>
+          </a:ln>
+          <a:effectLst/>
+        </p:spPr>
+        <p:style>
+          <a:lnRef idx="1">
+            <a:schemeClr val="accent1"/>
+          </a:lnRef>
+          <a:fillRef idx="3">
+            <a:schemeClr val="accent1"/>
+          </a:fillRef>
+          <a:effectRef idx="0">
+            <a:schemeClr val="accent1"/>
+          </a:effectRef>
+          <a:fontRef idx="minor">
+            <a:schemeClr val="lt1"/>
+          </a:fontRef>
+        </p:style>
+        <p:txBody>
+          <a:bodyPr rtlCol="0" anchor="ctr" wrap="square" lIns="54864" rIns="54864" tIns="27432" bIns="27432"/>
+          <a:lstStyle/>
+          <a:p>
+            <a:pPr algn="ctr"/>
+            <a:r>
+              <a:rPr sz="1800">
+                <a:solidFill>
+                  <a:srgbClr val="19324F"/>
+                </a:solidFill>
+                <a:latin typeface="Aptos"/>
+              </a:rPr>
+              <a:t>Actions</a:t>
+            </a:r>
+          </a:p>
+        </p:txBody>
+      </p:sp>
+      <p:sp>
+        <p:nvSpPr>
+          <p:cNvPr id="128" name="Rounded Rectangle 127"/>
+          <p:cNvSpPr/>
+          <p:nvPr/>
+        </p:nvSpPr>
+        <p:spPr>
+          <a:xfrm>
+            <a:off x="13990320" y="2724912"/>
+            <a:ext cx="2286000" cy="585216"/>
+          </a:xfrm>
+          <a:prstGeom prst="roundRect">
+            <a:avLst>
+              <a:gd name="adj" fmla="val 8593"/>
+            </a:avLst>
+          </a:prstGeom>
+          <a:solidFill>
+            <a:srgbClr val="EFF3F7"/>
+          </a:solidFill>
+          <a:ln w="14604">
+            <a:solidFill>
+              <a:srgbClr val="A7B8CA"/>
+            </a:solidFill>
+          </a:ln>
+          <a:effectLst/>
+        </p:spPr>
+        <p:style>
+          <a:lnRef idx="1">
+            <a:schemeClr val="accent1"/>
+          </a:lnRef>
+          <a:fillRef idx="3">
+            <a:schemeClr val="accent1"/>
+          </a:fillRef>
+          <a:effectRef idx="0">
+            <a:schemeClr val="accent1"/>
+          </a:effectRef>
+          <a:fontRef idx="minor">
+            <a:schemeClr val="lt1"/>
+          </a:fontRef>
+        </p:style>
+        <p:txBody>
+          <a:bodyPr rtlCol="0" anchor="ctr" wrap="square" lIns="54864" rIns="54864" tIns="27432" bIns="27432"/>
+          <a:lstStyle/>
+          <a:p>
+            <a:pPr algn="ctr"/>
+            <a:r>
+              <a:rPr sz="1800">
+                <a:solidFill>
+                  <a:srgbClr val="19324F"/>
+                </a:solidFill>
+                <a:latin typeface="Aptos"/>
+              </a:rPr>
+              <a:t>BGE [frozen]</a:t>
+            </a:r>
+          </a:p>
+          <a:p>
+            <a:pPr algn="ctr"/>
+            <a:r>
+              <a:rPr sz="1800">
+                <a:solidFill>
+                  <a:srgbClr val="19324F"/>
+                </a:solidFill>
+                <a:latin typeface="Aptos"/>
+              </a:rPr>
+              <a:t>A × 1,024</a:t>
+            </a:r>
+          </a:p>
+        </p:txBody>
+      </p:sp>
+      <p:cxnSp>
+        <p:nvCxnSpPr>
+          <p:cNvPr id="129" name="Connector 128"/>
+          <p:cNvCxnSpPr/>
+          <p:nvPr/>
+        </p:nvCxnSpPr>
+        <p:spPr>
+          <a:xfrm>
+            <a:off x="15133320" y="2514600"/>
+            <a:ext cx="0" cy="210312"/>
+          </a:xfrm>
+          <a:prstGeom prst="line">
+            <a:avLst/>
+          </a:prstGeom>
+          <a:ln w="15875">
+            <a:solidFill>
+              <a:srgbClr val="718393"/>
+            </a:solidFill>
+            <a:tailEnd type="triangle" w="sm" len="sm"/>
+          </a:ln>
+          <a:effectLst/>
+        </p:spPr>
+        <p:style>
+          <a:lnRef idx="2">
+            <a:schemeClr val="accent1"/>
+          </a:lnRef>
+          <a:fillRef idx="0">
+            <a:schemeClr val="accent1"/>
+          </a:fillRef>
+          <a:effectRef idx="0">
+            <a:schemeClr val="accent1"/>
+          </a:effectRef>
+          <a:fontRef idx="minor">
+            <a:schemeClr val="tx1"/>
+          </a:fontRef>
+        </p:style>
+      </p:cxnSp>
+      <p:cxnSp>
+        <p:nvCxnSpPr>
+          <p:cNvPr id="130" name="Connector 129"/>
+          <p:cNvCxnSpPr/>
+          <p:nvPr/>
+        </p:nvCxnSpPr>
+        <p:spPr>
+          <a:xfrm>
+            <a:off x="15133320" y="3310128"/>
+            <a:ext cx="0" cy="228600"/>
+          </a:xfrm>
+          <a:prstGeom prst="line">
+            <a:avLst/>
+          </a:prstGeom>
+          <a:ln w="15875">
+            <a:solidFill>
+              <a:srgbClr val="008B91"/>
+            </a:solidFill>
+            <a:tailEnd type="triangle" w="sm" len="sm"/>
+          </a:ln>
+          <a:effectLst/>
+        </p:spPr>
+        <p:style>
+          <a:lnRef idx="2">
+            <a:schemeClr val="accent1"/>
+          </a:lnRef>
+          <a:fillRef idx="0">
+            <a:schemeClr val="accent1"/>
+          </a:fillRef>
+          <a:effectRef idx="0">
+            <a:schemeClr val="accent1"/>
+          </a:effectRef>
+          <a:fontRef idx="minor">
+            <a:schemeClr val="tx1"/>
+          </a:fontRef>
+        </p:style>
+      </p:cxnSp>
+      <p:sp>
+        <p:nvSpPr>
+          <p:cNvPr id="131" name="Rounded Rectangle 130"/>
+          <p:cNvSpPr/>
+          <p:nvPr/>
+        </p:nvSpPr>
+        <p:spPr>
+          <a:xfrm>
+            <a:off x="16550640" y="2011680"/>
+            <a:ext cx="2286000" cy="502920"/>
+          </a:xfrm>
+          <a:prstGeom prst="roundRect">
+            <a:avLst>
+              <a:gd name="adj" fmla="val 10000"/>
+            </a:avLst>
+          </a:prstGeom>
+          <a:solidFill>
+            <a:srgbClr val="FFFFFF"/>
+          </a:solidFill>
+          <a:ln w="14604">
+            <a:solidFill>
+              <a:srgbClr val="008B91"/>
+            </a:solidFill>
+          </a:ln>
+          <a:effectLst/>
+        </p:spPr>
+        <p:style>
+          <a:lnRef idx="1">
+            <a:schemeClr val="accent1"/>
+          </a:lnRef>
+          <a:fillRef idx="3">
+            <a:schemeClr val="accent1"/>
+          </a:fillRef>
+          <a:effectRef idx="0">
+            <a:schemeClr val="accent1"/>
+          </a:effectRef>
+          <a:fontRef idx="minor">
+            <a:schemeClr val="lt1"/>
+          </a:fontRef>
+        </p:style>
+        <p:txBody>
+          <a:bodyPr rtlCol="0" anchor="ctr" wrap="square" lIns="54864" rIns="54864" tIns="27432" bIns="27432"/>
+          <a:lstStyle/>
+          <a:p>
+            <a:pPr algn="ctr"/>
+            <a:r>
+              <a:rPr sz="1800">
+                <a:solidFill>
+                  <a:srgbClr val="19324F"/>
+                </a:solidFill>
+                <a:latin typeface="Aptos"/>
+              </a:rPr>
+              <a:t>Context</a:t>
+            </a:r>
+          </a:p>
+        </p:txBody>
+      </p:sp>
+      <p:sp>
+        <p:nvSpPr>
+          <p:cNvPr id="132" name="Rounded Rectangle 131"/>
+          <p:cNvSpPr/>
+          <p:nvPr/>
+        </p:nvSpPr>
+        <p:spPr>
+          <a:xfrm>
+            <a:off x="16550640" y="2724912"/>
+            <a:ext cx="2286000" cy="585216"/>
+          </a:xfrm>
+          <a:prstGeom prst="roundRect">
+            <a:avLst>
+              <a:gd name="adj" fmla="val 8593"/>
+            </a:avLst>
+          </a:prstGeom>
+          <a:solidFill>
+            <a:srgbClr val="EFF3F7"/>
+          </a:solidFill>
+          <a:ln w="14604">
+            <a:solidFill>
+              <a:srgbClr val="A7B8CA"/>
+            </a:solidFill>
+          </a:ln>
+          <a:effectLst/>
+        </p:spPr>
+        <p:style>
+          <a:lnRef idx="1">
+            <a:schemeClr val="accent1"/>
+          </a:lnRef>
+          <a:fillRef idx="3">
+            <a:schemeClr val="accent1"/>
+          </a:fillRef>
+          <a:effectRef idx="0">
+            <a:schemeClr val="accent1"/>
+          </a:effectRef>
+          <a:fontRef idx="minor">
+            <a:schemeClr val="lt1"/>
+          </a:fontRef>
+        </p:style>
+        <p:txBody>
+          <a:bodyPr rtlCol="0" anchor="ctr" wrap="square" lIns="54864" rIns="54864" tIns="27432" bIns="27432"/>
+          <a:lstStyle/>
+          <a:p>
+            <a:pPr algn="ctr"/>
+            <a:r>
+              <a:rPr sz="1800">
+                <a:solidFill>
+                  <a:srgbClr val="19324F"/>
+                </a:solidFill>
+                <a:latin typeface="Aptos"/>
+              </a:rPr>
+              <a:t>BGE [frozen]</a:t>
+            </a:r>
+          </a:p>
+          <a:p>
+            <a:pPr algn="ctr"/>
+            <a:r>
+              <a:rPr sz="1800">
+                <a:solidFill>
+                  <a:srgbClr val="19324F"/>
+                </a:solidFill>
+                <a:latin typeface="Aptos"/>
+              </a:rPr>
+              <a:t>1,024</a:t>
+            </a:r>
+          </a:p>
+        </p:txBody>
+      </p:sp>
+      <p:cxnSp>
+        <p:nvCxnSpPr>
+          <p:cNvPr id="133" name="Connector 132"/>
+          <p:cNvCxnSpPr/>
+          <p:nvPr/>
+        </p:nvCxnSpPr>
+        <p:spPr>
+          <a:xfrm>
+            <a:off x="17693640" y="2514600"/>
+            <a:ext cx="0" cy="210312"/>
+          </a:xfrm>
+          <a:prstGeom prst="line">
+            <a:avLst/>
+          </a:prstGeom>
+          <a:ln w="15875">
+            <a:solidFill>
+              <a:srgbClr val="718393"/>
+            </a:solidFill>
+            <a:tailEnd type="triangle" w="sm" len="sm"/>
+          </a:ln>
+          <a:effectLst/>
+        </p:spPr>
+        <p:style>
+          <a:lnRef idx="2">
+            <a:schemeClr val="accent1"/>
+          </a:lnRef>
+          <a:fillRef idx="0">
+            <a:schemeClr val="accent1"/>
+          </a:fillRef>
+          <a:effectRef idx="0">
+            <a:schemeClr val="accent1"/>
+          </a:effectRef>
+          <a:fontRef idx="minor">
+            <a:schemeClr val="tx1"/>
+          </a:fontRef>
+        </p:style>
+      </p:cxnSp>
+      <p:cxnSp>
+        <p:nvCxnSpPr>
+          <p:cNvPr id="134" name="Connector 133"/>
+          <p:cNvCxnSpPr/>
+          <p:nvPr/>
+        </p:nvCxnSpPr>
+        <p:spPr>
+          <a:xfrm>
+            <a:off x="17693640" y="3310128"/>
+            <a:ext cx="0" cy="228600"/>
+          </a:xfrm>
+          <a:prstGeom prst="line">
+            <a:avLst/>
+          </a:prstGeom>
+          <a:ln w="15875">
+            <a:solidFill>
+              <a:srgbClr val="008B91"/>
+            </a:solidFill>
+            <a:tailEnd type="triangle" w="sm" len="sm"/>
+          </a:ln>
+          <a:effectLst/>
+        </p:spPr>
+        <p:style>
+          <a:lnRef idx="2">
+            <a:schemeClr val="accent1"/>
+          </a:lnRef>
+          <a:fillRef idx="0">
+            <a:schemeClr val="accent1"/>
+          </a:fillRef>
+          <a:effectRef idx="0">
+            <a:schemeClr val="accent1"/>
+          </a:effectRef>
+          <a:fontRef idx="minor">
+            <a:schemeClr val="tx1"/>
+          </a:fontRef>
+        </p:style>
+      </p:cxnSp>
+      <p:sp>
+        <p:nvSpPr>
+          <p:cNvPr id="135" name="Rounded Rectangle 134"/>
+          <p:cNvSpPr/>
+          <p:nvPr/>
+        </p:nvSpPr>
+        <p:spPr>
+          <a:xfrm>
+            <a:off x="8869680" y="3538728"/>
+            <a:ext cx="2286000" cy="667512"/>
+          </a:xfrm>
+          <a:prstGeom prst="roundRect">
+            <a:avLst>
+              <a:gd name="adj" fmla="val 7534"/>
+            </a:avLst>
+          </a:prstGeom>
+          <a:solidFill>
+            <a:srgbClr val="FFFFFF"/>
+          </a:solidFill>
+          <a:ln w="14604">
+            <a:solidFill>
+              <a:srgbClr val="008B91"/>
+            </a:solidFill>
+          </a:ln>
+          <a:effectLst/>
+        </p:spPr>
+        <p:style>
+          <a:lnRef idx="1">
+            <a:schemeClr val="accent1"/>
+          </a:lnRef>
+          <a:fillRef idx="3">
+            <a:schemeClr val="accent1"/>
+          </a:fillRef>
+          <a:effectRef idx="0">
+            <a:schemeClr val="accent1"/>
+          </a:effectRef>
+          <a:fontRef idx="minor">
+            <a:schemeClr val="lt1"/>
+          </a:fontRef>
+        </p:style>
+        <p:txBody>
+          <a:bodyPr rtlCol="0" anchor="ctr" wrap="square" lIns="54864" rIns="54864" tIns="27432" bIns="27432"/>
+          <a:lstStyle/>
+          <a:p>
+            <a:pPr algn="ctr"/>
+            <a:r>
+              <a:rPr sz="1800">
+                <a:solidFill>
+                  <a:srgbClr val="19324F"/>
+                </a:solidFill>
+                <a:latin typeface="Aptos"/>
+              </a:rPr>
+              <a:t>Projection</a:t>
+            </a:r>
+          </a:p>
+          <a:p>
+            <a:pPr algn="ctr"/>
+            <a:r>
+              <a:rPr sz="1800">
+                <a:solidFill>
+                  <a:srgbClr val="19324F"/>
+                </a:solidFill>
+                <a:latin typeface="Aptos"/>
+              </a:rPr>
+              <a:t>1,024 → 128</a:t>
+            </a:r>
+          </a:p>
+        </p:txBody>
+      </p:sp>
+      <p:sp>
+        <p:nvSpPr>
+          <p:cNvPr id="138" name="Rounded Rectangle 137"/>
+          <p:cNvSpPr/>
+          <p:nvPr/>
+        </p:nvSpPr>
+        <p:spPr>
+          <a:xfrm>
+            <a:off x="11430000" y="3538728"/>
+            <a:ext cx="4846320" cy="667512"/>
+          </a:xfrm>
+          <a:prstGeom prst="roundRect">
+            <a:avLst>
+              <a:gd name="adj" fmla="val 7534"/>
+            </a:avLst>
+          </a:prstGeom>
+          <a:solidFill>
+            <a:srgbClr val="FFFFFF"/>
+          </a:solidFill>
+          <a:ln w="14604">
+            <a:solidFill>
+              <a:srgbClr val="008B91"/>
+            </a:solidFill>
+          </a:ln>
+          <a:effectLst/>
+        </p:spPr>
+        <p:style>
+          <a:lnRef idx="1">
+            <a:schemeClr val="accent1"/>
+          </a:lnRef>
+          <a:fillRef idx="3">
+            <a:schemeClr val="accent1"/>
+          </a:fillRef>
+          <a:effectRef idx="0">
+            <a:schemeClr val="accent1"/>
+          </a:effectRef>
+          <a:fontRef idx="minor">
+            <a:schemeClr val="lt1"/>
+          </a:fontRef>
+        </p:style>
+        <p:txBody>
+          <a:bodyPr rtlCol="0" anchor="ctr" wrap="square" lIns="54864" rIns="54864" tIns="27432" bIns="27432"/>
+          <a:lstStyle/>
+          <a:p>
+            <a:pPr algn="ctr"/>
+            <a:r>
+              <a:rPr sz="1700">
+                <a:solidFill>
+                  <a:srgbClr val="19324F"/>
+                </a:solidFill>
+                <a:latin typeface="Aptos"/>
+              </a:rPr>
+              <a:t>Shared projection: 1,024 → 128</a:t>
+            </a:r>
+          </a:p>
+          <a:p>
+            <a:pPr algn="ctr"/>
+            <a:r>
+              <a:rPr sz="1700">
+                <a:solidFill>
+                  <a:srgbClr val="19324F"/>
+                </a:solidFill>
+                <a:latin typeface="Aptos"/>
+              </a:rPr>
+              <a:t>+ entity / action node-type embedding</a:t>
+            </a:r>
+          </a:p>
+        </p:txBody>
+      </p:sp>
+      <p:sp>
+        <p:nvSpPr>
+          <p:cNvPr id="139" name="Rounded Rectangle 138"/>
+          <p:cNvSpPr/>
+          <p:nvPr/>
+        </p:nvSpPr>
+        <p:spPr>
+          <a:xfrm>
+            <a:off x="16550640" y="3538728"/>
+            <a:ext cx="2286000" cy="667512"/>
+          </a:xfrm>
+          <a:prstGeom prst="roundRect">
+            <a:avLst>
+              <a:gd name="adj" fmla="val 7534"/>
+            </a:avLst>
+          </a:prstGeom>
+          <a:solidFill>
+            <a:srgbClr val="FFFFFF"/>
+          </a:solidFill>
+          <a:ln w="14604">
+            <a:solidFill>
+              <a:srgbClr val="008B91"/>
+            </a:solidFill>
+          </a:ln>
+          <a:effectLst/>
+        </p:spPr>
+        <p:style>
+          <a:lnRef idx="1">
+            <a:schemeClr val="accent1"/>
+          </a:lnRef>
+          <a:fillRef idx="3">
+            <a:schemeClr val="accent1"/>
+          </a:fillRef>
+          <a:effectRef idx="0">
+            <a:schemeClr val="accent1"/>
+          </a:effectRef>
+          <a:fontRef idx="minor">
+            <a:schemeClr val="lt1"/>
+          </a:fontRef>
+        </p:style>
+        <p:txBody>
+          <a:bodyPr rtlCol="0" anchor="ctr" wrap="square" lIns="54864" rIns="54864" tIns="27432" bIns="27432"/>
+          <a:lstStyle/>
+          <a:p>
+            <a:pPr algn="ctr"/>
+            <a:r>
+              <a:rPr sz="1800">
+                <a:solidFill>
+                  <a:srgbClr val="19324F"/>
+                </a:solidFill>
+                <a:latin typeface="Aptos"/>
+              </a:rPr>
+              <a:t>Projection</a:t>
+            </a:r>
+          </a:p>
+          <a:p>
+            <a:pPr algn="ctr"/>
+            <a:r>
+              <a:rPr sz="1800">
+                <a:solidFill>
+                  <a:srgbClr val="19324F"/>
+                </a:solidFill>
+                <a:latin typeface="Aptos"/>
+              </a:rPr>
+              <a:t>1,024 → 128</a:t>
+            </a:r>
+          </a:p>
+        </p:txBody>
+      </p:sp>
+      <p:sp>
+        <p:nvSpPr>
+          <p:cNvPr id="140" name="Rounded Rectangle 139"/>
+          <p:cNvSpPr/>
+          <p:nvPr/>
+        </p:nvSpPr>
+        <p:spPr>
+          <a:xfrm>
+            <a:off x="11430000" y="4462272"/>
+            <a:ext cx="4846320" cy="667512"/>
+          </a:xfrm>
+          <a:prstGeom prst="roundRect">
+            <a:avLst>
+              <a:gd name="adj" fmla="val 7534"/>
+            </a:avLst>
+          </a:prstGeom>
+          <a:solidFill>
+            <a:srgbClr val="FFFFFF"/>
+          </a:solidFill>
+          <a:ln w="14604">
+            <a:solidFill>
+              <a:srgbClr val="008B91"/>
+            </a:solidFill>
+          </a:ln>
+          <a:effectLst/>
+        </p:spPr>
+        <p:style>
+          <a:lnRef idx="1">
+            <a:schemeClr val="accent1"/>
+          </a:lnRef>
+          <a:fillRef idx="3">
+            <a:schemeClr val="accent1"/>
+          </a:fillRef>
+          <a:effectRef idx="0">
+            <a:schemeClr val="accent1"/>
+          </a:effectRef>
+          <a:fontRef idx="minor">
+            <a:schemeClr val="lt1"/>
+          </a:fontRef>
+        </p:style>
+        <p:txBody>
+          <a:bodyPr rtlCol="0" anchor="ctr" wrap="square" lIns="54864" rIns="54864" tIns="27432" bIns="27432"/>
+          <a:lstStyle/>
+          <a:p>
+            <a:pPr algn="ctr"/>
+            <a:r>
+              <a:rPr sz="1900">
+                <a:solidFill>
+                  <a:srgbClr val="19324F"/>
+                </a:solidFill>
+                <a:latin typeface="Aptos"/>
+              </a:rPr>
+              <a:t>Role Graph Encoder</a:t>
+            </a:r>
+          </a:p>
+          <a:p>
+            <a:pPr algn="ctr"/>
+            <a:r>
+              <a:rPr sz="1900">
+                <a:solidFill>
+                  <a:srgbClr val="19324F"/>
+                </a:solidFill>
+                <a:latin typeface="Aptos"/>
+              </a:rPr>
+              <a:t>1 layer · hidden 128</a:t>
+            </a:r>
+          </a:p>
+        </p:txBody>
+      </p:sp>
+      <p:cxnSp>
+        <p:nvCxnSpPr>
+          <p:cNvPr id="141" name="Connector 140"/>
+          <p:cNvCxnSpPr/>
+          <p:nvPr/>
+        </p:nvCxnSpPr>
+        <p:spPr>
+          <a:xfrm>
+            <a:off x="13853160" y="4206240"/>
+            <a:ext cx="0" cy="256032"/>
+          </a:xfrm>
+          <a:prstGeom prst="line">
+            <a:avLst/>
+          </a:prstGeom>
+          <a:ln w="15875">
+            <a:solidFill>
+              <a:srgbClr val="008B91"/>
+            </a:solidFill>
+            <a:tailEnd type="triangle" w="sm" len="sm"/>
+          </a:ln>
+          <a:effectLst/>
+        </p:spPr>
+        <p:style>
+          <a:lnRef idx="2">
+            <a:schemeClr val="accent1"/>
+          </a:lnRef>
+          <a:fillRef idx="0">
+            <a:schemeClr val="accent1"/>
+          </a:fillRef>
+          <a:effectRef idx="0">
+            <a:schemeClr val="accent1"/>
+          </a:effectRef>
+          <a:fontRef idx="minor">
+            <a:schemeClr val="tx1"/>
+          </a:fontRef>
+        </p:style>
+      </p:cxnSp>
+      <p:sp>
+        <p:nvSpPr>
+          <p:cNvPr id="142" name="Rounded Rectangle 141"/>
+          <p:cNvSpPr/>
+          <p:nvPr/>
+        </p:nvSpPr>
+        <p:spPr>
+          <a:xfrm>
+            <a:off x="11430000" y="5394960"/>
+            <a:ext cx="2286000" cy="502920"/>
+          </a:xfrm>
+          <a:prstGeom prst="roundRect">
+            <a:avLst>
+              <a:gd name="adj" fmla="val 10000"/>
+            </a:avLst>
+          </a:prstGeom>
+          <a:solidFill>
+            <a:srgbClr val="FFFFFF"/>
+          </a:solidFill>
+          <a:ln w="14604">
+            <a:solidFill>
+              <a:srgbClr val="008B91"/>
+            </a:solidFill>
+          </a:ln>
+          <a:effectLst/>
+        </p:spPr>
+        <p:style>
+          <a:lnRef idx="1">
+            <a:schemeClr val="accent1"/>
+          </a:lnRef>
+          <a:fillRef idx="3">
+            <a:schemeClr val="accent1"/>
+          </a:fillRef>
+          <a:effectRef idx="0">
+            <a:schemeClr val="accent1"/>
+          </a:effectRef>
+          <a:fontRef idx="minor">
+            <a:schemeClr val="lt1"/>
+          </a:fontRef>
+        </p:style>
+        <p:txBody>
+          <a:bodyPr rtlCol="0" anchor="ctr" wrap="square" lIns="54864" rIns="54864" tIns="27432" bIns="27432"/>
+          <a:lstStyle/>
+          <a:p>
+            <a:pPr algn="ctr"/>
+            <a:r>
+              <a:rPr sz="1700">
+                <a:solidFill>
+                  <a:srgbClr val="19324F"/>
+                </a:solidFill>
+                <a:latin typeface="Aptos"/>
+              </a:rPr>
+              <a:t>Entity mean: 128</a:t>
+            </a:r>
+          </a:p>
+        </p:txBody>
+      </p:sp>
+      <p:cxnSp>
+        <p:nvCxnSpPr>
+          <p:cNvPr id="143" name="Connector 142"/>
+          <p:cNvCxnSpPr/>
+          <p:nvPr/>
+        </p:nvCxnSpPr>
+        <p:spPr>
+          <a:xfrm>
+            <a:off x="12573000" y="5129784"/>
+            <a:ext cx="0" cy="265176"/>
+          </a:xfrm>
+          <a:prstGeom prst="line">
+            <a:avLst/>
+          </a:prstGeom>
+          <a:ln w="15875">
+            <a:solidFill>
+              <a:srgbClr val="008B91"/>
+            </a:solidFill>
+            <a:tailEnd type="triangle" w="sm" len="sm"/>
+          </a:ln>
+          <a:effectLst/>
+        </p:spPr>
+        <p:style>
+          <a:lnRef idx="2">
+            <a:schemeClr val="accent1"/>
+          </a:lnRef>
+          <a:fillRef idx="0">
+            <a:schemeClr val="accent1"/>
+          </a:fillRef>
+          <a:effectRef idx="0">
+            <a:schemeClr val="accent1"/>
+          </a:effectRef>
+          <a:fontRef idx="minor">
+            <a:schemeClr val="tx1"/>
+          </a:fontRef>
+        </p:style>
+      </p:cxnSp>
+      <p:cxnSp>
+        <p:nvCxnSpPr>
+          <p:cNvPr id="144" name="Connector 143"/>
+          <p:cNvCxnSpPr/>
+          <p:nvPr/>
+        </p:nvCxnSpPr>
+        <p:spPr>
+          <a:xfrm>
+            <a:off x="12573000" y="5897880"/>
+            <a:ext cx="0" cy="155448"/>
+          </a:xfrm>
+          <a:prstGeom prst="line">
+            <a:avLst/>
+          </a:prstGeom>
+          <a:ln w="15875">
+            <a:solidFill>
+              <a:srgbClr val="008B91"/>
+            </a:solidFill>
+          </a:ln>
+          <a:effectLst/>
+        </p:spPr>
+        <p:style>
+          <a:lnRef idx="2">
+            <a:schemeClr val="accent1"/>
+          </a:lnRef>
+          <a:fillRef idx="0">
+            <a:schemeClr val="accent1"/>
+          </a:fillRef>
+          <a:effectRef idx="0">
+            <a:schemeClr val="accent1"/>
+          </a:effectRef>
+          <a:fontRef idx="minor">
+            <a:schemeClr val="tx1"/>
+          </a:fontRef>
+        </p:style>
+      </p:cxnSp>
+      <p:sp>
+        <p:nvSpPr>
+          <p:cNvPr id="145" name="Rounded Rectangle 144"/>
+          <p:cNvSpPr/>
+          <p:nvPr/>
+        </p:nvSpPr>
+        <p:spPr>
+          <a:xfrm>
+            <a:off x="13990320" y="5394960"/>
+            <a:ext cx="2286000" cy="502920"/>
+          </a:xfrm>
+          <a:prstGeom prst="roundRect">
+            <a:avLst>
+              <a:gd name="adj" fmla="val 10000"/>
+            </a:avLst>
+          </a:prstGeom>
+          <a:solidFill>
+            <a:srgbClr val="FFFFFF"/>
+          </a:solidFill>
+          <a:ln w="14604">
+            <a:solidFill>
+              <a:srgbClr val="008B91"/>
+            </a:solidFill>
+          </a:ln>
+          <a:effectLst/>
+        </p:spPr>
+        <p:style>
+          <a:lnRef idx="1">
+            <a:schemeClr val="accent1"/>
+          </a:lnRef>
+          <a:fillRef idx="3">
+            <a:schemeClr val="accent1"/>
+          </a:fillRef>
+          <a:effectRef idx="0">
+            <a:schemeClr val="accent1"/>
+          </a:effectRef>
+          <a:fontRef idx="minor">
+            <a:schemeClr val="lt1"/>
+          </a:fontRef>
+        </p:style>
+        <p:txBody>
+          <a:bodyPr rtlCol="0" anchor="ctr" wrap="square" lIns="54864" rIns="54864" tIns="27432" bIns="27432"/>
+          <a:lstStyle/>
+          <a:p>
+            <a:pPr algn="ctr"/>
+            <a:r>
+              <a:rPr sz="1700">
+                <a:solidFill>
+                  <a:srgbClr val="19324F"/>
+                </a:solidFill>
+                <a:latin typeface="Aptos"/>
+              </a:rPr>
+              <a:t>Action mean: 128</a:t>
+            </a:r>
+          </a:p>
+        </p:txBody>
+      </p:sp>
+      <p:cxnSp>
+        <p:nvCxnSpPr>
+          <p:cNvPr id="146" name="Connector 145"/>
+          <p:cNvCxnSpPr/>
+          <p:nvPr/>
+        </p:nvCxnSpPr>
+        <p:spPr>
+          <a:xfrm>
+            <a:off x="15133320" y="5129784"/>
+            <a:ext cx="0" cy="265176"/>
+          </a:xfrm>
+          <a:prstGeom prst="line">
+            <a:avLst/>
+          </a:prstGeom>
+          <a:ln w="15875">
+            <a:solidFill>
+              <a:srgbClr val="008B91"/>
+            </a:solidFill>
+            <a:tailEnd type="triangle" w="sm" len="sm"/>
+          </a:ln>
+          <a:effectLst/>
+        </p:spPr>
+        <p:style>
+          <a:lnRef idx="2">
+            <a:schemeClr val="accent1"/>
+          </a:lnRef>
+          <a:fillRef idx="0">
+            <a:schemeClr val="accent1"/>
+          </a:fillRef>
+          <a:effectRef idx="0">
+            <a:schemeClr val="accent1"/>
+          </a:effectRef>
+          <a:fontRef idx="minor">
+            <a:schemeClr val="tx1"/>
+          </a:fontRef>
+        </p:style>
+      </p:cxnSp>
+      <p:cxnSp>
+        <p:nvCxnSpPr>
+          <p:cNvPr id="147" name="Connector 146"/>
+          <p:cNvCxnSpPr/>
+          <p:nvPr/>
+        </p:nvCxnSpPr>
+        <p:spPr>
+          <a:xfrm>
+            <a:off x="15133320" y="5897880"/>
+            <a:ext cx="0" cy="155448"/>
+          </a:xfrm>
+          <a:prstGeom prst="line">
+            <a:avLst/>
+          </a:prstGeom>
+          <a:ln w="15875">
+            <a:solidFill>
+              <a:srgbClr val="008B91"/>
+            </a:solidFill>
+          </a:ln>
+          <a:effectLst/>
+        </p:spPr>
+        <p:style>
+          <a:lnRef idx="2">
+            <a:schemeClr val="accent1"/>
+          </a:lnRef>
+          <a:fillRef idx="0">
+            <a:schemeClr val="accent1"/>
+          </a:fillRef>
+          <a:effectRef idx="0">
+            <a:schemeClr val="accent1"/>
+          </a:effectRef>
+          <a:fontRef idx="minor">
+            <a:schemeClr val="tx1"/>
+          </a:fontRef>
+        </p:style>
+      </p:cxnSp>
+      <p:cxnSp>
+        <p:nvCxnSpPr>
+          <p:cNvPr id="148" name="Connector 147"/>
+          <p:cNvCxnSpPr/>
+          <p:nvPr/>
+        </p:nvCxnSpPr>
+        <p:spPr>
+          <a:xfrm>
+            <a:off x="17693640" y="4206240"/>
+            <a:ext cx="0" cy="1847088"/>
+          </a:xfrm>
+          <a:prstGeom prst="line">
+            <a:avLst/>
+          </a:prstGeom>
+          <a:ln w="15875">
+            <a:solidFill>
+              <a:srgbClr val="008B91"/>
+            </a:solidFill>
+          </a:ln>
+          <a:effectLst/>
+        </p:spPr>
+        <p:style>
+          <a:lnRef idx="2">
+            <a:schemeClr val="accent1"/>
+          </a:lnRef>
+          <a:fillRef idx="0">
+            <a:schemeClr val="accent1"/>
+          </a:fillRef>
+          <a:effectRef idx="0">
+            <a:schemeClr val="accent1"/>
+          </a:effectRef>
+          <a:fontRef idx="minor">
+            <a:schemeClr val="tx1"/>
+          </a:fontRef>
+        </p:style>
+      </p:cxnSp>
+      <p:cxnSp>
+        <p:nvCxnSpPr>
+          <p:cNvPr id="149" name="Connector 148"/>
+          <p:cNvCxnSpPr/>
+          <p:nvPr/>
+        </p:nvCxnSpPr>
+        <p:spPr>
+          <a:xfrm>
+            <a:off x="12573000" y="6053328"/>
+            <a:ext cx="5120640" cy="0"/>
+          </a:xfrm>
+          <a:prstGeom prst="line">
+            <a:avLst/>
+          </a:prstGeom>
+          <a:ln w="15875">
+            <a:solidFill>
+              <a:srgbClr val="008B91"/>
+            </a:solidFill>
+          </a:ln>
+          <a:effectLst/>
+        </p:spPr>
+        <p:style>
+          <a:lnRef idx="2">
+            <a:schemeClr val="accent1"/>
+          </a:lnRef>
+          <a:fillRef idx="0">
+            <a:schemeClr val="accent1"/>
+          </a:fillRef>
+          <a:effectRef idx="0">
+            <a:schemeClr val="accent1"/>
+          </a:effectRef>
+          <a:fontRef idx="minor">
+            <a:schemeClr val="tx1"/>
+          </a:fontRef>
+        </p:style>
+      </p:cxnSp>
+      <p:cxnSp>
+        <p:nvCxnSpPr>
+          <p:cNvPr id="150" name="Connector 149"/>
+          <p:cNvCxnSpPr/>
+          <p:nvPr/>
+        </p:nvCxnSpPr>
+        <p:spPr>
+          <a:xfrm>
+            <a:off x="15133320" y="6053328"/>
+            <a:ext cx="0" cy="164592"/>
+          </a:xfrm>
+          <a:prstGeom prst="line">
+            <a:avLst/>
+          </a:prstGeom>
+          <a:ln w="15875">
+            <a:solidFill>
+              <a:srgbClr val="008B91"/>
+            </a:solidFill>
+            <a:tailEnd type="triangle" w="sm" len="sm"/>
+          </a:ln>
+          <a:effectLst/>
+        </p:spPr>
+        <p:style>
+          <a:lnRef idx="2">
+            <a:schemeClr val="accent1"/>
+          </a:lnRef>
+          <a:fillRef idx="0">
+            <a:schemeClr val="accent1"/>
+          </a:fillRef>
+          <a:effectRef idx="0">
+            <a:schemeClr val="accent1"/>
+          </a:effectRef>
+          <a:fontRef idx="minor">
+            <a:schemeClr val="tx1"/>
+          </a:fontRef>
+        </p:style>
+      </p:cxnSp>
+      <p:sp>
+        <p:nvSpPr>
+          <p:cNvPr id="151" name="Rounded Rectangle 150"/>
+          <p:cNvSpPr/>
+          <p:nvPr/>
+        </p:nvSpPr>
+        <p:spPr>
+          <a:xfrm>
+            <a:off x="11430000" y="6217920"/>
+            <a:ext cx="7406640" cy="521207"/>
+          </a:xfrm>
+          <a:prstGeom prst="roundRect">
+            <a:avLst>
+              <a:gd name="adj" fmla="val 9649"/>
+            </a:avLst>
+          </a:prstGeom>
+          <a:solidFill>
+            <a:srgbClr val="FFFFFF"/>
+          </a:solidFill>
+          <a:ln w="14604">
+            <a:solidFill>
+              <a:srgbClr val="008B91"/>
+            </a:solidFill>
+          </a:ln>
+          <a:effectLst/>
+        </p:spPr>
+        <p:style>
+          <a:lnRef idx="1">
+            <a:schemeClr val="accent1"/>
+          </a:lnRef>
+          <a:fillRef idx="3">
+            <a:schemeClr val="accent1"/>
+          </a:fillRef>
+          <a:effectRef idx="0">
+            <a:schemeClr val="accent1"/>
+          </a:effectRef>
+          <a:fontRef idx="minor">
+            <a:schemeClr val="lt1"/>
+          </a:fontRef>
+        </p:style>
+        <p:txBody>
+          <a:bodyPr rtlCol="0" anchor="ctr" wrap="square" lIns="54864" rIns="54864" tIns="27432" bIns="27432"/>
+          <a:lstStyle/>
+          <a:p>
+            <a:pPr algn="ctr"/>
+            <a:r>
+              <a:rPr sz="1700">
+                <a:solidFill>
+                  <a:srgbClr val="19324F"/>
+                </a:solidFill>
+                <a:latin typeface="Aptos"/>
+              </a:rPr>
+              <a:t>Concat: 384  [Entity; Action; Context]</a:t>
+            </a:r>
+          </a:p>
+        </p:txBody>
+      </p:sp>
+      <p:cxnSp>
+        <p:nvCxnSpPr>
+          <p:cNvPr id="152" name="Connector 151"/>
+          <p:cNvCxnSpPr/>
+          <p:nvPr/>
+        </p:nvCxnSpPr>
+        <p:spPr>
+          <a:xfrm>
+            <a:off x="15133320" y="6739128"/>
+            <a:ext cx="0" cy="219456"/>
+          </a:xfrm>
+          <a:prstGeom prst="line">
+            <a:avLst/>
+          </a:prstGeom>
+          <a:ln w="15875">
+            <a:solidFill>
+              <a:srgbClr val="008B91"/>
+            </a:solidFill>
+            <a:tailEnd type="triangle" w="sm" len="sm"/>
+          </a:ln>
+          <a:effectLst/>
+        </p:spPr>
+        <p:style>
+          <a:lnRef idx="2">
+            <a:schemeClr val="accent1"/>
+          </a:lnRef>
+          <a:fillRef idx="0">
+            <a:schemeClr val="accent1"/>
+          </a:fillRef>
+          <a:effectRef idx="0">
+            <a:schemeClr val="accent1"/>
+          </a:effectRef>
+          <a:fontRef idx="minor">
+            <a:schemeClr val="tx1"/>
+          </a:fontRef>
+        </p:style>
+      </p:cxnSp>
+      <p:sp>
+        <p:nvSpPr>
+          <p:cNvPr id="153" name="Rounded Rectangle 152"/>
+          <p:cNvSpPr/>
+          <p:nvPr/>
+        </p:nvSpPr>
+        <p:spPr>
+          <a:xfrm>
+            <a:off x="11430000" y="6958584"/>
+            <a:ext cx="7406640" cy="521207"/>
+          </a:xfrm>
+          <a:prstGeom prst="roundRect">
+            <a:avLst>
+              <a:gd name="adj" fmla="val 9649"/>
+            </a:avLst>
+          </a:prstGeom>
+          <a:solidFill>
+            <a:srgbClr val="FFFFFF"/>
+          </a:solidFill>
+          <a:ln w="14604">
+            <a:solidFill>
+              <a:srgbClr val="008B91"/>
+            </a:solidFill>
+          </a:ln>
+          <a:effectLst/>
+        </p:spPr>
+        <p:style>
+          <a:lnRef idx="1">
+            <a:schemeClr val="accent1"/>
+          </a:lnRef>
+          <a:fillRef idx="3">
+            <a:schemeClr val="accent1"/>
+          </a:fillRef>
+          <a:effectRef idx="0">
+            <a:schemeClr val="accent1"/>
+          </a:effectRef>
+          <a:fontRef idx="minor">
+            <a:schemeClr val="lt1"/>
+          </a:fontRef>
+        </p:style>
+        <p:txBody>
+          <a:bodyPr rtlCol="0" anchor="ctr" wrap="square" lIns="54864" rIns="54864" tIns="27432" bIns="27432"/>
+          <a:lstStyle/>
+          <a:p>
+            <a:pPr algn="ctr"/>
+            <a:r>
+              <a:rPr sz="1700">
+                <a:solidFill>
+                  <a:srgbClr val="19324F"/>
+                </a:solidFill>
+                <a:latin typeface="Aptos"/>
+              </a:rPr>
+              <a:t>Scene pooling: mean / attention  •  S × 384 → 384</a:t>
+            </a:r>
+          </a:p>
+        </p:txBody>
+      </p:sp>
+      <p:cxnSp>
+        <p:nvCxnSpPr>
+          <p:cNvPr id="155" name="Connector 154"/>
+          <p:cNvCxnSpPr/>
+          <p:nvPr/>
+        </p:nvCxnSpPr>
+        <p:spPr>
+          <a:xfrm>
+            <a:off x="15133320" y="7479792"/>
+            <a:ext cx="0" cy="146304"/>
+          </a:xfrm>
+          <a:prstGeom prst="line">
+            <a:avLst/>
+          </a:prstGeom>
+          <a:ln w="15875">
+            <a:solidFill>
+              <a:srgbClr val="008B91"/>
+            </a:solidFill>
+          </a:ln>
+          <a:effectLst/>
+        </p:spPr>
+        <p:style>
+          <a:lnRef idx="2">
+            <a:schemeClr val="accent1"/>
+          </a:lnRef>
+          <a:fillRef idx="0">
+            <a:schemeClr val="accent1"/>
+          </a:fillRef>
+          <a:effectRef idx="0">
+            <a:schemeClr val="accent1"/>
+          </a:effectRef>
+          <a:fontRef idx="minor">
+            <a:schemeClr val="tx1"/>
+          </a:fontRef>
+        </p:style>
+      </p:cxnSp>
+      <p:cxnSp>
+        <p:nvCxnSpPr>
+          <p:cNvPr id="156" name="Connector 155"/>
+          <p:cNvCxnSpPr/>
+          <p:nvPr/>
+        </p:nvCxnSpPr>
+        <p:spPr>
+          <a:xfrm>
+            <a:off x="10012680" y="7626096"/>
+            <a:ext cx="5120640" cy="0"/>
+          </a:xfrm>
+          <a:prstGeom prst="line">
+            <a:avLst/>
+          </a:prstGeom>
+          <a:ln w="15875">
+            <a:solidFill>
+              <a:srgbClr val="008B91"/>
+            </a:solidFill>
+          </a:ln>
+          <a:effectLst/>
+        </p:spPr>
+        <p:style>
+          <a:lnRef idx="2">
+            <a:schemeClr val="accent1"/>
+          </a:lnRef>
+          <a:fillRef idx="0">
+            <a:schemeClr val="accent1"/>
+          </a:fillRef>
+          <a:effectRef idx="0">
+            <a:schemeClr val="accent1"/>
+          </a:effectRef>
+          <a:fontRef idx="minor">
+            <a:schemeClr val="tx1"/>
+          </a:fontRef>
+        </p:style>
+      </p:cxnSp>
+      <p:cxnSp>
+        <p:nvCxnSpPr>
+          <p:cNvPr id="157" name="Connector 156"/>
+          <p:cNvCxnSpPr/>
+          <p:nvPr/>
+        </p:nvCxnSpPr>
+        <p:spPr>
+          <a:xfrm>
+            <a:off x="13853160" y="7626096"/>
+            <a:ext cx="0" cy="164592"/>
+          </a:xfrm>
+          <a:prstGeom prst="line">
+            <a:avLst/>
+          </a:prstGeom>
+          <a:ln w="15875">
+            <a:solidFill>
+              <a:srgbClr val="008B91"/>
+            </a:solidFill>
+            <a:tailEnd type="triangle" w="sm" len="sm"/>
+          </a:ln>
+          <a:effectLst/>
+        </p:spPr>
+        <p:style>
+          <a:lnRef idx="2">
+            <a:schemeClr val="accent1"/>
+          </a:lnRef>
+          <a:fillRef idx="0">
+            <a:schemeClr val="accent1"/>
+          </a:fillRef>
+          <a:effectRef idx="0">
+            <a:schemeClr val="accent1"/>
+          </a:effectRef>
+          <a:fontRef idx="minor">
+            <a:schemeClr val="tx1"/>
+          </a:fontRef>
+        </p:style>
+      </p:cxnSp>
+      <p:sp>
+        <p:nvSpPr>
+          <p:cNvPr id="158" name="Rounded Rectangle 157"/>
+          <p:cNvSpPr/>
+          <p:nvPr/>
+        </p:nvSpPr>
+        <p:spPr>
+          <a:xfrm>
+            <a:off x="8869680" y="7790688"/>
+            <a:ext cx="9966960" cy="585216"/>
+          </a:xfrm>
+          <a:prstGeom prst="roundRect">
+            <a:avLst>
+              <a:gd name="adj" fmla="val 8593"/>
+            </a:avLst>
+          </a:prstGeom>
+          <a:solidFill>
+            <a:srgbClr val="DFF2EF"/>
+          </a:solidFill>
+          <a:ln w="14604">
+            <a:solidFill>
+              <a:srgbClr val="008B91"/>
+            </a:solidFill>
+          </a:ln>
+          <a:effectLst/>
+        </p:spPr>
+        <p:style>
+          <a:lnRef idx="1">
+            <a:schemeClr val="accent1"/>
+          </a:lnRef>
+          <a:fillRef idx="3">
+            <a:schemeClr val="accent1"/>
+          </a:fillRef>
+          <a:effectRef idx="0">
+            <a:schemeClr val="accent1"/>
+          </a:effectRef>
+          <a:fontRef idx="minor">
+            <a:schemeClr val="lt1"/>
+          </a:fontRef>
+        </p:style>
+        <p:txBody>
+          <a:bodyPr rtlCol="0" anchor="ctr" wrap="square" lIns="54864" rIns="54864" tIns="27432" bIns="27432"/>
+          <a:lstStyle/>
+          <a:p>
+            <a:pPr algn="ctr"/>
+            <a:r>
+              <a:rPr sz="1800">
+                <a:solidFill>
+                  <a:srgbClr val="19324F"/>
+                </a:solidFill>
+                <a:latin typeface="Aptos"/>
+              </a:rPr>
+              <a:t>Concat: [Title 128; Video 384] = 512</a:t>
+            </a:r>
+          </a:p>
+        </p:txBody>
+      </p:sp>
+      <p:cxnSp>
+        <p:nvCxnSpPr>
+          <p:cNvPr id="159" name="Connector 158"/>
+          <p:cNvCxnSpPr/>
+          <p:nvPr/>
+        </p:nvCxnSpPr>
+        <p:spPr>
+          <a:xfrm>
+            <a:off x="10012680" y="4206240"/>
+            <a:ext cx="0" cy="3419856"/>
+          </a:xfrm>
+          <a:prstGeom prst="line">
+            <a:avLst/>
+          </a:prstGeom>
+          <a:ln w="15875">
+            <a:solidFill>
+              <a:srgbClr val="008B91"/>
+            </a:solidFill>
+          </a:ln>
+          <a:effectLst/>
+        </p:spPr>
+        <p:style>
+          <a:lnRef idx="2">
+            <a:schemeClr val="accent1"/>
+          </a:lnRef>
+          <a:fillRef idx="0">
+            <a:schemeClr val="accent1"/>
+          </a:fillRef>
+          <a:effectRef idx="0">
+            <a:schemeClr val="accent1"/>
+          </a:effectRef>
+          <a:fontRef idx="minor">
+            <a:schemeClr val="tx1"/>
+          </a:fontRef>
+        </p:style>
+      </p:cxnSp>
+      <p:cxnSp>
+        <p:nvCxnSpPr>
+          <p:cNvPr id="160" name="Connector 159"/>
+          <p:cNvCxnSpPr/>
+          <p:nvPr/>
+        </p:nvCxnSpPr>
+        <p:spPr>
+          <a:xfrm>
+            <a:off x="5984748" y="8375904"/>
+            <a:ext cx="0" cy="146304"/>
+          </a:xfrm>
+          <a:prstGeom prst="line">
+            <a:avLst/>
+          </a:prstGeom>
+          <a:ln w="15875">
+            <a:solidFill>
+              <a:srgbClr val="2465C4"/>
+            </a:solidFill>
+            <a:tailEnd type="triangle" w="sm" len="sm"/>
+          </a:ln>
+          <a:effectLst/>
+        </p:spPr>
+        <p:style>
+          <a:lnRef idx="2">
+            <a:schemeClr val="accent1"/>
+          </a:lnRef>
+          <a:fillRef idx="0">
+            <a:schemeClr val="accent1"/>
+          </a:fillRef>
+          <a:effectRef idx="0">
+            <a:schemeClr val="accent1"/>
+          </a:effectRef>
+          <a:fontRef idx="minor">
+            <a:schemeClr val="tx1"/>
+          </a:fontRef>
+        </p:style>
+      </p:cxnSp>
+      <p:sp>
+        <p:nvSpPr>
+          <p:cNvPr id="161" name="Rounded Rectangle 160"/>
+          <p:cNvSpPr/>
+          <p:nvPr/>
+        </p:nvSpPr>
+        <p:spPr>
+          <a:xfrm>
+            <a:off x="4087368" y="8522208"/>
+            <a:ext cx="3794760" cy="457200"/>
+          </a:xfrm>
+          <a:prstGeom prst="roundRect">
+            <a:avLst>
+              <a:gd name="adj" fmla="val 11000"/>
+            </a:avLst>
+          </a:prstGeom>
+          <a:solidFill>
+            <a:srgbClr val="E7F0FF"/>
+          </a:solidFill>
+          <a:ln w="14604">
+            <a:solidFill>
+              <a:srgbClr val="2465C4"/>
+            </a:solidFill>
+          </a:ln>
+          <a:effectLst/>
+        </p:spPr>
+        <p:style>
+          <a:lnRef idx="1">
+            <a:schemeClr val="accent1"/>
+          </a:lnRef>
+          <a:fillRef idx="3">
+            <a:schemeClr val="accent1"/>
+          </a:fillRef>
+          <a:effectRef idx="0">
+            <a:schemeClr val="accent1"/>
+          </a:effectRef>
+          <a:fontRef idx="minor">
+            <a:schemeClr val="lt1"/>
+          </a:fontRef>
+        </p:style>
+        <p:txBody>
+          <a:bodyPr rtlCol="0" anchor="ctr" tIns="27432" bIns="27432"/>
+          <a:lstStyle/>
+          <a:p>
+            <a:pPr algn="ctr"/>
+            <a:r>
+              <a:rPr sz="1800">
+                <a:solidFill>
+                  <a:srgbClr val="19324F"/>
+                </a:solidFill>
+                <a:latin typeface="Aptos"/>
+              </a:rPr>
+              <a:t>LayerNorm: 512</a:t>
+            </a:r>
+          </a:p>
+        </p:txBody>
+      </p:sp>
+      <p:cxnSp>
+        <p:nvCxnSpPr>
+          <p:cNvPr id="162" name="Connector 161"/>
+          <p:cNvCxnSpPr/>
+          <p:nvPr/>
+        </p:nvCxnSpPr>
+        <p:spPr>
+          <a:xfrm>
+            <a:off x="5984748" y="8979408"/>
+            <a:ext cx="0" cy="502920"/>
+          </a:xfrm>
+          <a:prstGeom prst="line">
+            <a:avLst/>
+          </a:prstGeom>
+          <a:ln w="15875">
+            <a:solidFill>
+              <a:srgbClr val="2465C4"/>
+            </a:solidFill>
+            <a:tailEnd type="triangle" w="sm" len="sm"/>
+          </a:ln>
+          <a:effectLst/>
+        </p:spPr>
+        <p:style>
+          <a:lnRef idx="2">
+            <a:schemeClr val="accent1"/>
+          </a:lnRef>
+          <a:fillRef idx="0">
+            <a:schemeClr val="accent1"/>
+          </a:fillRef>
+          <a:effectRef idx="0">
+            <a:schemeClr val="accent1"/>
+          </a:effectRef>
+          <a:fontRef idx="minor">
+            <a:schemeClr val="tx1"/>
+          </a:fontRef>
+        </p:style>
+      </p:cxnSp>
+      <p:cxnSp>
+        <p:nvCxnSpPr>
+          <p:cNvPr id="163" name="Connector 162"/>
+          <p:cNvCxnSpPr/>
+          <p:nvPr/>
+        </p:nvCxnSpPr>
+        <p:spPr>
+          <a:xfrm>
+            <a:off x="13853160" y="8375904"/>
+            <a:ext cx="0" cy="146304"/>
+          </a:xfrm>
+          <a:prstGeom prst="line">
+            <a:avLst/>
+          </a:prstGeom>
+          <a:ln w="15875">
+            <a:solidFill>
+              <a:srgbClr val="008B91"/>
+            </a:solidFill>
+            <a:tailEnd type="triangle" w="sm" len="sm"/>
+          </a:ln>
+          <a:effectLst/>
+        </p:spPr>
+        <p:style>
+          <a:lnRef idx="2">
+            <a:schemeClr val="accent1"/>
+          </a:lnRef>
+          <a:fillRef idx="0">
+            <a:schemeClr val="accent1"/>
+          </a:fillRef>
+          <a:effectRef idx="0">
+            <a:schemeClr val="accent1"/>
+          </a:effectRef>
+          <a:fontRef idx="minor">
+            <a:schemeClr val="tx1"/>
+          </a:fontRef>
+        </p:style>
+      </p:cxnSp>
+      <p:sp>
+        <p:nvSpPr>
+          <p:cNvPr id="164" name="Rounded Rectangle 163"/>
+          <p:cNvSpPr/>
+          <p:nvPr/>
+        </p:nvSpPr>
+        <p:spPr>
+          <a:xfrm>
+            <a:off x="8869680" y="8522208"/>
+            <a:ext cx="9966960" cy="457200"/>
+          </a:xfrm>
+          <a:prstGeom prst="roundRect">
+            <a:avLst>
+              <a:gd name="adj" fmla="val 11000"/>
+            </a:avLst>
+          </a:prstGeom>
+          <a:solidFill>
+            <a:srgbClr val="DFF2EF"/>
+          </a:solidFill>
+          <a:ln w="14604">
+            <a:solidFill>
+              <a:srgbClr val="008B91"/>
+            </a:solidFill>
+          </a:ln>
+          <a:effectLst/>
+        </p:spPr>
+        <p:style>
+          <a:lnRef idx="1">
+            <a:schemeClr val="accent1"/>
+          </a:lnRef>
+          <a:fillRef idx="3">
+            <a:schemeClr val="accent1"/>
+          </a:fillRef>
+          <a:effectRef idx="0">
+            <a:schemeClr val="accent1"/>
+          </a:effectRef>
+          <a:fontRef idx="minor">
+            <a:schemeClr val="lt1"/>
+          </a:fontRef>
+        </p:style>
+        <p:txBody>
+          <a:bodyPr rtlCol="0" anchor="ctr" tIns="27432" bIns="27432"/>
+          <a:lstStyle/>
+          <a:p>
+            <a:pPr algn="ctr"/>
+            <a:r>
+              <a:rPr sz="1800">
+                <a:solidFill>
+                  <a:srgbClr val="19324F"/>
+                </a:solidFill>
+                <a:latin typeface="Aptos"/>
+              </a:rPr>
+              <a:t>LayerNorm: 512</a:t>
+            </a:r>
+          </a:p>
+        </p:txBody>
+      </p:sp>
+      <p:cxnSp>
+        <p:nvCxnSpPr>
+          <p:cNvPr id="165" name="Connector 164"/>
+          <p:cNvCxnSpPr/>
+          <p:nvPr/>
+        </p:nvCxnSpPr>
+        <p:spPr>
+          <a:xfrm>
+            <a:off x="13853160" y="8979408"/>
+            <a:ext cx="0" cy="502920"/>
+          </a:xfrm>
+          <a:prstGeom prst="line">
+            <a:avLst/>
+          </a:prstGeom>
+          <a:ln w="15875">
+            <a:solidFill>
+              <a:srgbClr val="008B91"/>
+            </a:solidFill>
+            <a:tailEnd type="triangle" w="sm" len="sm"/>
+          </a:ln>
+          <a:effectLst/>
+        </p:spPr>
+        <p:style>
+          <a:lnRef idx="2">
+            <a:schemeClr val="accent1"/>
+          </a:lnRef>
+          <a:fillRef idx="0">
+            <a:schemeClr val="accent1"/>
+          </a:fillRef>
+          <a:effectRef idx="0">
+            <a:schemeClr val="accent1"/>
+          </a:effectRef>
+          <a:fontRef idx="minor">
+            <a:schemeClr val="tx1"/>
+          </a:fontRef>
+        </p:style>
+      </p:cxnSp>
+      <p:sp>
+        <p:nvSpPr>
+          <p:cNvPr id="166" name="Rounded Rectangle 165"/>
+          <p:cNvSpPr/>
+          <p:nvPr/>
+        </p:nvSpPr>
+        <p:spPr>
+          <a:xfrm>
+            <a:off x="502920" y="1298448"/>
+            <a:ext cx="2926080" cy="7973568"/>
+          </a:xfrm>
+          <a:prstGeom prst="roundRect">
+            <a:avLst>
+              <a:gd name="adj" fmla="val 4687"/>
+            </a:avLst>
+          </a:prstGeom>
+          <a:solidFill>
+            <a:srgbClr val="F5F6F7"/>
+          </a:solidFill>
+          <a:ln w="14604">
+            <a:solidFill>
+              <a:srgbClr val="AAB1B9"/>
+            </a:solidFill>
+          </a:ln>
+          <a:effectLst/>
+        </p:spPr>
+        <p:style>
+          <a:lnRef idx="1">
+            <a:schemeClr val="accent1"/>
+          </a:lnRef>
+          <a:fillRef idx="3">
+            <a:schemeClr val="accent1"/>
+          </a:fillRef>
+          <a:effectRef idx="0">
+            <a:schemeClr val="accent1"/>
+          </a:effectRef>
+          <a:fontRef idx="minor">
+            <a:schemeClr val="lt1"/>
+          </a:fontRef>
+        </p:style>
+        <p:txBody>
+          <a:bodyPr rtlCol="0" anchor="ctr" wrap="square" tIns="27432" bIns="27432"/>
+          <a:lstStyle/>
+          <a:p>
+            <a:pPr algn="ctr"/>
+            <a:r>
+              <a:rPr sz="1800">
+                <a:solidFill>
+                  <a:srgbClr val="19324F"/>
+                </a:solidFill>
+                <a:latin typeface="Aptos"/>
+              </a:rPr>
+              <a:t/>
+            </a:r>
+          </a:p>
+        </p:txBody>
+      </p:sp>
+      <p:sp>
+        <p:nvSpPr>
+          <p:cNvPr id="167" name="TextBox 166"/>
+          <p:cNvSpPr txBox="1"/>
+          <p:nvPr/>
+        </p:nvSpPr>
+        <p:spPr>
+          <a:xfrm>
+            <a:off x="731520" y="1444752"/>
+            <a:ext cx="2560320" cy="365760"/>
+          </a:xfrm>
+          <a:prstGeom prst="rect">
+            <a:avLst/>
+          </a:prstGeom>
+          <a:noFill/>
+        </p:spPr>
+        <p:txBody>
+          <a:bodyPr wrap="none" lIns="0" tIns="0">
+            <a:spAutoFit/>
+          </a:bodyPr>
+          <a:lstStyle/>
+          <a:p>
+            <a:r>
+              <a:rPr sz="2400" b="1">
+                <a:solidFill>
+                  <a:srgbClr val="626C78"/>
+                </a:solidFill>
+                <a:latin typeface="Aptos"/>
+              </a:rPr>
+              <a:t>Baseline</a:t>
+            </a:r>
+          </a:p>
+        </p:txBody>
+      </p:sp>
+      <p:sp>
+        <p:nvSpPr>
+          <p:cNvPr id="168" name="Rounded Rectangle 167"/>
+          <p:cNvSpPr/>
+          <p:nvPr/>
+        </p:nvSpPr>
+        <p:spPr>
+          <a:xfrm>
+            <a:off x="822960" y="2057400"/>
+            <a:ext cx="2286000" cy="685800"/>
+          </a:xfrm>
+          <a:prstGeom prst="roundRect">
+            <a:avLst>
+              <a:gd name="adj" fmla="val 7333"/>
+            </a:avLst>
+          </a:prstGeom>
+          <a:solidFill>
+            <a:srgbClr val="FFFFFF"/>
+          </a:solidFill>
+          <a:ln w="14604">
+            <a:solidFill>
+              <a:srgbClr val="AAB1B9"/>
+            </a:solidFill>
+          </a:ln>
+          <a:effectLst/>
+        </p:spPr>
+        <p:style>
+          <a:lnRef idx="1">
+            <a:schemeClr val="accent1"/>
+          </a:lnRef>
+          <a:fillRef idx="3">
+            <a:schemeClr val="accent1"/>
+          </a:fillRef>
+          <a:effectRef idx="0">
+            <a:schemeClr val="accent1"/>
+          </a:effectRef>
+          <a:fontRef idx="minor">
+            <a:schemeClr val="lt1"/>
+          </a:fontRef>
+        </p:style>
+        <p:txBody>
+          <a:bodyPr rtlCol="0" anchor="ctr" wrap="square" tIns="27432" bIns="27432"/>
+          <a:lstStyle/>
+          <a:p>
+            <a:pPr algn="ctr"/>
+            <a:r>
+              <a:rPr sz="1800">
+                <a:solidFill>
+                  <a:srgbClr val="19324F"/>
+                </a:solidFill>
+                <a:latin typeface="Aptos"/>
+              </a:rPr>
+              <a:t>Title</a:t>
+            </a:r>
+          </a:p>
+        </p:txBody>
+      </p:sp>
+      <p:sp>
+        <p:nvSpPr>
+          <p:cNvPr id="169" name="Rounded Rectangle 168"/>
+          <p:cNvSpPr/>
+          <p:nvPr/>
+        </p:nvSpPr>
+        <p:spPr>
+          <a:xfrm>
+            <a:off x="822960" y="3291840"/>
+            <a:ext cx="2286000" cy="731520"/>
+          </a:xfrm>
+          <a:prstGeom prst="roundRect">
+            <a:avLst>
+              <a:gd name="adj" fmla="val 6874"/>
+            </a:avLst>
+          </a:prstGeom>
+          <a:solidFill>
+            <a:srgbClr val="EEF0F2"/>
+          </a:solidFill>
+          <a:ln w="14604">
+            <a:solidFill>
+              <a:srgbClr val="AAB1B9"/>
+            </a:solidFill>
+          </a:ln>
+          <a:effectLst/>
+        </p:spPr>
+        <p:style>
+          <a:lnRef idx="1">
+            <a:schemeClr val="accent1"/>
+          </a:lnRef>
+          <a:fillRef idx="3">
+            <a:schemeClr val="accent1"/>
+          </a:fillRef>
+          <a:effectRef idx="0">
+            <a:schemeClr val="accent1"/>
+          </a:effectRef>
+          <a:fontRef idx="minor">
+            <a:schemeClr val="lt1"/>
+          </a:fontRef>
+        </p:style>
+        <p:txBody>
+          <a:bodyPr rtlCol="0" anchor="ctr" wrap="square" tIns="27432" bIns="27432"/>
+          <a:lstStyle/>
+          <a:p>
+            <a:pPr algn="ctr"/>
+            <a:r>
+              <a:rPr sz="1800">
+                <a:solidFill>
+                  <a:srgbClr val="19324F"/>
+                </a:solidFill>
+                <a:latin typeface="Aptos"/>
+              </a:rPr>
+              <a:t>BGE [frozen]</a:t>
+            </a:r>
+          </a:p>
+          <a:p>
+            <a:pPr algn="ctr"/>
+            <a:r>
+              <a:rPr sz="1800">
+                <a:solidFill>
+                  <a:srgbClr val="19324F"/>
+                </a:solidFill>
+                <a:latin typeface="Aptos"/>
+              </a:rPr>
+              <a:t>1,024</a:t>
+            </a:r>
+          </a:p>
+        </p:txBody>
+      </p:sp>
+      <p:sp>
+        <p:nvSpPr>
+          <p:cNvPr id="170" name="Rounded Rectangle 169"/>
+          <p:cNvSpPr/>
+          <p:nvPr/>
+        </p:nvSpPr>
+        <p:spPr>
+          <a:xfrm>
+            <a:off x="822960" y="4617720"/>
+            <a:ext cx="2286000" cy="731520"/>
+          </a:xfrm>
+          <a:prstGeom prst="roundRect">
+            <a:avLst>
+              <a:gd name="adj" fmla="val 6874"/>
+            </a:avLst>
+          </a:prstGeom>
+          <a:solidFill>
+            <a:srgbClr val="FFFFFF"/>
+          </a:solidFill>
+          <a:ln w="14604">
+            <a:solidFill>
+              <a:srgbClr val="AAB1B9"/>
+            </a:solidFill>
+          </a:ln>
+          <a:effectLst/>
+        </p:spPr>
+        <p:style>
+          <a:lnRef idx="1">
+            <a:schemeClr val="accent1"/>
+          </a:lnRef>
+          <a:fillRef idx="3">
+            <a:schemeClr val="accent1"/>
+          </a:fillRef>
+          <a:effectRef idx="0">
+            <a:schemeClr val="accent1"/>
+          </a:effectRef>
+          <a:fontRef idx="minor">
+            <a:schemeClr val="lt1"/>
+          </a:fontRef>
+        </p:style>
+        <p:txBody>
+          <a:bodyPr rtlCol="0" anchor="ctr" wrap="square" tIns="27432" bIns="27432"/>
+          <a:lstStyle/>
+          <a:p>
+            <a:pPr algn="ctr"/>
+            <a:r>
+              <a:rPr sz="1800">
+                <a:solidFill>
+                  <a:srgbClr val="19324F"/>
+                </a:solidFill>
+                <a:latin typeface="Aptos"/>
+              </a:rPr>
+              <a:t>Linear projection</a:t>
+            </a:r>
+          </a:p>
+          <a:p>
+            <a:pPr algn="ctr"/>
+            <a:r>
+              <a:rPr sz="1800">
+                <a:solidFill>
+                  <a:srgbClr val="19324F"/>
+                </a:solidFill>
+                <a:latin typeface="Aptos"/>
+              </a:rPr>
+              <a:t>1,024 → 512</a:t>
+            </a:r>
+          </a:p>
+        </p:txBody>
+      </p:sp>
+      <p:sp>
+        <p:nvSpPr>
+          <p:cNvPr id="171" name="Rounded Rectangle 170"/>
+          <p:cNvSpPr/>
+          <p:nvPr/>
+        </p:nvSpPr>
+        <p:spPr>
+          <a:xfrm>
+            <a:off x="822960" y="8522208"/>
+            <a:ext cx="2286000" cy="457200"/>
+          </a:xfrm>
+          <a:prstGeom prst="roundRect">
+            <a:avLst>
+              <a:gd name="adj" fmla="val 11000"/>
+            </a:avLst>
+          </a:prstGeom>
+          <a:solidFill>
+            <a:srgbClr val="E9ECEF"/>
+          </a:solidFill>
+          <a:ln w="14604">
+            <a:solidFill>
+              <a:srgbClr val="AAB1B9"/>
+            </a:solidFill>
+          </a:ln>
+          <a:effectLst/>
+        </p:spPr>
+        <p:style>
+          <a:lnRef idx="1">
+            <a:schemeClr val="accent1"/>
+          </a:lnRef>
+          <a:fillRef idx="3">
+            <a:schemeClr val="accent1"/>
+          </a:fillRef>
+          <a:effectRef idx="0">
+            <a:schemeClr val="accent1"/>
+          </a:effectRef>
+          <a:fontRef idx="minor">
+            <a:schemeClr val="lt1"/>
+          </a:fontRef>
+        </p:style>
+        <p:txBody>
+          <a:bodyPr rtlCol="0" anchor="ctr" wrap="square" tIns="27432" bIns="27432"/>
+          <a:lstStyle/>
+          <a:p>
+            <a:pPr algn="ctr"/>
+            <a:r>
+              <a:rPr sz="1800">
+                <a:solidFill>
+                  <a:srgbClr val="19324F"/>
+                </a:solidFill>
+                <a:latin typeface="Aptos"/>
+              </a:rPr>
+              <a:t>LayerNorm: 512</a:t>
+            </a:r>
+          </a:p>
+        </p:txBody>
+      </p:sp>
+      <p:cxnSp>
+        <p:nvCxnSpPr>
+          <p:cNvPr id="172" name="Connector 171"/>
+          <p:cNvCxnSpPr/>
+          <p:nvPr/>
+        </p:nvCxnSpPr>
+        <p:spPr>
+          <a:xfrm>
+            <a:off x="1965960" y="2743200"/>
+            <a:ext cx="0" cy="548640"/>
+          </a:xfrm>
+          <a:prstGeom prst="line">
+            <a:avLst/>
+          </a:prstGeom>
+          <a:ln w="15875">
+            <a:solidFill>
+              <a:srgbClr val="7F8995"/>
+            </a:solidFill>
+            <a:tailEnd type="triangle" w="sm" len="sm"/>
+          </a:ln>
+          <a:effectLst/>
+        </p:spPr>
+        <p:style>
+          <a:lnRef idx="2">
+            <a:schemeClr val="accent1"/>
+          </a:lnRef>
+          <a:fillRef idx="0">
+            <a:schemeClr val="accent1"/>
+          </a:fillRef>
+          <a:effectRef idx="0">
+            <a:schemeClr val="accent1"/>
+          </a:effectRef>
+          <a:fontRef idx="minor">
+            <a:schemeClr val="tx1"/>
+          </a:fontRef>
+        </p:style>
+      </p:cxnSp>
+      <p:cxnSp>
+        <p:nvCxnSpPr>
+          <p:cNvPr id="173" name="Connector 172"/>
+          <p:cNvCxnSpPr/>
+          <p:nvPr/>
+        </p:nvCxnSpPr>
+        <p:spPr>
+          <a:xfrm>
+            <a:off x="1965960" y="4023360"/>
+            <a:ext cx="0" cy="594360"/>
+          </a:xfrm>
+          <a:prstGeom prst="line">
+            <a:avLst/>
+          </a:prstGeom>
+          <a:ln w="15875">
+            <a:solidFill>
+              <a:srgbClr val="7F8995"/>
+            </a:solidFill>
+            <a:tailEnd type="triangle" w="sm" len="sm"/>
+          </a:ln>
+          <a:effectLst/>
+        </p:spPr>
+        <p:style>
+          <a:lnRef idx="2">
+            <a:schemeClr val="accent1"/>
+          </a:lnRef>
+          <a:fillRef idx="0">
+            <a:schemeClr val="accent1"/>
+          </a:fillRef>
+          <a:effectRef idx="0">
+            <a:schemeClr val="accent1"/>
+          </a:effectRef>
+          <a:fontRef idx="minor">
+            <a:schemeClr val="tx1"/>
+          </a:fontRef>
+        </p:style>
+      </p:cxnSp>
+      <p:cxnSp>
+        <p:nvCxnSpPr>
+          <p:cNvPr id="174" name="Connector 173"/>
+          <p:cNvCxnSpPr/>
+          <p:nvPr/>
+        </p:nvCxnSpPr>
+        <p:spPr>
+          <a:xfrm>
+            <a:off x="1965960" y="5349240"/>
+            <a:ext cx="0" cy="3172968"/>
+          </a:xfrm>
+          <a:prstGeom prst="line">
+            <a:avLst/>
+          </a:prstGeom>
+          <a:ln w="15875">
+            <a:solidFill>
+              <a:srgbClr val="7F8995"/>
+            </a:solidFill>
+            <a:tailEnd type="triangle" w="sm" len="sm"/>
+          </a:ln>
+          <a:effectLst/>
+        </p:spPr>
+        <p:style>
+          <a:lnRef idx="2">
+            <a:schemeClr val="accent1"/>
+          </a:lnRef>
+          <a:fillRef idx="0">
+            <a:schemeClr val="accent1"/>
+          </a:fillRef>
+          <a:effectRef idx="0">
+            <a:schemeClr val="accent1"/>
+          </a:effectRef>
+          <a:fontRef idx="minor">
+            <a:schemeClr val="tx1"/>
+          </a:fontRef>
+        </p:style>
+      </p:cxnSp>
+      <p:cxnSp>
+        <p:nvCxnSpPr>
+          <p:cNvPr id="175" name="Connector 174"/>
+          <p:cNvCxnSpPr/>
+          <p:nvPr/>
+        </p:nvCxnSpPr>
+        <p:spPr>
+          <a:xfrm>
+            <a:off x="1965960" y="8979408"/>
+            <a:ext cx="0" cy="502920"/>
+          </a:xfrm>
+          <a:prstGeom prst="line">
+            <a:avLst/>
+          </a:prstGeom>
+          <a:ln w="15875">
+            <a:solidFill>
+              <a:srgbClr val="7F8995"/>
+            </a:solidFill>
+            <a:tailEnd type="triangle" w="sm" len="sm"/>
+          </a:ln>
+          <a:effectLst/>
+        </p:spPr>
+        <p:style>
+          <a:lnRef idx="2">
+            <a:schemeClr val="accent1"/>
+          </a:lnRef>
+          <a:fillRef idx="0">
+            <a:schemeClr val="accent1"/>
+          </a:fillRef>
+          <a:effectRef idx="0">
+            <a:schemeClr val="accent1"/>
+          </a:effectRef>
+          <a:fontRef idx="minor">
+            <a:schemeClr val="tx1"/>
+          </a:fontRef>
+        </p:style>
+      </p:cxnSp>
     </p:spTree>
   </p:cSld>
   <p:clrMapOvr>

--- a/docs/design/recsys_diagram.pptx
+++ b/docs/design/recsys_diagram.pptx
@@ -6301,7 +6301,7 @@
                 </a:solidFill>
                 <a:latin typeface="Aptos"/>
               </a:rPr>
-              <a:t>Projection</a:t>
+              <a:t>Linear Projection</a:t>
             </a:r>
           </a:p>
           <a:p>
@@ -6327,7 +6327,7 @@
         <p:spPr>
           <a:xfrm>
             <a:off x="11430000" y="3538728"/>
-            <a:ext cx="4846320" cy="667512"/>
+            <a:ext cx="7406640" cy="667512"/>
           </a:xfrm>
           <a:prstGeom prst="roundRect">
             <a:avLst>
@@ -6370,33 +6370,33 @@
                 </a:solidFill>
                 <a:latin typeface="Aptos"/>
               </a:rPr>
-              <a:t>Shared projection: 1,024 → 128</a:t>
+              <a:t>Shared Linear Projection: 1,024 → 128</a:t>
             </a:r>
           </a:p>
           <a:p>
             <a:pPr algn="ctr"/>
             <a:r>
-              <a:rPr sz="1700">
+              <a:rPr sz="1500">
                 <a:solidFill>
                   <a:srgbClr val="19324F"/>
                 </a:solidFill>
                 <a:latin typeface="Aptos"/>
               </a:rPr>
-              <a:t>+ entity / action node-type embedding</a:t>
-            </a:r>
-          </a:p>
-        </p:txBody>
-      </p:sp>
-      <p:sp>
-        <p:nvSpPr>
-          <p:cNvPr id="139" name="Rounded Rectangle 138"/>
+              <a:t>Same weights; applied separately to Entities / Actions / Context</a:t>
+            </a:r>
+          </a:p>
+        </p:txBody>
+      </p:sp>
+      <p:sp>
+        <p:nvSpPr>
+          <p:cNvPr id="140" name="Rounded Rectangle 139"/>
           <p:cNvSpPr/>
           <p:nvPr/>
         </p:nvSpPr>
         <p:spPr>
           <a:xfrm>
-            <a:off x="16550640" y="3538728"/>
-            <a:ext cx="2286000" cy="667512"/>
+            <a:off x="11430000" y="4882896"/>
+            <a:ext cx="4846320" cy="384048"/>
           </a:xfrm>
           <a:prstGeom prst="roundRect">
             <a:avLst>
@@ -6433,43 +6433,31 @@
           <a:p>
             <a:pPr algn="ctr"/>
             <a:r>
-              <a:rPr sz="1800">
+              <a:rPr sz="1600">
                 <a:solidFill>
                   <a:srgbClr val="19324F"/>
                 </a:solidFill>
                 <a:latin typeface="Aptos"/>
               </a:rPr>
-              <a:t>Projection</a:t>
-            </a:r>
-          </a:p>
-          <a:p>
-            <a:pPr algn="ctr"/>
-            <a:r>
-              <a:rPr sz="1800">
-                <a:solidFill>
-                  <a:srgbClr val="19324F"/>
-                </a:solidFill>
-                <a:latin typeface="Aptos"/>
-              </a:rPr>
-              <a:t>1,024 → 128</a:t>
-            </a:r>
-          </a:p>
-        </p:txBody>
-      </p:sp>
-      <p:sp>
-        <p:nvSpPr>
-          <p:cNvPr id="140" name="Rounded Rectangle 139"/>
+              <a:t>Role Graph Encoder · 1 layer · hidden 128</a:t>
+            </a:r>
+          </a:p>
+        </p:txBody>
+      </p:sp>
+      <p:sp>
+        <p:nvSpPr>
+          <p:cNvPr id="142" name="Rounded Rectangle 141"/>
           <p:cNvSpPr/>
           <p:nvPr/>
         </p:nvSpPr>
         <p:spPr>
           <a:xfrm>
-            <a:off x="11430000" y="4462272"/>
-            <a:ext cx="4846320" cy="667512"/>
+            <a:off x="11430000" y="5394960"/>
+            <a:ext cx="2286000" cy="502920"/>
           </a:xfrm>
           <a:prstGeom prst="roundRect">
             <a:avLst>
-              <a:gd name="adj" fmla="val 7534"/>
+              <a:gd name="adj" fmla="val 10000"/>
             </a:avLst>
           </a:prstGeom>
           <a:solidFill>
@@ -6502,112 +6490,6 @@
           <a:p>
             <a:pPr algn="ctr"/>
             <a:r>
-              <a:rPr sz="1900">
-                <a:solidFill>
-                  <a:srgbClr val="19324F"/>
-                </a:solidFill>
-                <a:latin typeface="Aptos"/>
-              </a:rPr>
-              <a:t>Role Graph Encoder</a:t>
-            </a:r>
-          </a:p>
-          <a:p>
-            <a:pPr algn="ctr"/>
-            <a:r>
-              <a:rPr sz="1900">
-                <a:solidFill>
-                  <a:srgbClr val="19324F"/>
-                </a:solidFill>
-                <a:latin typeface="Aptos"/>
-              </a:rPr>
-              <a:t>1 layer · hidden 128</a:t>
-            </a:r>
-          </a:p>
-        </p:txBody>
-      </p:sp>
-      <p:cxnSp>
-        <p:nvCxnSpPr>
-          <p:cNvPr id="141" name="Connector 140"/>
-          <p:cNvCxnSpPr/>
-          <p:nvPr/>
-        </p:nvCxnSpPr>
-        <p:spPr>
-          <a:xfrm>
-            <a:off x="13853160" y="4206240"/>
-            <a:ext cx="0" cy="256032"/>
-          </a:xfrm>
-          <a:prstGeom prst="line">
-            <a:avLst/>
-          </a:prstGeom>
-          <a:ln w="15875">
-            <a:solidFill>
-              <a:srgbClr val="008B91"/>
-            </a:solidFill>
-            <a:tailEnd type="triangle" w="sm" len="sm"/>
-          </a:ln>
-          <a:effectLst/>
-        </p:spPr>
-        <p:style>
-          <a:lnRef idx="2">
-            <a:schemeClr val="accent1"/>
-          </a:lnRef>
-          <a:fillRef idx="0">
-            <a:schemeClr val="accent1"/>
-          </a:fillRef>
-          <a:effectRef idx="0">
-            <a:schemeClr val="accent1"/>
-          </a:effectRef>
-          <a:fontRef idx="minor">
-            <a:schemeClr val="tx1"/>
-          </a:fontRef>
-        </p:style>
-      </p:cxnSp>
-      <p:sp>
-        <p:nvSpPr>
-          <p:cNvPr id="142" name="Rounded Rectangle 141"/>
-          <p:cNvSpPr/>
-          <p:nvPr/>
-        </p:nvSpPr>
-        <p:spPr>
-          <a:xfrm>
-            <a:off x="11430000" y="5394960"/>
-            <a:ext cx="2286000" cy="502920"/>
-          </a:xfrm>
-          <a:prstGeom prst="roundRect">
-            <a:avLst>
-              <a:gd name="adj" fmla="val 10000"/>
-            </a:avLst>
-          </a:prstGeom>
-          <a:solidFill>
-            <a:srgbClr val="FFFFFF"/>
-          </a:solidFill>
-          <a:ln w="14604">
-            <a:solidFill>
-              <a:srgbClr val="008B91"/>
-            </a:solidFill>
-          </a:ln>
-          <a:effectLst/>
-        </p:spPr>
-        <p:style>
-          <a:lnRef idx="1">
-            <a:schemeClr val="accent1"/>
-          </a:lnRef>
-          <a:fillRef idx="3">
-            <a:schemeClr val="accent1"/>
-          </a:fillRef>
-          <a:effectRef idx="0">
-            <a:schemeClr val="accent1"/>
-          </a:effectRef>
-          <a:fontRef idx="minor">
-            <a:schemeClr val="lt1"/>
-          </a:fontRef>
-        </p:style>
-        <p:txBody>
-          <a:bodyPr rtlCol="0" anchor="ctr" wrap="square" lIns="54864" rIns="54864" tIns="27432" bIns="27432"/>
-          <a:lstStyle/>
-          <a:p>
-            <a:pPr algn="ctr"/>
-            <a:r>
               <a:rPr sz="1700">
                 <a:solidFill>
                   <a:srgbClr val="19324F"/>
@@ -6627,8 +6509,8 @@
         </p:nvCxnSpPr>
         <p:spPr>
           <a:xfrm>
-            <a:off x="12573000" y="5129784"/>
-            <a:ext cx="0" cy="265176"/>
+            <a:off x="12573000" y="5266944"/>
+            <a:ext cx="0" cy="128016"/>
           </a:xfrm>
           <a:prstGeom prst="line">
             <a:avLst/>
@@ -6757,8 +6639,8 @@
         </p:nvCxnSpPr>
         <p:spPr>
           <a:xfrm>
-            <a:off x="15133320" y="5129784"/>
-            <a:ext cx="0" cy="265176"/>
+            <a:off x="15133320" y="5266944"/>
+            <a:ext cx="0" cy="128016"/>
           </a:xfrm>
           <a:prstGeom prst="line">
             <a:avLst/>
@@ -8017,6 +7899,174 @@
           <a:ln w="15875">
             <a:solidFill>
               <a:srgbClr val="7F8995"/>
+            </a:solidFill>
+            <a:tailEnd type="triangle" w="sm" len="sm"/>
+          </a:ln>
+          <a:effectLst/>
+        </p:spPr>
+        <p:style>
+          <a:lnRef idx="2">
+            <a:schemeClr val="accent1"/>
+          </a:lnRef>
+          <a:fillRef idx="0">
+            <a:schemeClr val="accent1"/>
+          </a:fillRef>
+          <a:effectRef idx="0">
+            <a:schemeClr val="accent1"/>
+          </a:effectRef>
+          <a:fontRef idx="minor">
+            <a:schemeClr val="tx1"/>
+          </a:fontRef>
+        </p:style>
+      </p:cxnSp>
+      <p:sp>
+        <p:nvSpPr>
+          <p:cNvPr id="176" name="Shared projection branch"/>
+          <p:cNvSpPr/>
+          <p:nvPr/>
+        </p:nvSpPr>
+        <p:spPr>
+          <a:xfrm>
+            <a:off x="11430000" y="4343400"/>
+            <a:ext cx="4846320" cy="384048"/>
+          </a:xfrm>
+          <a:prstGeom prst="roundRect">
+            <a:avLst>
+              <a:gd name="adj" fmla="val 7534"/>
+            </a:avLst>
+          </a:prstGeom>
+          <a:solidFill>
+            <a:srgbClr val="FFFFFF"/>
+          </a:solidFill>
+          <a:ln w="14604">
+            <a:solidFill>
+              <a:srgbClr val="008B91"/>
+            </a:solidFill>
+          </a:ln>
+          <a:effectLst/>
+        </p:spPr>
+        <p:style>
+          <a:lnRef idx="1">
+            <a:schemeClr val="accent1"/>
+          </a:lnRef>
+          <a:fillRef idx="3">
+            <a:schemeClr val="accent1"/>
+          </a:fillRef>
+          <a:effectRef idx="0">
+            <a:schemeClr val="accent1"/>
+          </a:effectRef>
+          <a:fontRef idx="minor">
+            <a:schemeClr val="lt1"/>
+          </a:fontRef>
+        </p:style>
+        <p:txBody>
+          <a:bodyPr rtlCol="0" anchor="ctr" wrap="square" lIns="54864" rIns="54864" tIns="27432" bIns="27432"/>
+          <a:lstStyle/>
+          <a:p>
+            <a:pPr algn="ctr"/>
+            <a:r>
+              <a:rPr sz="1600">
+                <a:solidFill>
+                  <a:srgbClr val="19324F"/>
+                </a:solidFill>
+                <a:latin typeface="Aptos"/>
+              </a:rPr>
+              <a:t>Entity / action node-type embedding</a:t>
+            </a:r>
+          </a:p>
+        </p:txBody>
+      </p:sp>
+      <p:cxnSp>
+        <p:nvCxnSpPr>
+          <p:cNvPr id="177" name="Shared projection branch"/>
+          <p:cNvCxnSpPr/>
+          <p:nvPr/>
+        </p:nvCxnSpPr>
+        <p:spPr>
+          <a:xfrm>
+            <a:off x="12573000" y="4206240"/>
+            <a:ext cx="0" cy="137160"/>
+          </a:xfrm>
+          <a:prstGeom prst="line">
+            <a:avLst/>
+          </a:prstGeom>
+          <a:ln w="15875">
+            <a:solidFill>
+              <a:srgbClr val="008B91"/>
+            </a:solidFill>
+            <a:tailEnd type="triangle" w="sm" len="sm"/>
+          </a:ln>
+          <a:effectLst/>
+        </p:spPr>
+        <p:style>
+          <a:lnRef idx="2">
+            <a:schemeClr val="accent1"/>
+          </a:lnRef>
+          <a:fillRef idx="0">
+            <a:schemeClr val="accent1"/>
+          </a:fillRef>
+          <a:effectRef idx="0">
+            <a:schemeClr val="accent1"/>
+          </a:effectRef>
+          <a:fontRef idx="minor">
+            <a:schemeClr val="tx1"/>
+          </a:fontRef>
+        </p:style>
+      </p:cxnSp>
+      <p:cxnSp>
+        <p:nvCxnSpPr>
+          <p:cNvPr id="178" name="Shared projection branch"/>
+          <p:cNvCxnSpPr/>
+          <p:nvPr/>
+        </p:nvCxnSpPr>
+        <p:spPr>
+          <a:xfrm>
+            <a:off x="15133320" y="4206240"/>
+            <a:ext cx="0" cy="137160"/>
+          </a:xfrm>
+          <a:prstGeom prst="line">
+            <a:avLst/>
+          </a:prstGeom>
+          <a:ln w="15875">
+            <a:solidFill>
+              <a:srgbClr val="008B91"/>
+            </a:solidFill>
+            <a:tailEnd type="triangle" w="sm" len="sm"/>
+          </a:ln>
+          <a:effectLst/>
+        </p:spPr>
+        <p:style>
+          <a:lnRef idx="2">
+            <a:schemeClr val="accent1"/>
+          </a:lnRef>
+          <a:fillRef idx="0">
+            <a:schemeClr val="accent1"/>
+          </a:fillRef>
+          <a:effectRef idx="0">
+            <a:schemeClr val="accent1"/>
+          </a:effectRef>
+          <a:fontRef idx="minor">
+            <a:schemeClr val="tx1"/>
+          </a:fontRef>
+        </p:style>
+      </p:cxnSp>
+      <p:cxnSp>
+        <p:nvCxnSpPr>
+          <p:cNvPr id="179" name="Shared projection branch"/>
+          <p:cNvCxnSpPr/>
+          <p:nvPr/>
+        </p:nvCxnSpPr>
+        <p:spPr>
+          <a:xfrm>
+            <a:off x="13853160" y="4727448"/>
+            <a:ext cx="0" cy="155448"/>
+          </a:xfrm>
+          <a:prstGeom prst="line">
+            <a:avLst/>
+          </a:prstGeom>
+          <a:ln w="15875">
+            <a:solidFill>
+              <a:srgbClr val="008B91"/>
             </a:solidFill>
             <a:tailEnd type="triangle" w="sm" len="sm"/>
           </a:ln>

--- a/docs/design/recsys_diagram.pptx
+++ b/docs/design/recsys_diagram.pptx
@@ -502,7 +502,7 @@
           <a:lstStyle/>
           <a:p>
             <a:r>
-              <a:t>Implemented Graph architecture: sasrec-role-graph/v3. Role Graph Encoder depth is 1 layer. Entity and action texts are embedded separately using the same frozen BGE weights. Node features are independently projected using shared weights, with a learned type embedding added; they are not averaged before message passing. Role edges are actor, target, tool and location, in both directions. Context bypasses the Graph encoder and joins scene readout only. BGE features are frozen; downstream modules train jointly on recommendation loss. Mean pooling has no trainable parameters. Scene concat is [entity mean 128; action mean 128; projected Context 128]. Final fusion is [title 128; video 384]. No scene 384-to-512 projection and no 1536-to-512 fusion projection. Context and node projection share weights as in the current encoder. Text _meta concatenates title and summary strings before BGE. Without title, Text uses summary only. Both paths use positional embeddings, causal attention, and the existing SASRec output normalization before selecting the last valid position. Title-only meta uses the existing BGE 1024-to-512 model. Text and Graph do not share trained SASRec weights.</a:t>
+              <a:t>Text: sasrec-content-v8; Graph mean: sasrec-role-graph/v9. Baseline/Text Item and Graph Scene residual blocks use x + ReLU(Linear(x)), with one Linear 512-to-512. Graph projects Title, Entities, Actions and Context independently to 128. Actor, target, tool and location enrich Actions from Entities in one direction. Scene concat is [Title; Entity mean; Action mean; Context] at 512 dimensions; the Scene MLP precedes valid-scene mean pooling. Text encodes Title and Summary separately with frozen BGE Large. Missing videos and padding remain zero after the final video encoder. SASRec and its two-Linear GELU User MLP with LayerNorm remain unchanged.</a:t>
             </a:r>
           </a:p>
         </p:txBody>
@@ -5271,7 +5271,7 @@
                 </a:solidFill>
                 <a:latin typeface="Liberation Sans"/>
               </a:rPr>
-              <a:t>Item Residual MLP</a:t>
+              <a:t>1-layer Item Residual MLP</a:t>
             </a:r>
           </a:p>
           <a:p>
@@ -5290,7 +5290,7 @@
                 </a:solidFill>
                 <a:latin typeface="Liberation Sans"/>
               </a:rPr>
-              <a:t>512 → 512 → 512</a:t>
+              <a:t>512 → 512</a:t>
             </a:r>
           </a:p>
           <a:p>
@@ -5309,7 +5309,7 @@
                 </a:solidFill>
                 <a:latin typeface="Liberation Sans"/>
               </a:rPr>
-              <a:t>ReLU · no LayerNorm</a:t>
+              <a:t>ReLU</a:t>
             </a:r>
           </a:p>
         </p:txBody>
@@ -5661,7 +5661,7 @@
                 </a:solidFill>
                 <a:latin typeface="Liberation Sans"/>
               </a:rPr>
-              <a:t>Item Residual MLP</a:t>
+              <a:t>1-layer Item Residual MLP</a:t>
             </a:r>
           </a:p>
           <a:p>
@@ -5680,7 +5680,7 @@
                 </a:solidFill>
                 <a:latin typeface="Liberation Sans"/>
               </a:rPr>
-              <a:t>512 → 512 → 512</a:t>
+              <a:t>512 → 512</a:t>
             </a:r>
           </a:p>
           <a:p>
@@ -5699,7 +5699,7 @@
                 </a:solidFill>
                 <a:latin typeface="Liberation Sans"/>
               </a:rPr>
-              <a:t>ReLU · no LayerNorm</a:t>
+              <a:t>ReLU</a:t>
             </a:r>
           </a:p>
         </p:txBody>
@@ -8247,7 +8247,7 @@
                 </a:solidFill>
                 <a:latin typeface="Liberation Sans"/>
               </a:rPr>
-              <a:t>Scene Residual MLP</a:t>
+              <a:t>1-layer Scene Residual MLP</a:t>
             </a:r>
           </a:p>
           <a:p>
@@ -8266,7 +8266,7 @@
                 </a:solidFill>
                 <a:latin typeface="Liberation Sans"/>
               </a:rPr>
-              <a:t>512 → 512 → 512 · ReLU · no LayerNorm</a:t>
+              <a:t>512 → 512 · ReLU</a:t>
             </a:r>
           </a:p>
         </p:txBody>

--- a/docs/design/recsys_diagram.pptx
+++ b/docs/design/recsys_diagram.pptx
@@ -502,7 +502,7 @@
           <a:lstStyle/>
           <a:p>
             <a:r>
-              <a:t>Text: sasrec-content-v8; Graph mean: sasrec-role-graph/v9. Baseline/Text Item and Graph Scene residual blocks use x + ReLU(Linear(x)), with one Linear 512-to-512. Graph projects Title, Entities, Actions and Context independently to 128. Actor, target, tool and location enrich Actions from Entities in one direction. Scene concat is [Title; Entity mean; Action mean; Context] at 512 dimensions; the Scene MLP precedes valid-scene mean pooling. Text encodes Title and Summary separately with frozen BGE Large. Missing videos and padding remain zero after the final video encoder. SASRec and its two-Linear GELU User MLP with LayerNorm remain unchanged.</a:t>
+              <a:t>Baseline/Text Item and Graph Scene residual blocks use x + ReLU(Linear(x)), with one Linear 512-to-512. Graph projects Title, Entities, Actions and Context independently to 128. Actor, target, tool and place enrich Actions from Entities in one direction. Scene concat is [Title; Entity mean; Action mean; Context] at 512 dimensions; the Scene MLP precedes valid-scene mean pooling. Text encodes Title and Summary separately with frozen BGE Large. Missing videos and padding remain zero after the final video encoder. SASRec and its two-Linear GELU User MLP with LayerNorm remain unchanged.</a:t>
             </a:r>
           </a:p>
         </p:txBody>
@@ -7527,7 +7527,7 @@
                 </a:solidFill>
                 <a:latin typeface="Liberation Sans"/>
               </a:rPr>
-              <a:t>actor · target · tool · location</a:t>
+              <a:t>actor · target · tool · place</a:t>
             </a:r>
           </a:p>
           <a:p>
@@ -7546,7 +7546,7 @@
                 </a:solidFill>
                 <a:latin typeface="Liberation Sans"/>
               </a:rPr>
-              <a:t>640 → 128</a:t>
+              <a:t>Action + ReLU(Linear 640 → 128)</a:t>
             </a:r>
           </a:p>
         </p:txBody>
